--- a/Privacy_Preserving_Edge_Vision_Final.pptx
+++ b/Privacy_Preserving_Edge_Vision_Final.pptx
@@ -23,6 +23,7 @@
     <p:sldId id="271" r:id="rId22"/>
     <p:sldId id="272" r:id="rId23"/>
     <p:sldId id="273" r:id="rId24"/>
+    <p:sldId id="274" r:id="rId25"/>
   </p:sldIdLst>
   <p:sldSz cx="12188952" cy="6858000" type="screen4x3"/>
   <p:notesSz cx="6858000" cy="9144000"/>
@@ -4516,7 +4517,7 @@
                   <a:srgbClr val="FFFFFF"/>
                 </a:solidFill>
               </a:rPr>
-              <a:t>Two-Phase Training Curve — ResidualVAE (λ=2.0)</a:t>
+              <a:t>Information Bottleneck — Latent Dimension Ablation</a:t>
             </a:r>
           </a:p>
         </p:txBody>
@@ -4550,14 +4551,14 @@
                   <a:srgbClr val="A0B4C8"/>
                 </a:solidFill>
               </a:rPr>
-              <a:t>Phase 1: encoder learns utility (adversary OFF)  →  Phase 2: adversary activated</a:t>
+              <a:t>ResidualVAE · two-phase training (λ=2) · 13 epochs · 20k samples</a:t>
             </a:r>
           </a:p>
         </p:txBody>
       </p:sp>
       <p:pic>
         <p:nvPicPr>
-          <p:cNvPr id="6" name="Picture 5" descr="residualvae_training_curve.png"/>
+          <p:cNvPr id="6" name="Picture 5" descr="chart_bottleneck.png"/>
           <p:cNvPicPr>
             <a:picLocks noChangeAspect="1"/>
           </p:cNvPicPr>
@@ -4571,8 +4572,8 @@
         </p:blipFill>
         <p:spPr>
           <a:xfrm>
-            <a:off x="365760" y="1097280"/>
-            <a:ext cx="7498079" cy="5029200"/>
+            <a:off x="548640" y="1097280"/>
+            <a:ext cx="7315200" cy="4846320"/>
           </a:xfrm>
           <a:prstGeom prst="rect">
             <a:avLst/>
@@ -4588,7 +4589,7 @@
         <p:spPr>
           <a:xfrm>
             <a:off x="8092440" y="1143000"/>
-            <a:ext cx="3749039" cy="1261872"/>
+            <a:ext cx="3749039" cy="1225296"/>
           </a:xfrm>
           <a:prstGeom prst="rect">
             <a:avLst/>
@@ -4631,13 +4632,13 @@
         <p:spPr>
           <a:xfrm>
             <a:off x="8092440" y="1143000"/>
-            <a:ext cx="128016" cy="1261872"/>
+            <a:ext cx="128016" cy="1225296"/>
           </a:xfrm>
           <a:prstGeom prst="rect">
             <a:avLst/>
           </a:prstGeom>
           <a:solidFill>
-            <a:srgbClr val="2196F3"/>
+            <a:srgbClr val="E84A35"/>
           </a:solidFill>
           <a:ln>
             <a:noFill/>
@@ -4689,12 +4690,12 @@
           <a:p>
             <a:pPr algn="l"/>
             <a:r>
-              <a:rPr sz="1300" b="1" i="0">
-                <a:solidFill>
-                  <a:srgbClr val="2196F3"/>
-                </a:solidFill>
-              </a:rPr>
-              <a:t>Warmup (ep 1-3)</a:t>
+              <a:rPr sz="1200" b="1" i="0">
+                <a:solidFill>
+                  <a:srgbClr val="E84A35"/>
+                </a:solidFill>
+              </a:rPr>
+              <a:t>dim=256 (baseline)</a:t>
             </a:r>
           </a:p>
         </p:txBody>
@@ -4708,7 +4709,7 @@
         <p:spPr>
           <a:xfrm>
             <a:off x="8339327" y="1618488"/>
-            <a:ext cx="3383280" cy="694944"/>
+            <a:ext cx="3383280" cy="658368"/>
           </a:xfrm>
           <a:prstGeom prst="rect">
             <a:avLst/>
@@ -4723,12 +4724,12 @@
           <a:p>
             <a:pPr algn="l"/>
             <a:r>
-              <a:rPr sz="1100" b="0" i="0">
+              <a:rPr sz="1000" b="0" i="0">
                 <a:solidFill>
                   <a:srgbClr val="A0B4C8"/>
                 </a:solidFill>
               </a:rPr>
-              <a:t>Adversary scores below random chance (39%) — encoder is free to learn utility first</a:t>
+              <a:t>87.6% privacy — encoder has 256 slots, gender hides easily alongside smile.</a:t>
             </a:r>
           </a:p>
         </p:txBody>
@@ -4741,8 +4742,8 @@
         </p:nvSpPr>
         <p:spPr>
           <a:xfrm>
-            <a:off x="8092440" y="2532888"/>
-            <a:ext cx="3749039" cy="1261872"/>
+            <a:off x="8092440" y="2496312"/>
+            <a:ext cx="3749039" cy="1225296"/>
           </a:xfrm>
           <a:prstGeom prst="rect">
             <a:avLst/>
@@ -4784,8 +4785,162 @@
         </p:nvSpPr>
         <p:spPr>
           <a:xfrm>
-            <a:off x="8092440" y="2532888"/>
-            <a:ext cx="128016" cy="1261872"/>
+            <a:off x="8092440" y="2496312"/>
+            <a:ext cx="128016" cy="1225296"/>
+          </a:xfrm>
+          <a:prstGeom prst="rect">
+            <a:avLst/>
+          </a:prstGeom>
+          <a:solidFill>
+            <a:srgbClr val="FF9800"/>
+          </a:solidFill>
+          <a:ln>
+            <a:noFill/>
+          </a:ln>
+        </p:spPr>
+        <p:style>
+          <a:lnRef idx="1">
+            <a:schemeClr val="accent1"/>
+          </a:lnRef>
+          <a:fillRef idx="3">
+            <a:schemeClr val="accent1"/>
+          </a:fillRef>
+          <a:effectRef idx="2">
+            <a:schemeClr val="accent1"/>
+          </a:effectRef>
+          <a:fontRef idx="minor">
+            <a:schemeClr val="lt1"/>
+          </a:fontRef>
+        </p:style>
+        <p:txBody>
+          <a:bodyPr rtlCol="0" anchor="ctr"/>
+          <a:lstStyle/>
+          <a:p>
+            <a:pPr algn="ctr"/>
+          </a:p>
+        </p:txBody>
+      </p:sp>
+      <p:sp>
+        <p:nvSpPr>
+          <p:cNvPr id="13" name="TextBox 12"/>
+          <p:cNvSpPr txBox="1"/>
+          <p:nvPr/>
+        </p:nvSpPr>
+        <p:spPr>
+          <a:xfrm>
+            <a:off x="8339327" y="2587752"/>
+            <a:ext cx="3383280" cy="384048"/>
+          </a:xfrm>
+          <a:prstGeom prst="rect">
+            <a:avLst/>
+          </a:prstGeom>
+          <a:noFill/>
+        </p:spPr>
+        <p:txBody>
+          <a:bodyPr wrap="square">
+            <a:spAutoFit/>
+          </a:bodyPr>
+          <a:lstStyle/>
+          <a:p>
+            <a:pPr algn="l"/>
+            <a:r>
+              <a:rPr sz="1200" b="1" i="0">
+                <a:solidFill>
+                  <a:srgbClr val="FF9800"/>
+                </a:solidFill>
+              </a:rPr>
+              <a:t>dim=32 (tight bottleneck)</a:t>
+            </a:r>
+          </a:p>
+        </p:txBody>
+      </p:sp>
+      <p:sp>
+        <p:nvSpPr>
+          <p:cNvPr id="14" name="TextBox 13"/>
+          <p:cNvSpPr txBox="1"/>
+          <p:nvPr/>
+        </p:nvSpPr>
+        <p:spPr>
+          <a:xfrm>
+            <a:off x="8339327" y="2971800"/>
+            <a:ext cx="3383280" cy="658368"/>
+          </a:xfrm>
+          <a:prstGeom prst="rect">
+            <a:avLst/>
+          </a:prstGeom>
+          <a:noFill/>
+        </p:spPr>
+        <p:txBody>
+          <a:bodyPr wrap="square">
+            <a:spAutoFit/>
+          </a:bodyPr>
+          <a:lstStyle/>
+          <a:p>
+            <a:pPr algn="l"/>
+            <a:r>
+              <a:rPr sz="1000" b="0" i="0">
+                <a:solidFill>
+                  <a:srgbClr val="A0B4C8"/>
+                </a:solidFill>
+              </a:rPr>
+              <a:t>83.15% privacy ↓ — first real improvement. But utility fell to 75.1% — too aggressive.</a:t>
+            </a:r>
+          </a:p>
+        </p:txBody>
+      </p:sp>
+      <p:sp>
+        <p:nvSpPr>
+          <p:cNvPr id="15" name="Rectangle 14"/>
+          <p:cNvSpPr/>
+          <p:nvPr/>
+        </p:nvSpPr>
+        <p:spPr>
+          <a:xfrm>
+            <a:off x="8092440" y="3849624"/>
+            <a:ext cx="3749039" cy="1225296"/>
+          </a:xfrm>
+          <a:prstGeom prst="rect">
+            <a:avLst/>
+          </a:prstGeom>
+          <a:solidFill>
+            <a:srgbClr val="1C1C3A"/>
+          </a:solidFill>
+          <a:ln>
+            <a:noFill/>
+          </a:ln>
+        </p:spPr>
+        <p:style>
+          <a:lnRef idx="1">
+            <a:schemeClr val="accent1"/>
+          </a:lnRef>
+          <a:fillRef idx="3">
+            <a:schemeClr val="accent1"/>
+          </a:fillRef>
+          <a:effectRef idx="2">
+            <a:schemeClr val="accent1"/>
+          </a:effectRef>
+          <a:fontRef idx="minor">
+            <a:schemeClr val="lt1"/>
+          </a:fontRef>
+        </p:style>
+        <p:txBody>
+          <a:bodyPr rtlCol="0" anchor="ctr"/>
+          <a:lstStyle/>
+          <a:p>
+            <a:pPr algn="ctr"/>
+          </a:p>
+        </p:txBody>
+      </p:sp>
+      <p:sp>
+        <p:nvSpPr>
+          <p:cNvPr id="16" name="Rectangle 15"/>
+          <p:cNvSpPr/>
+          <p:nvPr/>
+        </p:nvSpPr>
+        <p:spPr>
+          <a:xfrm>
+            <a:off x="8092440" y="3849624"/>
+            <a:ext cx="128016" cy="1225296"/>
           </a:xfrm>
           <a:prstGeom prst="rect">
             <a:avLst/>
@@ -4821,13 +4976,13 @@
       </p:sp>
       <p:sp>
         <p:nvSpPr>
-          <p:cNvPr id="13" name="TextBox 12"/>
-          <p:cNvSpPr txBox="1"/>
-          <p:nvPr/>
-        </p:nvSpPr>
-        <p:spPr>
-          <a:xfrm>
-            <a:off x="8339327" y="2624328"/>
+          <p:cNvPr id="17" name="TextBox 16"/>
+          <p:cNvSpPr txBox="1"/>
+          <p:nvPr/>
+        </p:nvSpPr>
+        <p:spPr>
+          <a:xfrm>
+            <a:off x="8339327" y="3941063"/>
             <a:ext cx="3383280" cy="384048"/>
           </a:xfrm>
           <a:prstGeom prst="rect">
@@ -4843,26 +4998,26 @@
           <a:p>
             <a:pPr algn="l"/>
             <a:r>
-              <a:rPr sz="1300" b="1" i="0">
+              <a:rPr sz="1200" b="1" i="0">
                 <a:solidFill>
                   <a:srgbClr val="4CAF50"/>
                 </a:solidFill>
               </a:rPr>
-              <a:t>Epoch 4 jump</a:t>
-            </a:r>
-          </a:p>
-        </p:txBody>
-      </p:sp>
-      <p:sp>
-        <p:nvSpPr>
-          <p:cNvPr id="14" name="TextBox 13"/>
-          <p:cNvSpPr txBox="1"/>
-          <p:nvPr/>
-        </p:nvSpPr>
-        <p:spPr>
-          <a:xfrm>
-            <a:off x="8339327" y="3008376"/>
-            <a:ext cx="3383280" cy="694944"/>
+              <a:t>dim=64 (sweet spot?)</a:t>
+            </a:r>
+          </a:p>
+        </p:txBody>
+      </p:sp>
+      <p:sp>
+        <p:nvSpPr>
+          <p:cNvPr id="18" name="TextBox 17"/>
+          <p:cNvSpPr txBox="1"/>
+          <p:nvPr/>
+        </p:nvSpPr>
+        <p:spPr>
+          <a:xfrm>
+            <a:off x="8339327" y="4325112"/>
+            <a:ext cx="3383280" cy="658368"/>
           </a:xfrm>
           <a:prstGeom prst="rect">
             <a:avLst/>
@@ -4877,26 +5032,26 @@
           <a:p>
             <a:pPr algn="l"/>
             <a:r>
-              <a:rPr sz="1100" b="0" i="0">
+              <a:rPr sz="1000" b="0" i="0">
                 <a:solidFill>
                   <a:srgbClr val="A0B4C8"/>
                 </a:solidFill>
               </a:rPr>
-              <a:t>Utility accuracy jumps to 82% in one epoch — warmup pre-training worked</a:t>
-            </a:r>
-          </a:p>
-        </p:txBody>
-      </p:sp>
-      <p:sp>
-        <p:nvSpPr>
-          <p:cNvPr id="15" name="Rectangle 14"/>
+              <a:t>Running now. Prediction: utility recovers to ~82%, privacy stays suppressed ~84%.</a:t>
+            </a:r>
+          </a:p>
+        </p:txBody>
+      </p:sp>
+      <p:sp>
+        <p:nvSpPr>
+          <p:cNvPr id="19" name="Rectangle 18"/>
           <p:cNvSpPr/>
           <p:nvPr/>
         </p:nvSpPr>
         <p:spPr>
           <a:xfrm>
-            <a:off x="8092440" y="3922776"/>
-            <a:ext cx="3749039" cy="1261872"/>
+            <a:off x="8092440" y="5202936"/>
+            <a:ext cx="3749039" cy="1225296"/>
           </a:xfrm>
           <a:prstGeom prst="rect">
             <a:avLst/>
@@ -4932,20 +5087,20 @@
       </p:sp>
       <p:sp>
         <p:nvSpPr>
-          <p:cNvPr id="16" name="Rectangle 15"/>
+          <p:cNvPr id="20" name="Rectangle 19"/>
           <p:cNvSpPr/>
           <p:nvPr/>
         </p:nvSpPr>
         <p:spPr>
           <a:xfrm>
-            <a:off x="8092440" y="3922776"/>
-            <a:ext cx="128016" cy="1261872"/>
+            <a:off x="8092440" y="5202936"/>
+            <a:ext cx="128016" cy="1225296"/>
           </a:xfrm>
           <a:prstGeom prst="rect">
             <a:avLst/>
           </a:prstGeom>
           <a:solidFill>
-            <a:srgbClr val="FF9800"/>
+            <a:srgbClr val="F5A623"/>
           </a:solidFill>
           <a:ln>
             <a:noFill/>
@@ -4975,13 +5130,13 @@
       </p:sp>
       <p:sp>
         <p:nvSpPr>
-          <p:cNvPr id="17" name="TextBox 16"/>
-          <p:cNvSpPr txBox="1"/>
-          <p:nvPr/>
-        </p:nvSpPr>
-        <p:spPr>
-          <a:xfrm>
-            <a:off x="8339327" y="4014215"/>
+          <p:cNvPr id="21" name="TextBox 20"/>
+          <p:cNvSpPr txBox="1"/>
+          <p:nvPr/>
+        </p:nvSpPr>
+        <p:spPr>
+          <a:xfrm>
+            <a:off x="8339327" y="5294375"/>
             <a:ext cx="3383280" cy="384048"/>
           </a:xfrm>
           <a:prstGeom prst="rect">
@@ -4997,26 +5152,26 @@
           <a:p>
             <a:pPr algn="l"/>
             <a:r>
-              <a:rPr sz="1300" b="1" i="0">
-                <a:solidFill>
-                  <a:srgbClr val="FF9800"/>
-                </a:solidFill>
-              </a:rPr>
-              <a:t>Both curves rise</a:t>
-            </a:r>
-          </a:p>
-        </p:txBody>
-      </p:sp>
-      <p:sp>
-        <p:nvSpPr>
-          <p:cNvPr id="18" name="TextBox 17"/>
-          <p:cNvSpPr txBox="1"/>
-          <p:nvPr/>
-        </p:nvSpPr>
-        <p:spPr>
-          <a:xfrm>
-            <a:off x="8339327" y="4398264"/>
-            <a:ext cx="3383280" cy="694944"/>
+              <a:rPr sz="1200" b="1" i="0">
+                <a:solidFill>
+                  <a:srgbClr val="F5A623"/>
+                </a:solidFill>
+              </a:rPr>
+              <a:t>Key insight</a:t>
+            </a:r>
+          </a:p>
+        </p:txBody>
+      </p:sp>
+      <p:sp>
+        <p:nvSpPr>
+          <p:cNvPr id="22" name="TextBox 21"/>
+          <p:cNvSpPr txBox="1"/>
+          <p:nvPr/>
+        </p:nvSpPr>
+        <p:spPr>
+          <a:xfrm>
+            <a:off x="8339327" y="5678423"/>
+            <a:ext cx="3383280" cy="658368"/>
           </a:xfrm>
           <a:prstGeom prst="rect">
             <a:avLst/>
@@ -5031,166 +5186,12 @@
           <a:p>
             <a:pPr algn="l"/>
             <a:r>
-              <a:rPr sz="1100" b="0" i="0">
+              <a:rPr sz="1000" b="0" i="0">
                 <a:solidFill>
                   <a:srgbClr val="A0B4C8"/>
                 </a:solidFill>
               </a:rPr>
-              <a:t>After ARL activates, both utility and privacy rise together — core challenge</a:t>
-            </a:r>
-          </a:p>
-        </p:txBody>
-      </p:sp>
-      <p:sp>
-        <p:nvSpPr>
-          <p:cNvPr id="19" name="Rectangle 18"/>
-          <p:cNvSpPr/>
-          <p:nvPr/>
-        </p:nvSpPr>
-        <p:spPr>
-          <a:xfrm>
-            <a:off x="8092440" y="5312664"/>
-            <a:ext cx="3749039" cy="1261872"/>
-          </a:xfrm>
-          <a:prstGeom prst="rect">
-            <a:avLst/>
-          </a:prstGeom>
-          <a:solidFill>
-            <a:srgbClr val="1C1C3A"/>
-          </a:solidFill>
-          <a:ln>
-            <a:noFill/>
-          </a:ln>
-        </p:spPr>
-        <p:style>
-          <a:lnRef idx="1">
-            <a:schemeClr val="accent1"/>
-          </a:lnRef>
-          <a:fillRef idx="3">
-            <a:schemeClr val="accent1"/>
-          </a:fillRef>
-          <a:effectRef idx="2">
-            <a:schemeClr val="accent1"/>
-          </a:effectRef>
-          <a:fontRef idx="minor">
-            <a:schemeClr val="lt1"/>
-          </a:fontRef>
-        </p:style>
-        <p:txBody>
-          <a:bodyPr rtlCol="0" anchor="ctr"/>
-          <a:lstStyle/>
-          <a:p>
-            <a:pPr algn="ctr"/>
-          </a:p>
-        </p:txBody>
-      </p:sp>
-      <p:sp>
-        <p:nvSpPr>
-          <p:cNvPr id="20" name="Rectangle 19"/>
-          <p:cNvSpPr/>
-          <p:nvPr/>
-        </p:nvSpPr>
-        <p:spPr>
-          <a:xfrm>
-            <a:off x="8092440" y="5312664"/>
-            <a:ext cx="128016" cy="1261872"/>
-          </a:xfrm>
-          <a:prstGeom prst="rect">
-            <a:avLst/>
-          </a:prstGeom>
-          <a:solidFill>
-            <a:srgbClr val="E84A35"/>
-          </a:solidFill>
-          <a:ln>
-            <a:noFill/>
-          </a:ln>
-        </p:spPr>
-        <p:style>
-          <a:lnRef idx="1">
-            <a:schemeClr val="accent1"/>
-          </a:lnRef>
-          <a:fillRef idx="3">
-            <a:schemeClr val="accent1"/>
-          </a:fillRef>
-          <a:effectRef idx="2">
-            <a:schemeClr val="accent1"/>
-          </a:effectRef>
-          <a:fontRef idx="minor">
-            <a:schemeClr val="lt1"/>
-          </a:fontRef>
-        </p:style>
-        <p:txBody>
-          <a:bodyPr rtlCol="0" anchor="ctr"/>
-          <a:lstStyle/>
-          <a:p>
-            <a:pPr algn="ctr"/>
-          </a:p>
-        </p:txBody>
-      </p:sp>
-      <p:sp>
-        <p:nvSpPr>
-          <p:cNvPr id="21" name="TextBox 20"/>
-          <p:cNvSpPr txBox="1"/>
-          <p:nvPr/>
-        </p:nvSpPr>
-        <p:spPr>
-          <a:xfrm>
-            <a:off x="8339327" y="5404104"/>
-            <a:ext cx="3383280" cy="384048"/>
-          </a:xfrm>
-          <a:prstGeom prst="rect">
-            <a:avLst/>
-          </a:prstGeom>
-          <a:noFill/>
-        </p:spPr>
-        <p:txBody>
-          <a:bodyPr wrap="square">
-            <a:spAutoFit/>
-          </a:bodyPr>
-          <a:lstStyle/>
-          <a:p>
-            <a:pPr algn="l"/>
-            <a:r>
-              <a:rPr sz="1300" b="1" i="0">
-                <a:solidFill>
-                  <a:srgbClr val="E84A35"/>
-                </a:solidFill>
-              </a:rPr>
-              <a:t>Final epoch 13</a:t>
-            </a:r>
-          </a:p>
-        </p:txBody>
-      </p:sp>
-      <p:sp>
-        <p:nvSpPr>
-          <p:cNvPr id="22" name="TextBox 21"/>
-          <p:cNvSpPr txBox="1"/>
-          <p:nvPr/>
-        </p:nvSpPr>
-        <p:spPr>
-          <a:xfrm>
-            <a:off x="8339327" y="5788152"/>
-            <a:ext cx="3383280" cy="694944"/>
-          </a:xfrm>
-          <a:prstGeom prst="rect">
-            <a:avLst/>
-          </a:prstGeom>
-          <a:noFill/>
-        </p:spPr>
-        <p:txBody>
-          <a:bodyPr wrap="square">
-            <a:spAutoFit/>
-          </a:bodyPr>
-          <a:lstStyle/>
-          <a:p>
-            <a:pPr algn="l"/>
-            <a:r>
-              <a:rPr sz="1100" b="0" i="0">
-                <a:solidFill>
-                  <a:srgbClr val="A0B4C8"/>
-                </a:solidFill>
-              </a:rPr>
-              <a:t>Utility 88.3%, Privacy 90.4% — adversary matches the encoder throughout</a:t>
+              <a:t>Compressing latent space forces the encoder to keep only what's needed for smile — gender gets squeezed out.</a:t>
             </a:r>
           </a:p>
         </p:txBody>
@@ -5336,7 +5337,7 @@
                   <a:srgbClr val="FFFFFF"/>
                 </a:solidFill>
               </a:rPr>
-              <a:t>VAE Reconstructions — VanillaVAE</a:t>
+              <a:t>Two-Phase Training — ResidualVAE (λ=2.0)</a:t>
             </a:r>
           </a:p>
         </p:txBody>
@@ -5370,91 +5371,14 @@
                   <a:srgbClr val="A0B4C8"/>
                 </a:solidFill>
               </a:rPr>
-              <a:t>10 epochs · 20k samples · Each strip: input face images (top) → encoder → decoder output (bottom)</a:t>
-            </a:r>
-          </a:p>
-        </p:txBody>
-      </p:sp>
-      <p:sp>
-        <p:nvSpPr>
-          <p:cNvPr id="6" name="Rectangle 5"/>
-          <p:cNvSpPr/>
-          <p:nvPr/>
-        </p:nvSpPr>
-        <p:spPr>
-          <a:xfrm>
-            <a:off x="274320" y="1078992"/>
-            <a:ext cx="1828800" cy="457200"/>
-          </a:xfrm>
-          <a:prstGeom prst="rect">
-            <a:avLst/>
-          </a:prstGeom>
-          <a:solidFill>
-            <a:srgbClr val="0D2B55"/>
-          </a:solidFill>
-          <a:ln>
-            <a:noFill/>
-          </a:ln>
-        </p:spPr>
-        <p:style>
-          <a:lnRef idx="1">
-            <a:schemeClr val="accent1"/>
-          </a:lnRef>
-          <a:fillRef idx="3">
-            <a:schemeClr val="accent1"/>
-          </a:fillRef>
-          <a:effectRef idx="2">
-            <a:schemeClr val="accent1"/>
-          </a:effectRef>
-          <a:fontRef idx="minor">
-            <a:schemeClr val="lt1"/>
-          </a:fontRef>
-        </p:style>
-        <p:txBody>
-          <a:bodyPr rtlCol="0" anchor="ctr"/>
-          <a:lstStyle/>
-          <a:p>
-            <a:pPr algn="ctr"/>
-          </a:p>
-        </p:txBody>
-      </p:sp>
-      <p:sp>
-        <p:nvSpPr>
-          <p:cNvPr id="7" name="TextBox 6"/>
-          <p:cNvSpPr txBox="1"/>
-          <p:nvPr/>
-        </p:nvSpPr>
-        <p:spPr>
-          <a:xfrm>
-            <a:off x="347472" y="1115568"/>
-            <a:ext cx="1691640" cy="384048"/>
-          </a:xfrm>
-          <a:prstGeom prst="rect">
-            <a:avLst/>
-          </a:prstGeom>
-          <a:noFill/>
-        </p:spPr>
-        <p:txBody>
-          <a:bodyPr wrap="square">
-            <a:spAutoFit/>
-          </a:bodyPr>
-          <a:lstStyle/>
-          <a:p>
-            <a:pPr algn="l"/>
-            <a:r>
-              <a:rPr sz="1400" b="1" i="0">
-                <a:solidFill>
-                  <a:srgbClr val="F5A623"/>
-                </a:solidFill>
-              </a:rPr>
-              <a:t>Epoch 1</a:t>
+              <a:t>Phase 1: encoder learns utility (adversary OFF)  →  Phase 2: adversary activated</a:t>
             </a:r>
           </a:p>
         </p:txBody>
       </p:sp>
       <p:pic>
         <p:nvPicPr>
-          <p:cNvPr id="8" name="Picture 7" descr="member1_vanillavae_10e_20k_epoch01.png"/>
+          <p:cNvPr id="6" name="Picture 5" descr="residualvae_training_curve.png"/>
           <p:cNvPicPr>
             <a:picLocks noChangeAspect="1"/>
           </p:cNvPicPr>
@@ -5468,8 +5392,8 @@
         </p:blipFill>
         <p:spPr>
           <a:xfrm>
-            <a:off x="274320" y="1572768"/>
-            <a:ext cx="11640312" cy="2212848"/>
+            <a:off x="365760" y="1097280"/>
+            <a:ext cx="7498079" cy="5029200"/>
           </a:xfrm>
           <a:prstGeom prst="rect">
             <a:avLst/>
@@ -5478,20 +5402,20 @@
       </p:pic>
       <p:sp>
         <p:nvSpPr>
-          <p:cNvPr id="9" name="Rectangle 8"/>
+          <p:cNvPr id="7" name="Rectangle 6"/>
           <p:cNvSpPr/>
           <p:nvPr/>
         </p:nvSpPr>
         <p:spPr>
           <a:xfrm>
-            <a:off x="274320" y="3931920"/>
-            <a:ext cx="2011680" cy="457200"/>
+            <a:off x="8092440" y="1143000"/>
+            <a:ext cx="3749039" cy="1261872"/>
           </a:xfrm>
           <a:prstGeom prst="rect">
             <a:avLst/>
           </a:prstGeom>
           <a:solidFill>
-            <a:srgbClr val="0D2B55"/>
+            <a:srgbClr val="1C1C3A"/>
           </a:solidFill>
           <a:ln>
             <a:noFill/>
@@ -5521,78 +5445,20 @@
       </p:sp>
       <p:sp>
         <p:nvSpPr>
-          <p:cNvPr id="10" name="TextBox 9"/>
-          <p:cNvSpPr txBox="1"/>
-          <p:nvPr/>
-        </p:nvSpPr>
-        <p:spPr>
-          <a:xfrm>
-            <a:off x="347472" y="3968496"/>
-            <a:ext cx="1874519" cy="384048"/>
-          </a:xfrm>
-          <a:prstGeom prst="rect">
-            <a:avLst/>
-          </a:prstGeom>
-          <a:noFill/>
-        </p:spPr>
-        <p:txBody>
-          <a:bodyPr wrap="square">
-            <a:spAutoFit/>
-          </a:bodyPr>
-          <a:lstStyle/>
-          <a:p>
-            <a:pPr algn="l"/>
-            <a:r>
-              <a:rPr sz="1400" b="1" i="0">
-                <a:solidFill>
-                  <a:srgbClr val="4CAF50"/>
-                </a:solidFill>
-              </a:rPr>
-              <a:t>Epoch 10</a:t>
-            </a:r>
-          </a:p>
-        </p:txBody>
-      </p:sp>
-      <p:pic>
-        <p:nvPicPr>
-          <p:cNvPr id="11" name="Picture 10" descr="member1_vanillavae_10e_20k_epoch10.png"/>
-          <p:cNvPicPr>
-            <a:picLocks noChangeAspect="1"/>
-          </p:cNvPicPr>
-          <p:nvPr/>
-        </p:nvPicPr>
-        <p:blipFill>
-          <a:blip r:embed="rId3"/>
-          <a:stretch>
-            <a:fillRect/>
-          </a:stretch>
-        </p:blipFill>
-        <p:spPr>
-          <a:xfrm>
-            <a:off x="274320" y="4425696"/>
-            <a:ext cx="11640312" cy="2212848"/>
-          </a:xfrm>
-          <a:prstGeom prst="rect">
-            <a:avLst/>
-          </a:prstGeom>
-        </p:spPr>
-      </p:pic>
-      <p:sp>
-        <p:nvSpPr>
-          <p:cNvPr id="12" name="Rectangle 11"/>
+          <p:cNvPr id="8" name="Rectangle 7"/>
           <p:cNvSpPr/>
           <p:nvPr/>
         </p:nvSpPr>
         <p:spPr>
           <a:xfrm>
-            <a:off x="0" y="6492240"/>
-            <a:ext cx="12188952" cy="365760"/>
+            <a:off x="8092440" y="1143000"/>
+            <a:ext cx="128016" cy="1261872"/>
           </a:xfrm>
           <a:prstGeom prst="rect">
             <a:avLst/>
           </a:prstGeom>
           <a:solidFill>
-            <a:srgbClr val="0D2B55"/>
+            <a:srgbClr val="2196F3"/>
           </a:solidFill>
           <a:ln>
             <a:noFill/>
@@ -5622,34 +5488,530 @@
       </p:sp>
       <p:sp>
         <p:nvSpPr>
+          <p:cNvPr id="9" name="TextBox 8"/>
+          <p:cNvSpPr txBox="1"/>
+          <p:nvPr/>
+        </p:nvSpPr>
+        <p:spPr>
+          <a:xfrm>
+            <a:off x="8339327" y="1234440"/>
+            <a:ext cx="3383280" cy="384048"/>
+          </a:xfrm>
+          <a:prstGeom prst="rect">
+            <a:avLst/>
+          </a:prstGeom>
+          <a:noFill/>
+        </p:spPr>
+        <p:txBody>
+          <a:bodyPr wrap="square">
+            <a:spAutoFit/>
+          </a:bodyPr>
+          <a:lstStyle/>
+          <a:p>
+            <a:pPr algn="l"/>
+            <a:r>
+              <a:rPr sz="1300" b="1" i="0">
+                <a:solidFill>
+                  <a:srgbClr val="2196F3"/>
+                </a:solidFill>
+              </a:rPr>
+              <a:t>Warmup (ep 1-3)</a:t>
+            </a:r>
+          </a:p>
+        </p:txBody>
+      </p:sp>
+      <p:sp>
+        <p:nvSpPr>
+          <p:cNvPr id="10" name="TextBox 9"/>
+          <p:cNvSpPr txBox="1"/>
+          <p:nvPr/>
+        </p:nvSpPr>
+        <p:spPr>
+          <a:xfrm>
+            <a:off x="8339327" y="1618488"/>
+            <a:ext cx="3383280" cy="694944"/>
+          </a:xfrm>
+          <a:prstGeom prst="rect">
+            <a:avLst/>
+          </a:prstGeom>
+          <a:noFill/>
+        </p:spPr>
+        <p:txBody>
+          <a:bodyPr wrap="square">
+            <a:spAutoFit/>
+          </a:bodyPr>
+          <a:lstStyle/>
+          <a:p>
+            <a:pPr algn="l"/>
+            <a:r>
+              <a:rPr sz="1100" b="0" i="0">
+                <a:solidFill>
+                  <a:srgbClr val="A0B4C8"/>
+                </a:solidFill>
+              </a:rPr>
+              <a:t>Adversary scores below random chance (39%) — encoder is free to learn utility first</a:t>
+            </a:r>
+          </a:p>
+        </p:txBody>
+      </p:sp>
+      <p:sp>
+        <p:nvSpPr>
+          <p:cNvPr id="11" name="Rectangle 10"/>
+          <p:cNvSpPr/>
+          <p:nvPr/>
+        </p:nvSpPr>
+        <p:spPr>
+          <a:xfrm>
+            <a:off x="8092440" y="2532888"/>
+            <a:ext cx="3749039" cy="1261872"/>
+          </a:xfrm>
+          <a:prstGeom prst="rect">
+            <a:avLst/>
+          </a:prstGeom>
+          <a:solidFill>
+            <a:srgbClr val="1C1C3A"/>
+          </a:solidFill>
+          <a:ln>
+            <a:noFill/>
+          </a:ln>
+        </p:spPr>
+        <p:style>
+          <a:lnRef idx="1">
+            <a:schemeClr val="accent1"/>
+          </a:lnRef>
+          <a:fillRef idx="3">
+            <a:schemeClr val="accent1"/>
+          </a:fillRef>
+          <a:effectRef idx="2">
+            <a:schemeClr val="accent1"/>
+          </a:effectRef>
+          <a:fontRef idx="minor">
+            <a:schemeClr val="lt1"/>
+          </a:fontRef>
+        </p:style>
+        <p:txBody>
+          <a:bodyPr rtlCol="0" anchor="ctr"/>
+          <a:lstStyle/>
+          <a:p>
+            <a:pPr algn="ctr"/>
+          </a:p>
+        </p:txBody>
+      </p:sp>
+      <p:sp>
+        <p:nvSpPr>
+          <p:cNvPr id="12" name="Rectangle 11"/>
+          <p:cNvSpPr/>
+          <p:nvPr/>
+        </p:nvSpPr>
+        <p:spPr>
+          <a:xfrm>
+            <a:off x="8092440" y="2532888"/>
+            <a:ext cx="128016" cy="1261872"/>
+          </a:xfrm>
+          <a:prstGeom prst="rect">
+            <a:avLst/>
+          </a:prstGeom>
+          <a:solidFill>
+            <a:srgbClr val="4CAF50"/>
+          </a:solidFill>
+          <a:ln>
+            <a:noFill/>
+          </a:ln>
+        </p:spPr>
+        <p:style>
+          <a:lnRef idx="1">
+            <a:schemeClr val="accent1"/>
+          </a:lnRef>
+          <a:fillRef idx="3">
+            <a:schemeClr val="accent1"/>
+          </a:fillRef>
+          <a:effectRef idx="2">
+            <a:schemeClr val="accent1"/>
+          </a:effectRef>
+          <a:fontRef idx="minor">
+            <a:schemeClr val="lt1"/>
+          </a:fontRef>
+        </p:style>
+        <p:txBody>
+          <a:bodyPr rtlCol="0" anchor="ctr"/>
+          <a:lstStyle/>
+          <a:p>
+            <a:pPr algn="ctr"/>
+          </a:p>
+        </p:txBody>
+      </p:sp>
+      <p:sp>
+        <p:nvSpPr>
           <p:cNvPr id="13" name="TextBox 12"/>
           <p:cNvSpPr txBox="1"/>
           <p:nvPr/>
         </p:nvSpPr>
         <p:spPr>
           <a:xfrm>
-            <a:off x="365760" y="6528816"/>
-            <a:ext cx="11430000" cy="310896"/>
-          </a:xfrm>
-          <a:prstGeom prst="rect">
-            <a:avLst/>
-          </a:prstGeom>
-          <a:noFill/>
-        </p:spPr>
-        <p:txBody>
-          <a:bodyPr wrap="square">
-            <a:spAutoFit/>
-          </a:bodyPr>
-          <a:lstStyle/>
-          <a:p>
-            <a:pPr algn="ctr"/>
+            <a:off x="8339327" y="2624328"/>
+            <a:ext cx="3383280" cy="384048"/>
+          </a:xfrm>
+          <a:prstGeom prst="rect">
+            <a:avLst/>
+          </a:prstGeom>
+          <a:noFill/>
+        </p:spPr>
+        <p:txBody>
+          <a:bodyPr wrap="square">
+            <a:spAutoFit/>
+          </a:bodyPr>
+          <a:lstStyle/>
+          <a:p>
+            <a:pPr algn="l"/>
+            <a:r>
+              <a:rPr sz="1300" b="1" i="0">
+                <a:solidFill>
+                  <a:srgbClr val="4CAF50"/>
+                </a:solidFill>
+              </a:rPr>
+              <a:t>Epoch 4 jump</a:t>
+            </a:r>
+          </a:p>
+        </p:txBody>
+      </p:sp>
+      <p:sp>
+        <p:nvSpPr>
+          <p:cNvPr id="14" name="TextBox 13"/>
+          <p:cNvSpPr txBox="1"/>
+          <p:nvPr/>
+        </p:nvSpPr>
+        <p:spPr>
+          <a:xfrm>
+            <a:off x="8339327" y="3008376"/>
+            <a:ext cx="3383280" cy="694944"/>
+          </a:xfrm>
+          <a:prstGeom prst="rect">
+            <a:avLst/>
+          </a:prstGeom>
+          <a:noFill/>
+        </p:spPr>
+        <p:txBody>
+          <a:bodyPr wrap="square">
+            <a:spAutoFit/>
+          </a:bodyPr>
+          <a:lstStyle/>
+          <a:p>
+            <a:pPr algn="l"/>
             <a:r>
               <a:rPr sz="1100" b="0" i="0">
                 <a:solidFill>
                   <a:srgbClr val="A0B4C8"/>
                 </a:solidFill>
               </a:rPr>
-              <a:t>Reconstruction quality improves over epochs — sharper details, better colour fidelity at epoch 10</a:t>
+              <a:t>Utility accuracy jumps to 82% in one epoch — warmup pre-training worked</a:t>
+            </a:r>
+          </a:p>
+        </p:txBody>
+      </p:sp>
+      <p:sp>
+        <p:nvSpPr>
+          <p:cNvPr id="15" name="Rectangle 14"/>
+          <p:cNvSpPr/>
+          <p:nvPr/>
+        </p:nvSpPr>
+        <p:spPr>
+          <a:xfrm>
+            <a:off x="8092440" y="3922776"/>
+            <a:ext cx="3749039" cy="1261872"/>
+          </a:xfrm>
+          <a:prstGeom prst="rect">
+            <a:avLst/>
+          </a:prstGeom>
+          <a:solidFill>
+            <a:srgbClr val="1C1C3A"/>
+          </a:solidFill>
+          <a:ln>
+            <a:noFill/>
+          </a:ln>
+        </p:spPr>
+        <p:style>
+          <a:lnRef idx="1">
+            <a:schemeClr val="accent1"/>
+          </a:lnRef>
+          <a:fillRef idx="3">
+            <a:schemeClr val="accent1"/>
+          </a:fillRef>
+          <a:effectRef idx="2">
+            <a:schemeClr val="accent1"/>
+          </a:effectRef>
+          <a:fontRef idx="minor">
+            <a:schemeClr val="lt1"/>
+          </a:fontRef>
+        </p:style>
+        <p:txBody>
+          <a:bodyPr rtlCol="0" anchor="ctr"/>
+          <a:lstStyle/>
+          <a:p>
+            <a:pPr algn="ctr"/>
+          </a:p>
+        </p:txBody>
+      </p:sp>
+      <p:sp>
+        <p:nvSpPr>
+          <p:cNvPr id="16" name="Rectangle 15"/>
+          <p:cNvSpPr/>
+          <p:nvPr/>
+        </p:nvSpPr>
+        <p:spPr>
+          <a:xfrm>
+            <a:off x="8092440" y="3922776"/>
+            <a:ext cx="128016" cy="1261872"/>
+          </a:xfrm>
+          <a:prstGeom prst="rect">
+            <a:avLst/>
+          </a:prstGeom>
+          <a:solidFill>
+            <a:srgbClr val="FF9800"/>
+          </a:solidFill>
+          <a:ln>
+            <a:noFill/>
+          </a:ln>
+        </p:spPr>
+        <p:style>
+          <a:lnRef idx="1">
+            <a:schemeClr val="accent1"/>
+          </a:lnRef>
+          <a:fillRef idx="3">
+            <a:schemeClr val="accent1"/>
+          </a:fillRef>
+          <a:effectRef idx="2">
+            <a:schemeClr val="accent1"/>
+          </a:effectRef>
+          <a:fontRef idx="minor">
+            <a:schemeClr val="lt1"/>
+          </a:fontRef>
+        </p:style>
+        <p:txBody>
+          <a:bodyPr rtlCol="0" anchor="ctr"/>
+          <a:lstStyle/>
+          <a:p>
+            <a:pPr algn="ctr"/>
+          </a:p>
+        </p:txBody>
+      </p:sp>
+      <p:sp>
+        <p:nvSpPr>
+          <p:cNvPr id="17" name="TextBox 16"/>
+          <p:cNvSpPr txBox="1"/>
+          <p:nvPr/>
+        </p:nvSpPr>
+        <p:spPr>
+          <a:xfrm>
+            <a:off x="8339327" y="4014215"/>
+            <a:ext cx="3383280" cy="384048"/>
+          </a:xfrm>
+          <a:prstGeom prst="rect">
+            <a:avLst/>
+          </a:prstGeom>
+          <a:noFill/>
+        </p:spPr>
+        <p:txBody>
+          <a:bodyPr wrap="square">
+            <a:spAutoFit/>
+          </a:bodyPr>
+          <a:lstStyle/>
+          <a:p>
+            <a:pPr algn="l"/>
+            <a:r>
+              <a:rPr sz="1300" b="1" i="0">
+                <a:solidFill>
+                  <a:srgbClr val="FF9800"/>
+                </a:solidFill>
+              </a:rPr>
+              <a:t>Both curves rise</a:t>
+            </a:r>
+          </a:p>
+        </p:txBody>
+      </p:sp>
+      <p:sp>
+        <p:nvSpPr>
+          <p:cNvPr id="18" name="TextBox 17"/>
+          <p:cNvSpPr txBox="1"/>
+          <p:nvPr/>
+        </p:nvSpPr>
+        <p:spPr>
+          <a:xfrm>
+            <a:off x="8339327" y="4398264"/>
+            <a:ext cx="3383280" cy="694944"/>
+          </a:xfrm>
+          <a:prstGeom prst="rect">
+            <a:avLst/>
+          </a:prstGeom>
+          <a:noFill/>
+        </p:spPr>
+        <p:txBody>
+          <a:bodyPr wrap="square">
+            <a:spAutoFit/>
+          </a:bodyPr>
+          <a:lstStyle/>
+          <a:p>
+            <a:pPr algn="l"/>
+            <a:r>
+              <a:rPr sz="1100" b="0" i="0">
+                <a:solidFill>
+                  <a:srgbClr val="A0B4C8"/>
+                </a:solidFill>
+              </a:rPr>
+              <a:t>After ARL activates, both utility and privacy rise together — core challenge</a:t>
+            </a:r>
+          </a:p>
+        </p:txBody>
+      </p:sp>
+      <p:sp>
+        <p:nvSpPr>
+          <p:cNvPr id="19" name="Rectangle 18"/>
+          <p:cNvSpPr/>
+          <p:nvPr/>
+        </p:nvSpPr>
+        <p:spPr>
+          <a:xfrm>
+            <a:off x="8092440" y="5312664"/>
+            <a:ext cx="3749039" cy="1261872"/>
+          </a:xfrm>
+          <a:prstGeom prst="rect">
+            <a:avLst/>
+          </a:prstGeom>
+          <a:solidFill>
+            <a:srgbClr val="1C1C3A"/>
+          </a:solidFill>
+          <a:ln>
+            <a:noFill/>
+          </a:ln>
+        </p:spPr>
+        <p:style>
+          <a:lnRef idx="1">
+            <a:schemeClr val="accent1"/>
+          </a:lnRef>
+          <a:fillRef idx="3">
+            <a:schemeClr val="accent1"/>
+          </a:fillRef>
+          <a:effectRef idx="2">
+            <a:schemeClr val="accent1"/>
+          </a:effectRef>
+          <a:fontRef idx="minor">
+            <a:schemeClr val="lt1"/>
+          </a:fontRef>
+        </p:style>
+        <p:txBody>
+          <a:bodyPr rtlCol="0" anchor="ctr"/>
+          <a:lstStyle/>
+          <a:p>
+            <a:pPr algn="ctr"/>
+          </a:p>
+        </p:txBody>
+      </p:sp>
+      <p:sp>
+        <p:nvSpPr>
+          <p:cNvPr id="20" name="Rectangle 19"/>
+          <p:cNvSpPr/>
+          <p:nvPr/>
+        </p:nvSpPr>
+        <p:spPr>
+          <a:xfrm>
+            <a:off x="8092440" y="5312664"/>
+            <a:ext cx="128016" cy="1261872"/>
+          </a:xfrm>
+          <a:prstGeom prst="rect">
+            <a:avLst/>
+          </a:prstGeom>
+          <a:solidFill>
+            <a:srgbClr val="E84A35"/>
+          </a:solidFill>
+          <a:ln>
+            <a:noFill/>
+          </a:ln>
+        </p:spPr>
+        <p:style>
+          <a:lnRef idx="1">
+            <a:schemeClr val="accent1"/>
+          </a:lnRef>
+          <a:fillRef idx="3">
+            <a:schemeClr val="accent1"/>
+          </a:fillRef>
+          <a:effectRef idx="2">
+            <a:schemeClr val="accent1"/>
+          </a:effectRef>
+          <a:fontRef idx="minor">
+            <a:schemeClr val="lt1"/>
+          </a:fontRef>
+        </p:style>
+        <p:txBody>
+          <a:bodyPr rtlCol="0" anchor="ctr"/>
+          <a:lstStyle/>
+          <a:p>
+            <a:pPr algn="ctr"/>
+          </a:p>
+        </p:txBody>
+      </p:sp>
+      <p:sp>
+        <p:nvSpPr>
+          <p:cNvPr id="21" name="TextBox 20"/>
+          <p:cNvSpPr txBox="1"/>
+          <p:nvPr/>
+        </p:nvSpPr>
+        <p:spPr>
+          <a:xfrm>
+            <a:off x="8339327" y="5404104"/>
+            <a:ext cx="3383280" cy="384048"/>
+          </a:xfrm>
+          <a:prstGeom prst="rect">
+            <a:avLst/>
+          </a:prstGeom>
+          <a:noFill/>
+        </p:spPr>
+        <p:txBody>
+          <a:bodyPr wrap="square">
+            <a:spAutoFit/>
+          </a:bodyPr>
+          <a:lstStyle/>
+          <a:p>
+            <a:pPr algn="l"/>
+            <a:r>
+              <a:rPr sz="1300" b="1" i="0">
+                <a:solidFill>
+                  <a:srgbClr val="E84A35"/>
+                </a:solidFill>
+              </a:rPr>
+              <a:t>Final epoch 13</a:t>
+            </a:r>
+          </a:p>
+        </p:txBody>
+      </p:sp>
+      <p:sp>
+        <p:nvSpPr>
+          <p:cNvPr id="22" name="TextBox 21"/>
+          <p:cNvSpPr txBox="1"/>
+          <p:nvPr/>
+        </p:nvSpPr>
+        <p:spPr>
+          <a:xfrm>
+            <a:off x="8339327" y="5788152"/>
+            <a:ext cx="3383280" cy="694944"/>
+          </a:xfrm>
+          <a:prstGeom prst="rect">
+            <a:avLst/>
+          </a:prstGeom>
+          <a:noFill/>
+        </p:spPr>
+        <p:txBody>
+          <a:bodyPr wrap="square">
+            <a:spAutoFit/>
+          </a:bodyPr>
+          <a:lstStyle/>
+          <a:p>
+            <a:pPr algn="l"/>
+            <a:r>
+              <a:rPr sz="1100" b="0" i="0">
+                <a:solidFill>
+                  <a:srgbClr val="A0B4C8"/>
+                </a:solidFill>
+              </a:rPr>
+              <a:t>Utility 88.3%, Privacy 90.4% — adversary matches the encoder throughout</a:t>
             </a:r>
           </a:p>
         </p:txBody>
@@ -5795,7 +6157,7 @@
                   <a:srgbClr val="FFFFFF"/>
                 </a:solidFill>
               </a:rPr>
-              <a:t>VAE Reconstructions — BetaVAE (β=4)</a:t>
+              <a:t>VAE Reconstructions — VanillaVAE</a:t>
             </a:r>
           </a:p>
         </p:txBody>
@@ -5829,7 +6191,7 @@
                   <a:srgbClr val="A0B4C8"/>
                 </a:solidFill>
               </a:rPr>
-              <a:t>Stronger KL regularisation → smoother latent → slightly blurrier output than VanillaVAE</a:t>
+              <a:t>10 epochs · 20k samples · Each strip: input face images (top) → encoder → decoder output (bottom)</a:t>
             </a:r>
           </a:p>
         </p:txBody>
@@ -5913,7 +6275,7 @@
       </p:sp>
       <p:pic>
         <p:nvPicPr>
-          <p:cNvPr id="8" name="Picture 7" descr="member1_betavae_10e_20k_epoch01.png"/>
+          <p:cNvPr id="8" name="Picture 7" descr="member1_vanillavae_10e_20k_epoch01.png"/>
           <p:cNvPicPr>
             <a:picLocks noChangeAspect="1"/>
           </p:cNvPicPr>
@@ -6014,7 +6376,7 @@
       </p:sp>
       <p:pic>
         <p:nvPicPr>
-          <p:cNvPr id="11" name="Picture 10" descr="member1_betavae_10e_20k_epoch10.png"/>
+          <p:cNvPr id="11" name="Picture 10" descr="member1_vanillavae_10e_20k_epoch10.png"/>
           <p:cNvPicPr>
             <a:picLocks noChangeAspect="1"/>
           </p:cNvPicPr>
@@ -6108,7 +6470,7 @@
                   <a:srgbClr val="A0B4C8"/>
                 </a:solidFill>
               </a:rPr>
-              <a:t>β=4 trades reconstruction sharpness for better-structured latent space — utility is 81.5% vs VanillaVAE 86.1%</a:t>
+              <a:t>Reconstruction quality improves over epochs — sharper details, better colour fidelity at epoch 10</a:t>
             </a:r>
           </a:p>
         </p:txBody>
@@ -6254,27 +6616,61 @@
                   <a:srgbClr val="FFFFFF"/>
                 </a:solidFill>
               </a:rPr>
-              <a:t>Challenges &amp; Why They Happened</a:t>
-            </a:r>
-          </a:p>
-        </p:txBody>
-      </p:sp>
-      <p:sp>
-        <p:nvSpPr>
-          <p:cNvPr id="5" name="Rectangle 4"/>
+              <a:t>VAE Reconstructions — BetaVAE (β=4)</a:t>
+            </a:r>
+          </a:p>
+        </p:txBody>
+      </p:sp>
+      <p:sp>
+        <p:nvSpPr>
+          <p:cNvPr id="5" name="TextBox 4"/>
+          <p:cNvSpPr txBox="1"/>
+          <p:nvPr/>
+        </p:nvSpPr>
+        <p:spPr>
+          <a:xfrm>
+            <a:off x="411480" y="667512"/>
+            <a:ext cx="11338560" cy="292608"/>
+          </a:xfrm>
+          <a:prstGeom prst="rect">
+            <a:avLst/>
+          </a:prstGeom>
+          <a:noFill/>
+        </p:spPr>
+        <p:txBody>
+          <a:bodyPr wrap="square">
+            <a:spAutoFit/>
+          </a:bodyPr>
+          <a:lstStyle/>
+          <a:p>
+            <a:pPr algn="l"/>
+            <a:r>
+              <a:rPr sz="1200" b="0" i="0">
+                <a:solidFill>
+                  <a:srgbClr val="A0B4C8"/>
+                </a:solidFill>
+              </a:rPr>
+              <a:t>Stronger KL regularisation → smoother latent → slightly blurrier output than VanillaVAE</a:t>
+            </a:r>
+          </a:p>
+        </p:txBody>
+      </p:sp>
+      <p:sp>
+        <p:nvSpPr>
+          <p:cNvPr id="6" name="Rectangle 5"/>
           <p:cNvSpPr/>
           <p:nvPr/>
         </p:nvSpPr>
         <p:spPr>
           <a:xfrm>
-            <a:off x="365760" y="1115568"/>
-            <a:ext cx="11430000" cy="1234440"/>
+            <a:off x="274320" y="1078992"/>
+            <a:ext cx="1828800" cy="457200"/>
           </a:xfrm>
           <a:prstGeom prst="rect">
             <a:avLst/>
           </a:prstGeom>
           <a:solidFill>
-            <a:srgbClr val="1C1C3A"/>
+            <a:srgbClr val="0D2B55"/>
           </a:solidFill>
           <a:ln>
             <a:noFill/>
@@ -6304,20 +6700,78 @@
       </p:sp>
       <p:sp>
         <p:nvSpPr>
-          <p:cNvPr id="6" name="Rectangle 5"/>
+          <p:cNvPr id="7" name="TextBox 6"/>
+          <p:cNvSpPr txBox="1"/>
+          <p:nvPr/>
+        </p:nvSpPr>
+        <p:spPr>
+          <a:xfrm>
+            <a:off x="347472" y="1115568"/>
+            <a:ext cx="1691640" cy="384048"/>
+          </a:xfrm>
+          <a:prstGeom prst="rect">
+            <a:avLst/>
+          </a:prstGeom>
+          <a:noFill/>
+        </p:spPr>
+        <p:txBody>
+          <a:bodyPr wrap="square">
+            <a:spAutoFit/>
+          </a:bodyPr>
+          <a:lstStyle/>
+          <a:p>
+            <a:pPr algn="l"/>
+            <a:r>
+              <a:rPr sz="1400" b="1" i="0">
+                <a:solidFill>
+                  <a:srgbClr val="F5A623"/>
+                </a:solidFill>
+              </a:rPr>
+              <a:t>Epoch 1</a:t>
+            </a:r>
+          </a:p>
+        </p:txBody>
+      </p:sp>
+      <p:pic>
+        <p:nvPicPr>
+          <p:cNvPr id="8" name="Picture 7" descr="member1_betavae_10e_20k_epoch01.png"/>
+          <p:cNvPicPr>
+            <a:picLocks noChangeAspect="1"/>
+          </p:cNvPicPr>
+          <p:nvPr/>
+        </p:nvPicPr>
+        <p:blipFill>
+          <a:blip r:embed="rId2"/>
+          <a:stretch>
+            <a:fillRect/>
+          </a:stretch>
+        </p:blipFill>
+        <p:spPr>
+          <a:xfrm>
+            <a:off x="274320" y="1572768"/>
+            <a:ext cx="11640312" cy="2212848"/>
+          </a:xfrm>
+          <a:prstGeom prst="rect">
+            <a:avLst/>
+          </a:prstGeom>
+        </p:spPr>
+      </p:pic>
+      <p:sp>
+        <p:nvSpPr>
+          <p:cNvPr id="9" name="Rectangle 8"/>
           <p:cNvSpPr/>
           <p:nvPr/>
         </p:nvSpPr>
         <p:spPr>
           <a:xfrm>
-            <a:off x="365760" y="1115568"/>
-            <a:ext cx="137160" cy="1234440"/>
+            <a:off x="274320" y="3931920"/>
+            <a:ext cx="2011680" cy="457200"/>
           </a:xfrm>
           <a:prstGeom prst="rect">
             <a:avLst/>
           </a:prstGeom>
           <a:solidFill>
-            <a:srgbClr val="E84A35"/>
+            <a:srgbClr val="0D2B55"/>
           </a:solidFill>
           <a:ln>
             <a:noFill/>
@@ -6347,14 +6801,14 @@
       </p:sp>
       <p:sp>
         <p:nvSpPr>
-          <p:cNvPr id="7" name="TextBox 6"/>
-          <p:cNvSpPr txBox="1"/>
-          <p:nvPr/>
-        </p:nvSpPr>
-        <p:spPr>
-          <a:xfrm>
-            <a:off x="658368" y="1207008"/>
-            <a:ext cx="10789920" cy="411480"/>
+          <p:cNvPr id="10" name="TextBox 9"/>
+          <p:cNvSpPr txBox="1"/>
+          <p:nvPr/>
+        </p:nvSpPr>
+        <p:spPr>
+          <a:xfrm>
+            <a:off x="347472" y="3968496"/>
+            <a:ext cx="1874519" cy="384048"/>
           </a:xfrm>
           <a:prstGeom prst="rect">
             <a:avLst/>
@@ -6371,64 +6825,54 @@
             <a:r>
               <a:rPr sz="1400" b="1" i="0">
                 <a:solidFill>
-                  <a:srgbClr val="E84A35"/>
-                </a:solidFill>
-              </a:rPr>
-              <a:t>⚠  Privacy accuracy won't drop below ~85%</a:t>
-            </a:r>
-          </a:p>
-        </p:txBody>
-      </p:sp>
-      <p:sp>
-        <p:nvSpPr>
-          <p:cNvPr id="8" name="TextBox 7"/>
-          <p:cNvSpPr txBox="1"/>
-          <p:nvPr/>
-        </p:nvSpPr>
-        <p:spPr>
-          <a:xfrm>
-            <a:off x="658368" y="1627632"/>
-            <a:ext cx="10789920" cy="621792"/>
-          </a:xfrm>
-          <a:prstGeom prst="rect">
-            <a:avLst/>
-          </a:prstGeom>
-          <a:noFill/>
-        </p:spPr>
-        <p:txBody>
-          <a:bodyPr wrap="square">
-            <a:spAutoFit/>
-          </a:bodyPr>
-          <a:lstStyle/>
-          <a:p>
-            <a:pPr algn="l"/>
-            <a:r>
-              <a:rPr sz="1200" b="0" i="0">
-                <a:solidFill>
-                  <a:srgbClr val="A0B4C8"/>
-                </a:solidFill>
-              </a:rPr>
-              <a:t>Smile and gender are correlated in CelebA — lipstick, jaw structure, skin texture. The encoder cannot fully decouple them in 13 epochs with a simple ARL objective.</a:t>
-            </a:r>
-          </a:p>
-        </p:txBody>
-      </p:sp>
-      <p:sp>
-        <p:nvSpPr>
-          <p:cNvPr id="9" name="Rectangle 8"/>
+                  <a:srgbClr val="4CAF50"/>
+                </a:solidFill>
+              </a:rPr>
+              <a:t>Epoch 10</a:t>
+            </a:r>
+          </a:p>
+        </p:txBody>
+      </p:sp>
+      <p:pic>
+        <p:nvPicPr>
+          <p:cNvPr id="11" name="Picture 10" descr="member1_betavae_10e_20k_epoch10.png"/>
+          <p:cNvPicPr>
+            <a:picLocks noChangeAspect="1"/>
+          </p:cNvPicPr>
+          <p:nvPr/>
+        </p:nvPicPr>
+        <p:blipFill>
+          <a:blip r:embed="rId3"/>
+          <a:stretch>
+            <a:fillRect/>
+          </a:stretch>
+        </p:blipFill>
+        <p:spPr>
+          <a:xfrm>
+            <a:off x="274320" y="4425696"/>
+            <a:ext cx="11640312" cy="2212848"/>
+          </a:xfrm>
+          <a:prstGeom prst="rect">
+            <a:avLst/>
+          </a:prstGeom>
+        </p:spPr>
+      </p:pic>
+      <p:sp>
+        <p:nvSpPr>
+          <p:cNvPr id="12" name="Rectangle 11"/>
           <p:cNvSpPr/>
           <p:nvPr/>
         </p:nvSpPr>
         <p:spPr>
           <a:xfrm>
-            <a:off x="365760" y="2487168"/>
-            <a:ext cx="11430000" cy="1234440"/>
+            <a:off x="0" y="6492240"/>
+            <a:ext cx="12188952" cy="365760"/>
           </a:xfrm>
           <a:prstGeom prst="rect">
             <a:avLst/>
           </a:prstGeom>
           <a:solidFill>
-            <a:srgbClr val="1C1C3A"/>
+            <a:srgbClr val="0D2B55"/>
           </a:solidFill>
           <a:ln>
             <a:noFill/>
@@ -6458,419 +6902,34 @@
       </p:sp>
       <p:sp>
         <p:nvSpPr>
-          <p:cNvPr id="10" name="Rectangle 9"/>
-          <p:cNvSpPr/>
-          <p:nvPr/>
-        </p:nvSpPr>
-        <p:spPr>
-          <a:xfrm>
-            <a:off x="365760" y="2487168"/>
-            <a:ext cx="137160" cy="1234440"/>
-          </a:xfrm>
-          <a:prstGeom prst="rect">
-            <a:avLst/>
-          </a:prstGeom>
-          <a:solidFill>
-            <a:srgbClr val="FF9800"/>
-          </a:solidFill>
-          <a:ln>
-            <a:noFill/>
-          </a:ln>
-        </p:spPr>
-        <p:style>
-          <a:lnRef idx="1">
-            <a:schemeClr val="accent1"/>
-          </a:lnRef>
-          <a:fillRef idx="3">
-            <a:schemeClr val="accent1"/>
-          </a:fillRef>
-          <a:effectRef idx="2">
-            <a:schemeClr val="accent1"/>
-          </a:effectRef>
-          <a:fontRef idx="minor">
-            <a:schemeClr val="lt1"/>
-          </a:fontRef>
-        </p:style>
-        <p:txBody>
-          <a:bodyPr rtlCol="0" anchor="ctr"/>
-          <a:lstStyle/>
-          <a:p>
-            <a:pPr algn="ctr"/>
-          </a:p>
-        </p:txBody>
-      </p:sp>
-      <p:sp>
-        <p:nvSpPr>
-          <p:cNvPr id="11" name="TextBox 10"/>
-          <p:cNvSpPr txBox="1"/>
-          <p:nvPr/>
-        </p:nvSpPr>
-        <p:spPr>
-          <a:xfrm>
-            <a:off x="658368" y="2578608"/>
-            <a:ext cx="10789920" cy="411480"/>
-          </a:xfrm>
-          <a:prstGeom prst="rect">
-            <a:avLst/>
-          </a:prstGeom>
-          <a:noFill/>
-        </p:spPr>
-        <p:txBody>
-          <a:bodyPr wrap="square">
-            <a:spAutoFit/>
-          </a:bodyPr>
-          <a:lstStyle/>
-          <a:p>
-            <a:pPr algn="l"/>
-            <a:r>
-              <a:rPr sz="1400" b="1" i="0">
-                <a:solidFill>
-                  <a:srgbClr val="FF9800"/>
-                </a:solidFill>
-              </a:rPr>
-              <a:t>⚠  Adversary keeps pace with the encoder</a:t>
-            </a:r>
-          </a:p>
-        </p:txBody>
-      </p:sp>
-      <p:sp>
-        <p:nvSpPr>
-          <p:cNvPr id="12" name="TextBox 11"/>
-          <p:cNvSpPr txBox="1"/>
-          <p:nvPr/>
-        </p:nvSpPr>
-        <p:spPr>
-          <a:xfrm>
-            <a:off x="658368" y="2999232"/>
-            <a:ext cx="10789920" cy="621792"/>
-          </a:xfrm>
-          <a:prstGeom prst="rect">
-            <a:avLst/>
-          </a:prstGeom>
-          <a:noFill/>
-        </p:spPr>
-        <p:txBody>
-          <a:bodyPr wrap="square">
-            <a:spAutoFit/>
-          </a:bodyPr>
-          <a:lstStyle/>
-          <a:p>
-            <a:pPr algn="l"/>
-            <a:r>
-              <a:rPr sz="1200" b="0" i="0">
+          <p:cNvPr id="13" name="TextBox 12"/>
+          <p:cNvSpPr txBox="1"/>
+          <p:nvPr/>
+        </p:nvSpPr>
+        <p:spPr>
+          <a:xfrm>
+            <a:off x="365760" y="6528816"/>
+            <a:ext cx="11430000" cy="310896"/>
+          </a:xfrm>
+          <a:prstGeom prst="rect">
+            <a:avLst/>
+          </a:prstGeom>
+          <a:noFill/>
+        </p:spPr>
+        <p:txBody>
+          <a:bodyPr wrap="square">
+            <a:spAutoFit/>
+          </a:bodyPr>
+          <a:lstStyle/>
+          <a:p>
+            <a:pPr algn="ctr"/>
+            <a:r>
+              <a:rPr sz="1100" b="0" i="0">
                 <a:solidFill>
                   <a:srgbClr val="A0B4C8"/>
                 </a:solidFill>
               </a:rPr>
-              <a:t>ARL trains both simultaneously. As the encoder improves its representations, the adversary improves too. They converge to an equilibrium where privacy is not suppressed.</a:t>
-            </a:r>
-          </a:p>
-        </p:txBody>
-      </p:sp>
-      <p:sp>
-        <p:nvSpPr>
-          <p:cNvPr id="13" name="Rectangle 12"/>
-          <p:cNvSpPr/>
-          <p:nvPr/>
-        </p:nvSpPr>
-        <p:spPr>
-          <a:xfrm>
-            <a:off x="365760" y="3858768"/>
-            <a:ext cx="11430000" cy="1234440"/>
-          </a:xfrm>
-          <a:prstGeom prst="rect">
-            <a:avLst/>
-          </a:prstGeom>
-          <a:solidFill>
-            <a:srgbClr val="1C1C3A"/>
-          </a:solidFill>
-          <a:ln>
-            <a:noFill/>
-          </a:ln>
-        </p:spPr>
-        <p:style>
-          <a:lnRef idx="1">
-            <a:schemeClr val="accent1"/>
-          </a:lnRef>
-          <a:fillRef idx="3">
-            <a:schemeClr val="accent1"/>
-          </a:fillRef>
-          <a:effectRef idx="2">
-            <a:schemeClr val="accent1"/>
-          </a:effectRef>
-          <a:fontRef idx="minor">
-            <a:schemeClr val="lt1"/>
-          </a:fontRef>
-        </p:style>
-        <p:txBody>
-          <a:bodyPr rtlCol="0" anchor="ctr"/>
-          <a:lstStyle/>
-          <a:p>
-            <a:pPr algn="ctr"/>
-          </a:p>
-        </p:txBody>
-      </p:sp>
-      <p:sp>
-        <p:nvSpPr>
-          <p:cNvPr id="14" name="Rectangle 13"/>
-          <p:cNvSpPr/>
-          <p:nvPr/>
-        </p:nvSpPr>
-        <p:spPr>
-          <a:xfrm>
-            <a:off x="365760" y="3858768"/>
-            <a:ext cx="137160" cy="1234440"/>
-          </a:xfrm>
-          <a:prstGeom prst="rect">
-            <a:avLst/>
-          </a:prstGeom>
-          <a:solidFill>
-            <a:srgbClr val="E84A35"/>
-          </a:solidFill>
-          <a:ln>
-            <a:noFill/>
-          </a:ln>
-        </p:spPr>
-        <p:style>
-          <a:lnRef idx="1">
-            <a:schemeClr val="accent1"/>
-          </a:lnRef>
-          <a:fillRef idx="3">
-            <a:schemeClr val="accent1"/>
-          </a:fillRef>
-          <a:effectRef idx="2">
-            <a:schemeClr val="accent1"/>
-          </a:effectRef>
-          <a:fontRef idx="minor">
-            <a:schemeClr val="lt1"/>
-          </a:fontRef>
-        </p:style>
-        <p:txBody>
-          <a:bodyPr rtlCol="0" anchor="ctr"/>
-          <a:lstStyle/>
-          <a:p>
-            <a:pPr algn="ctr"/>
-          </a:p>
-        </p:txBody>
-      </p:sp>
-      <p:sp>
-        <p:nvSpPr>
-          <p:cNvPr id="15" name="TextBox 14"/>
-          <p:cNvSpPr txBox="1"/>
-          <p:nvPr/>
-        </p:nvSpPr>
-        <p:spPr>
-          <a:xfrm>
-            <a:off x="658368" y="3950207"/>
-            <a:ext cx="10789920" cy="411480"/>
-          </a:xfrm>
-          <a:prstGeom prst="rect">
-            <a:avLst/>
-          </a:prstGeom>
-          <a:noFill/>
-        </p:spPr>
-        <p:txBody>
-          <a:bodyPr wrap="square">
-            <a:spAutoFit/>
-          </a:bodyPr>
-          <a:lstStyle/>
-          <a:p>
-            <a:pPr algn="l"/>
-            <a:r>
-              <a:rPr sz="1400" b="1" i="0">
-                <a:solidFill>
-                  <a:srgbClr val="E84A35"/>
-                </a:solidFill>
-              </a:rPr>
-              <a:t>⚠  VQ-VAE codebook collapse</a:t>
-            </a:r>
-          </a:p>
-        </p:txBody>
-      </p:sp>
-      <p:sp>
-        <p:nvSpPr>
-          <p:cNvPr id="16" name="TextBox 15"/>
-          <p:cNvSpPr txBox="1"/>
-          <p:nvPr/>
-        </p:nvSpPr>
-        <p:spPr>
-          <a:xfrm>
-            <a:off x="658368" y="4370831"/>
-            <a:ext cx="10789920" cy="621792"/>
-          </a:xfrm>
-          <a:prstGeom prst="rect">
-            <a:avLst/>
-          </a:prstGeom>
-          <a:noFill/>
-        </p:spPr>
-        <p:txBody>
-          <a:bodyPr wrap="square">
-            <a:spAutoFit/>
-          </a:bodyPr>
-          <a:lstStyle/>
-          <a:p>
-            <a:pPr algn="l"/>
-            <a:r>
-              <a:rPr sz="1200" b="0" i="0">
-                <a:solidFill>
-                  <a:srgbClr val="A0B4C8"/>
-                </a:solidFill>
-              </a:rPr>
-              <a:t>All face images mapped to the same codebook entry — model output became a constant average face. Both utility and privacy dropped to random chance. Root cause: learning rate / codebook size mismatch.</a:t>
-            </a:r>
-          </a:p>
-        </p:txBody>
-      </p:sp>
-      <p:sp>
-        <p:nvSpPr>
-          <p:cNvPr id="17" name="Rectangle 16"/>
-          <p:cNvSpPr/>
-          <p:nvPr/>
-        </p:nvSpPr>
-        <p:spPr>
-          <a:xfrm>
-            <a:off x="365760" y="5230368"/>
-            <a:ext cx="11430000" cy="1234440"/>
-          </a:xfrm>
-          <a:prstGeom prst="rect">
-            <a:avLst/>
-          </a:prstGeom>
-          <a:solidFill>
-            <a:srgbClr val="1C1C3A"/>
-          </a:solidFill>
-          <a:ln>
-            <a:noFill/>
-          </a:ln>
-        </p:spPr>
-        <p:style>
-          <a:lnRef idx="1">
-            <a:schemeClr val="accent1"/>
-          </a:lnRef>
-          <a:fillRef idx="3">
-            <a:schemeClr val="accent1"/>
-          </a:fillRef>
-          <a:effectRef idx="2">
-            <a:schemeClr val="accent1"/>
-          </a:effectRef>
-          <a:fontRef idx="minor">
-            <a:schemeClr val="lt1"/>
-          </a:fontRef>
-        </p:style>
-        <p:txBody>
-          <a:bodyPr rtlCol="0" anchor="ctr"/>
-          <a:lstStyle/>
-          <a:p>
-            <a:pPr algn="ctr"/>
-          </a:p>
-        </p:txBody>
-      </p:sp>
-      <p:sp>
-        <p:nvSpPr>
-          <p:cNvPr id="18" name="Rectangle 17"/>
-          <p:cNvSpPr/>
-          <p:nvPr/>
-        </p:nvSpPr>
-        <p:spPr>
-          <a:xfrm>
-            <a:off x="365760" y="5230368"/>
-            <a:ext cx="137160" cy="1234440"/>
-          </a:xfrm>
-          <a:prstGeom prst="rect">
-            <a:avLst/>
-          </a:prstGeom>
-          <a:solidFill>
-            <a:srgbClr val="FF9800"/>
-          </a:solidFill>
-          <a:ln>
-            <a:noFill/>
-          </a:ln>
-        </p:spPr>
-        <p:style>
-          <a:lnRef idx="1">
-            <a:schemeClr val="accent1"/>
-          </a:lnRef>
-          <a:fillRef idx="3">
-            <a:schemeClr val="accent1"/>
-          </a:fillRef>
-          <a:effectRef idx="2">
-            <a:schemeClr val="accent1"/>
-          </a:effectRef>
-          <a:fontRef idx="minor">
-            <a:schemeClr val="lt1"/>
-          </a:fontRef>
-        </p:style>
-        <p:txBody>
-          <a:bodyPr rtlCol="0" anchor="ctr"/>
-          <a:lstStyle/>
-          <a:p>
-            <a:pPr algn="ctr"/>
-          </a:p>
-        </p:txBody>
-      </p:sp>
-      <p:sp>
-        <p:nvSpPr>
-          <p:cNvPr id="19" name="TextBox 18"/>
-          <p:cNvSpPr txBox="1"/>
-          <p:nvPr/>
-        </p:nvSpPr>
-        <p:spPr>
-          <a:xfrm>
-            <a:off x="658368" y="5321807"/>
-            <a:ext cx="10789920" cy="411480"/>
-          </a:xfrm>
-          <a:prstGeom prst="rect">
-            <a:avLst/>
-          </a:prstGeom>
-          <a:noFill/>
-        </p:spPr>
-        <p:txBody>
-          <a:bodyPr wrap="square">
-            <a:spAutoFit/>
-          </a:bodyPr>
-          <a:lstStyle/>
-          <a:p>
-            <a:pPr algn="l"/>
-            <a:r>
-              <a:rPr sz="1400" b="1" i="0">
-                <a:solidFill>
-                  <a:srgbClr val="FF9800"/>
-                </a:solidFill>
-              </a:rPr>
-              <a:t>⚠  Latent adversary with 5 steps made privacy worse</a:t>
-            </a:r>
-          </a:p>
-        </p:txBody>
-      </p:sp>
-      <p:sp>
-        <p:nvSpPr>
-          <p:cNvPr id="20" name="TextBox 19"/>
-          <p:cNvSpPr txBox="1"/>
-          <p:nvPr/>
-        </p:nvSpPr>
-        <p:spPr>
-          <a:xfrm>
-            <a:off x="658368" y="5742431"/>
-            <a:ext cx="10789920" cy="621792"/>
-          </a:xfrm>
-          <a:prstGeom prst="rect">
-            <a:avLst/>
-          </a:prstGeom>
-          <a:noFill/>
-        </p:spPr>
-        <p:txBody>
-          <a:bodyPr wrap="square">
-            <a:spAutoFit/>
-          </a:bodyPr>
-          <a:lstStyle/>
-          <a:p>
-            <a:pPr algn="l"/>
-            <a:r>
-              <a:rPr sz="1200" b="0" i="0">
-                <a:solidFill>
-                  <a:srgbClr val="A0B4C8"/>
-                </a:solidFill>
-              </a:rPr>
-              <a:t>Latent z contains more raw gender signal than a reconstructed image. With 5 adversary steps per encoder step, adversary loss saturated at 0.09 — leaving the encoder no gradient signal to suppress gender.</a:t>
+              <a:t>β=4 trades reconstruction sharpness for better-structured latent space — utility is 81.5% vs VanillaVAE 86.1%</a:t>
             </a:r>
           </a:p>
         </p:txBody>
@@ -7016,7 +7075,7 @@
                   <a:srgbClr val="FFFFFF"/>
                 </a:solidFill>
               </a:rPr>
-              <a:t>Future Work</a:t>
+              <a:t>Challenges &amp; Why They Happened</a:t>
             </a:r>
           </a:p>
         </p:txBody>
@@ -7030,7 +7089,7 @@
         <p:spPr>
           <a:xfrm>
             <a:off x="365760" y="1115568"/>
-            <a:ext cx="11430000" cy="1207008"/>
+            <a:ext cx="11430000" cy="1234440"/>
           </a:xfrm>
           <a:prstGeom prst="rect">
             <a:avLst/>
@@ -7073,7 +7132,315 @@
         <p:spPr>
           <a:xfrm>
             <a:off x="365760" y="1115568"/>
-            <a:ext cx="137160" cy="1207008"/>
+            <a:ext cx="137160" cy="1234440"/>
+          </a:xfrm>
+          <a:prstGeom prst="rect">
+            <a:avLst/>
+          </a:prstGeom>
+          <a:solidFill>
+            <a:srgbClr val="E84A35"/>
+          </a:solidFill>
+          <a:ln>
+            <a:noFill/>
+          </a:ln>
+        </p:spPr>
+        <p:style>
+          <a:lnRef idx="1">
+            <a:schemeClr val="accent1"/>
+          </a:lnRef>
+          <a:fillRef idx="3">
+            <a:schemeClr val="accent1"/>
+          </a:fillRef>
+          <a:effectRef idx="2">
+            <a:schemeClr val="accent1"/>
+          </a:effectRef>
+          <a:fontRef idx="minor">
+            <a:schemeClr val="lt1"/>
+          </a:fontRef>
+        </p:style>
+        <p:txBody>
+          <a:bodyPr rtlCol="0" anchor="ctr"/>
+          <a:lstStyle/>
+          <a:p>
+            <a:pPr algn="ctr"/>
+          </a:p>
+        </p:txBody>
+      </p:sp>
+      <p:sp>
+        <p:nvSpPr>
+          <p:cNvPr id="7" name="TextBox 6"/>
+          <p:cNvSpPr txBox="1"/>
+          <p:nvPr/>
+        </p:nvSpPr>
+        <p:spPr>
+          <a:xfrm>
+            <a:off x="658368" y="1207008"/>
+            <a:ext cx="10789920" cy="411480"/>
+          </a:xfrm>
+          <a:prstGeom prst="rect">
+            <a:avLst/>
+          </a:prstGeom>
+          <a:noFill/>
+        </p:spPr>
+        <p:txBody>
+          <a:bodyPr wrap="square">
+            <a:spAutoFit/>
+          </a:bodyPr>
+          <a:lstStyle/>
+          <a:p>
+            <a:pPr algn="l"/>
+            <a:r>
+              <a:rPr sz="1400" b="1" i="0">
+                <a:solidFill>
+                  <a:srgbClr val="E84A35"/>
+                </a:solidFill>
+              </a:rPr>
+              <a:t>⚠  Privacy accuracy won't drop below ~85%</a:t>
+            </a:r>
+          </a:p>
+        </p:txBody>
+      </p:sp>
+      <p:sp>
+        <p:nvSpPr>
+          <p:cNvPr id="8" name="TextBox 7"/>
+          <p:cNvSpPr txBox="1"/>
+          <p:nvPr/>
+        </p:nvSpPr>
+        <p:spPr>
+          <a:xfrm>
+            <a:off x="658368" y="1627632"/>
+            <a:ext cx="10789920" cy="621792"/>
+          </a:xfrm>
+          <a:prstGeom prst="rect">
+            <a:avLst/>
+          </a:prstGeom>
+          <a:noFill/>
+        </p:spPr>
+        <p:txBody>
+          <a:bodyPr wrap="square">
+            <a:spAutoFit/>
+          </a:bodyPr>
+          <a:lstStyle/>
+          <a:p>
+            <a:pPr algn="l"/>
+            <a:r>
+              <a:rPr sz="1200" b="0" i="0">
+                <a:solidFill>
+                  <a:srgbClr val="A0B4C8"/>
+                </a:solidFill>
+              </a:rPr>
+              <a:t>Smile and gender are correlated in CelebA — lipstick, jaw structure, skin texture. Even the best model (BetaTCVAE) only reaches 85.3%. Ideal is 50%.</a:t>
+            </a:r>
+          </a:p>
+        </p:txBody>
+      </p:sp>
+      <p:sp>
+        <p:nvSpPr>
+          <p:cNvPr id="9" name="Rectangle 8"/>
+          <p:cNvSpPr/>
+          <p:nvPr/>
+        </p:nvSpPr>
+        <p:spPr>
+          <a:xfrm>
+            <a:off x="365760" y="2487168"/>
+            <a:ext cx="11430000" cy="1234440"/>
+          </a:xfrm>
+          <a:prstGeom prst="rect">
+            <a:avLst/>
+          </a:prstGeom>
+          <a:solidFill>
+            <a:srgbClr val="1C1C3A"/>
+          </a:solidFill>
+          <a:ln>
+            <a:noFill/>
+          </a:ln>
+        </p:spPr>
+        <p:style>
+          <a:lnRef idx="1">
+            <a:schemeClr val="accent1"/>
+          </a:lnRef>
+          <a:fillRef idx="3">
+            <a:schemeClr val="accent1"/>
+          </a:fillRef>
+          <a:effectRef idx="2">
+            <a:schemeClr val="accent1"/>
+          </a:effectRef>
+          <a:fontRef idx="minor">
+            <a:schemeClr val="lt1"/>
+          </a:fontRef>
+        </p:style>
+        <p:txBody>
+          <a:bodyPr rtlCol="0" anchor="ctr"/>
+          <a:lstStyle/>
+          <a:p>
+            <a:pPr algn="ctr"/>
+          </a:p>
+        </p:txBody>
+      </p:sp>
+      <p:sp>
+        <p:nvSpPr>
+          <p:cNvPr id="10" name="Rectangle 9"/>
+          <p:cNvSpPr/>
+          <p:nvPr/>
+        </p:nvSpPr>
+        <p:spPr>
+          <a:xfrm>
+            <a:off x="365760" y="2487168"/>
+            <a:ext cx="137160" cy="1234440"/>
+          </a:xfrm>
+          <a:prstGeom prst="rect">
+            <a:avLst/>
+          </a:prstGeom>
+          <a:solidFill>
+            <a:srgbClr val="FF9800"/>
+          </a:solidFill>
+          <a:ln>
+            <a:noFill/>
+          </a:ln>
+        </p:spPr>
+        <p:style>
+          <a:lnRef idx="1">
+            <a:schemeClr val="accent1"/>
+          </a:lnRef>
+          <a:fillRef idx="3">
+            <a:schemeClr val="accent1"/>
+          </a:fillRef>
+          <a:effectRef idx="2">
+            <a:schemeClr val="accent1"/>
+          </a:effectRef>
+          <a:fontRef idx="minor">
+            <a:schemeClr val="lt1"/>
+          </a:fontRef>
+        </p:style>
+        <p:txBody>
+          <a:bodyPr rtlCol="0" anchor="ctr"/>
+          <a:lstStyle/>
+          <a:p>
+            <a:pPr algn="ctr"/>
+          </a:p>
+        </p:txBody>
+      </p:sp>
+      <p:sp>
+        <p:nvSpPr>
+          <p:cNvPr id="11" name="TextBox 10"/>
+          <p:cNvSpPr txBox="1"/>
+          <p:nvPr/>
+        </p:nvSpPr>
+        <p:spPr>
+          <a:xfrm>
+            <a:off x="658368" y="2578608"/>
+            <a:ext cx="10789920" cy="411480"/>
+          </a:xfrm>
+          <a:prstGeom prst="rect">
+            <a:avLst/>
+          </a:prstGeom>
+          <a:noFill/>
+        </p:spPr>
+        <p:txBody>
+          <a:bodyPr wrap="square">
+            <a:spAutoFit/>
+          </a:bodyPr>
+          <a:lstStyle/>
+          <a:p>
+            <a:pPr algn="l"/>
+            <a:r>
+              <a:rPr sz="1400" b="1" i="0">
+                <a:solidFill>
+                  <a:srgbClr val="FF9800"/>
+                </a:solidFill>
+              </a:rPr>
+              <a:t>⚠  Higher λ made things worse, not better</a:t>
+            </a:r>
+          </a:p>
+        </p:txBody>
+      </p:sp>
+      <p:sp>
+        <p:nvSpPr>
+          <p:cNvPr id="12" name="TextBox 11"/>
+          <p:cNvSpPr txBox="1"/>
+          <p:nvPr/>
+        </p:nvSpPr>
+        <p:spPr>
+          <a:xfrm>
+            <a:off x="658368" y="2999232"/>
+            <a:ext cx="10789920" cy="621792"/>
+          </a:xfrm>
+          <a:prstGeom prst="rect">
+            <a:avLst/>
+          </a:prstGeom>
+          <a:noFill/>
+        </p:spPr>
+        <p:txBody>
+          <a:bodyPr wrap="square">
+            <a:spAutoFit/>
+          </a:bodyPr>
+          <a:lstStyle/>
+          <a:p>
+            <a:pPr algn="l"/>
+            <a:r>
+              <a:rPr sz="1200" b="0" i="0">
+                <a:solidFill>
+                  <a:srgbClr val="A0B4C8"/>
+                </a:solidFill>
+              </a:rPr>
+              <a:t>Increasing λ from 1→5 barely changed privacy (88.4% → still ~88%). The adversary is too capable — stronger penalty alone cannot overcome the correlation.</a:t>
+            </a:r>
+          </a:p>
+        </p:txBody>
+      </p:sp>
+      <p:sp>
+        <p:nvSpPr>
+          <p:cNvPr id="13" name="Rectangle 12"/>
+          <p:cNvSpPr/>
+          <p:nvPr/>
+        </p:nvSpPr>
+        <p:spPr>
+          <a:xfrm>
+            <a:off x="365760" y="3858768"/>
+            <a:ext cx="11430000" cy="1234440"/>
+          </a:xfrm>
+          <a:prstGeom prst="rect">
+            <a:avLst/>
+          </a:prstGeom>
+          <a:solidFill>
+            <a:srgbClr val="1C1C3A"/>
+          </a:solidFill>
+          <a:ln>
+            <a:noFill/>
+          </a:ln>
+        </p:spPr>
+        <p:style>
+          <a:lnRef idx="1">
+            <a:schemeClr val="accent1"/>
+          </a:lnRef>
+          <a:fillRef idx="3">
+            <a:schemeClr val="accent1"/>
+          </a:fillRef>
+          <a:effectRef idx="2">
+            <a:schemeClr val="accent1"/>
+          </a:effectRef>
+          <a:fontRef idx="minor">
+            <a:schemeClr val="lt1"/>
+          </a:fontRef>
+        </p:style>
+        <p:txBody>
+          <a:bodyPr rtlCol="0" anchor="ctr"/>
+          <a:lstStyle/>
+          <a:p>
+            <a:pPr algn="ctr"/>
+          </a:p>
+        </p:txBody>
+      </p:sp>
+      <p:sp>
+        <p:nvSpPr>
+          <p:cNvPr id="14" name="Rectangle 13"/>
+          <p:cNvSpPr/>
+          <p:nvPr/>
+        </p:nvSpPr>
+        <p:spPr>
+          <a:xfrm>
+            <a:off x="365760" y="3858768"/>
+            <a:ext cx="137160" cy="1234440"/>
           </a:xfrm>
           <a:prstGeom prst="rect">
             <a:avLst/>
@@ -7109,14 +7476,14 @@
       </p:sp>
       <p:sp>
         <p:nvSpPr>
-          <p:cNvPr id="7" name="TextBox 6"/>
-          <p:cNvSpPr txBox="1"/>
-          <p:nvPr/>
-        </p:nvSpPr>
-        <p:spPr>
-          <a:xfrm>
-            <a:off x="658368" y="1225295"/>
-            <a:ext cx="5029200" cy="411480"/>
+          <p:cNvPr id="15" name="TextBox 14"/>
+          <p:cNvSpPr txBox="1"/>
+          <p:nvPr/>
+        </p:nvSpPr>
+        <p:spPr>
+          <a:xfrm>
+            <a:off x="658368" y="3950207"/>
+            <a:ext cx="10789920" cy="411480"/>
           </a:xfrm>
           <a:prstGeom prst="rect">
             <a:avLst/>
@@ -7131,26 +7498,26 @@
           <a:p>
             <a:pPr algn="l"/>
             <a:r>
-              <a:rPr sz="1500" b="1" i="0">
+              <a:rPr sz="1400" b="1" i="0">
                 <a:solidFill>
                   <a:srgbClr val="4CAF50"/>
                 </a:solidFill>
               </a:rPr>
-              <a:t>Focus on one model</a:t>
-            </a:r>
-          </a:p>
-        </p:txBody>
-      </p:sp>
-      <p:sp>
-        <p:nvSpPr>
-          <p:cNvPr id="8" name="TextBox 7"/>
-          <p:cNvSpPr txBox="1"/>
-          <p:nvPr/>
-        </p:nvSpPr>
-        <p:spPr>
-          <a:xfrm>
-            <a:off x="658368" y="1645919"/>
-            <a:ext cx="10789920" cy="585216"/>
+              <a:t>⚠  Information bottleneck trade-off</a:t>
+            </a:r>
+          </a:p>
+        </p:txBody>
+      </p:sp>
+      <p:sp>
+        <p:nvSpPr>
+          <p:cNvPr id="16" name="TextBox 15"/>
+          <p:cNvSpPr txBox="1"/>
+          <p:nvPr/>
+        </p:nvSpPr>
+        <p:spPr>
+          <a:xfrm>
+            <a:off x="658368" y="4370831"/>
+            <a:ext cx="10789920" cy="621792"/>
           </a:xfrm>
           <a:prstGeom prst="rect">
             <a:avLst/>
@@ -7165,26 +7532,26 @@
           <a:p>
             <a:pPr algn="l"/>
             <a:r>
-              <a:rPr sz="1300" b="0" i="0">
+              <a:rPr sz="1200" b="0" i="0">
                 <a:solidFill>
                   <a:srgbClr val="A0B4C8"/>
                 </a:solidFill>
               </a:rPr>
-              <a:t>Fine-tune ResidualVAE (best NAG = 0.988) with more epochs and the full 160k training set.</a:t>
-            </a:r>
-          </a:p>
-        </p:txBody>
-      </p:sp>
-      <p:sp>
-        <p:nvSpPr>
-          <p:cNvPr id="9" name="Rectangle 8"/>
+              <a:t>Reducing latent_dim 256→32 was the first experiment to lower privacy (87.6%→83.15%). But utility fell from 86.9%→75.1%. Currently testing dim=64 to find the sweet spot.</a:t>
+            </a:r>
+          </a:p>
+        </p:txBody>
+      </p:sp>
+      <p:sp>
+        <p:nvSpPr>
+          <p:cNvPr id="17" name="Rectangle 16"/>
           <p:cNvSpPr/>
           <p:nvPr/>
         </p:nvSpPr>
         <p:spPr>
           <a:xfrm>
-            <a:off x="365760" y="2468880"/>
-            <a:ext cx="11430000" cy="1207008"/>
+            <a:off x="365760" y="5230368"/>
+            <a:ext cx="11430000" cy="1234440"/>
           </a:xfrm>
           <a:prstGeom prst="rect">
             <a:avLst/>
@@ -7220,20 +7587,20 @@
       </p:sp>
       <p:sp>
         <p:nvSpPr>
-          <p:cNvPr id="10" name="Rectangle 9"/>
+          <p:cNvPr id="18" name="Rectangle 17"/>
           <p:cNvSpPr/>
           <p:nvPr/>
         </p:nvSpPr>
         <p:spPr>
           <a:xfrm>
-            <a:off x="365760" y="2468880"/>
-            <a:ext cx="137160" cy="1207008"/>
+            <a:off x="365760" y="5230368"/>
+            <a:ext cx="137160" cy="1234440"/>
           </a:xfrm>
           <a:prstGeom prst="rect">
             <a:avLst/>
           </a:prstGeom>
           <a:solidFill>
-            <a:srgbClr val="2196F3"/>
+            <a:srgbClr val="E84A35"/>
           </a:solidFill>
           <a:ln>
             <a:noFill/>
@@ -7263,14 +7630,14 @@
       </p:sp>
       <p:sp>
         <p:nvSpPr>
-          <p:cNvPr id="11" name="TextBox 10"/>
-          <p:cNvSpPr txBox="1"/>
-          <p:nvPr/>
-        </p:nvSpPr>
-        <p:spPr>
-          <a:xfrm>
-            <a:off x="658368" y="2578608"/>
-            <a:ext cx="5029200" cy="411480"/>
+          <p:cNvPr id="19" name="TextBox 18"/>
+          <p:cNvSpPr txBox="1"/>
+          <p:nvPr/>
+        </p:nvSpPr>
+        <p:spPr>
+          <a:xfrm>
+            <a:off x="658368" y="5321807"/>
+            <a:ext cx="10789920" cy="411480"/>
           </a:xfrm>
           <a:prstGeom prst="rect">
             <a:avLst/>
@@ -7285,26 +7652,26 @@
           <a:p>
             <a:pPr algn="l"/>
             <a:r>
-              <a:rPr sz="1500" b="1" i="0">
-                <a:solidFill>
-                  <a:srgbClr val="2196F3"/>
-                </a:solidFill>
-              </a:rPr>
-              <a:t>Gradient Reversal Layer</a:t>
-            </a:r>
-          </a:p>
-        </p:txBody>
-      </p:sp>
-      <p:sp>
-        <p:nvSpPr>
-          <p:cNvPr id="12" name="TextBox 11"/>
-          <p:cNvSpPr txBox="1"/>
-          <p:nvPr/>
-        </p:nvSpPr>
-        <p:spPr>
-          <a:xfrm>
-            <a:off x="658368" y="2999232"/>
-            <a:ext cx="10789920" cy="585216"/>
+              <a:rPr sz="1400" b="1" i="0">
+                <a:solidFill>
+                  <a:srgbClr val="E84A35"/>
+                </a:solidFill>
+              </a:rPr>
+              <a:t>⚠  VQ-VAE codebook collapse</a:t>
+            </a:r>
+          </a:p>
+        </p:txBody>
+      </p:sp>
+      <p:sp>
+        <p:nvSpPr>
+          <p:cNvPr id="20" name="TextBox 19"/>
+          <p:cNvSpPr txBox="1"/>
+          <p:nvPr/>
+        </p:nvSpPr>
+        <p:spPr>
+          <a:xfrm>
+            <a:off x="658368" y="5742431"/>
+            <a:ext cx="10789920" cy="621792"/>
           </a:xfrm>
           <a:prstGeom prst="rect">
             <a:avLst/>
@@ -7319,320 +7686,12 @@
           <a:p>
             <a:pPr algn="l"/>
             <a:r>
-              <a:rPr sz="1300" b="0" i="0">
+              <a:rPr sz="1200" b="0" i="0">
                 <a:solidFill>
                   <a:srgbClr val="A0B4C8"/>
                 </a:solidFill>
               </a:rPr>
-              <a:t>Replace ARL objective with a GRL — directly reverses gradients through the adversary, more principled than indirect penalisation.</a:t>
-            </a:r>
-          </a:p>
-        </p:txBody>
-      </p:sp>
-      <p:sp>
-        <p:nvSpPr>
-          <p:cNvPr id="13" name="Rectangle 12"/>
-          <p:cNvSpPr/>
-          <p:nvPr/>
-        </p:nvSpPr>
-        <p:spPr>
-          <a:xfrm>
-            <a:off x="365760" y="3822191"/>
-            <a:ext cx="11430000" cy="1207008"/>
-          </a:xfrm>
-          <a:prstGeom prst="rect">
-            <a:avLst/>
-          </a:prstGeom>
-          <a:solidFill>
-            <a:srgbClr val="1C1C3A"/>
-          </a:solidFill>
-          <a:ln>
-            <a:noFill/>
-          </a:ln>
-        </p:spPr>
-        <p:style>
-          <a:lnRef idx="1">
-            <a:schemeClr val="accent1"/>
-          </a:lnRef>
-          <a:fillRef idx="3">
-            <a:schemeClr val="accent1"/>
-          </a:fillRef>
-          <a:effectRef idx="2">
-            <a:schemeClr val="accent1"/>
-          </a:effectRef>
-          <a:fontRef idx="minor">
-            <a:schemeClr val="lt1"/>
-          </a:fontRef>
-        </p:style>
-        <p:txBody>
-          <a:bodyPr rtlCol="0" anchor="ctr"/>
-          <a:lstStyle/>
-          <a:p>
-            <a:pPr algn="ctr"/>
-          </a:p>
-        </p:txBody>
-      </p:sp>
-      <p:sp>
-        <p:nvSpPr>
-          <p:cNvPr id="14" name="Rectangle 13"/>
-          <p:cNvSpPr/>
-          <p:nvPr/>
-        </p:nvSpPr>
-        <p:spPr>
-          <a:xfrm>
-            <a:off x="365760" y="3822191"/>
-            <a:ext cx="137160" cy="1207008"/>
-          </a:xfrm>
-          <a:prstGeom prst="rect">
-            <a:avLst/>
-          </a:prstGeom>
-          <a:solidFill>
-            <a:srgbClr val="FF9800"/>
-          </a:solidFill>
-          <a:ln>
-            <a:noFill/>
-          </a:ln>
-        </p:spPr>
-        <p:style>
-          <a:lnRef idx="1">
-            <a:schemeClr val="accent1"/>
-          </a:lnRef>
-          <a:fillRef idx="3">
-            <a:schemeClr val="accent1"/>
-          </a:fillRef>
-          <a:effectRef idx="2">
-            <a:schemeClr val="accent1"/>
-          </a:effectRef>
-          <a:fontRef idx="minor">
-            <a:schemeClr val="lt1"/>
-          </a:fontRef>
-        </p:style>
-        <p:txBody>
-          <a:bodyPr rtlCol="0" anchor="ctr"/>
-          <a:lstStyle/>
-          <a:p>
-            <a:pPr algn="ctr"/>
-          </a:p>
-        </p:txBody>
-      </p:sp>
-      <p:sp>
-        <p:nvSpPr>
-          <p:cNvPr id="15" name="TextBox 14"/>
-          <p:cNvSpPr txBox="1"/>
-          <p:nvPr/>
-        </p:nvSpPr>
-        <p:spPr>
-          <a:xfrm>
-            <a:off x="658368" y="3931920"/>
-            <a:ext cx="5029200" cy="411480"/>
-          </a:xfrm>
-          <a:prstGeom prst="rect">
-            <a:avLst/>
-          </a:prstGeom>
-          <a:noFill/>
-        </p:spPr>
-        <p:txBody>
-          <a:bodyPr wrap="square">
-            <a:spAutoFit/>
-          </a:bodyPr>
-          <a:lstStyle/>
-          <a:p>
-            <a:pPr algn="l"/>
-            <a:r>
-              <a:rPr sz="1500" b="1" i="0">
-                <a:solidFill>
-                  <a:srgbClr val="FF9800"/>
-                </a:solidFill>
-              </a:rPr>
-              <a:t>Lower resolution (64 × 64)</a:t>
-            </a:r>
-          </a:p>
-        </p:txBody>
-      </p:sp>
-      <p:sp>
-        <p:nvSpPr>
-          <p:cNvPr id="16" name="TextBox 15"/>
-          <p:cNvSpPr txBox="1"/>
-          <p:nvPr/>
-        </p:nvSpPr>
-        <p:spPr>
-          <a:xfrm>
-            <a:off x="658368" y="4352544"/>
-            <a:ext cx="10789920" cy="585216"/>
-          </a:xfrm>
-          <a:prstGeom prst="rect">
-            <a:avLst/>
-          </a:prstGeom>
-          <a:noFill/>
-        </p:spPr>
-        <p:txBody>
-          <a:bodyPr wrap="square">
-            <a:spAutoFit/>
-          </a:bodyPr>
-          <a:lstStyle/>
-          <a:p>
-            <a:pPr algn="l"/>
-            <a:r>
-              <a:rPr sz="1300" b="0" i="0">
-                <a:solidFill>
-                  <a:srgbClr val="A0B4C8"/>
-                </a:solidFill>
-              </a:rPr>
-              <a:t>Less pixel information = less gender signal available. Malia is exploring this for VQ-VAE to prevent codebook collapse.</a:t>
-            </a:r>
-          </a:p>
-        </p:txBody>
-      </p:sp>
-      <p:sp>
-        <p:nvSpPr>
-          <p:cNvPr id="17" name="Rectangle 16"/>
-          <p:cNvSpPr/>
-          <p:nvPr/>
-        </p:nvSpPr>
-        <p:spPr>
-          <a:xfrm>
-            <a:off x="365760" y="5175503"/>
-            <a:ext cx="11430000" cy="1207008"/>
-          </a:xfrm>
-          <a:prstGeom prst="rect">
-            <a:avLst/>
-          </a:prstGeom>
-          <a:solidFill>
-            <a:srgbClr val="1C1C3A"/>
-          </a:solidFill>
-          <a:ln>
-            <a:noFill/>
-          </a:ln>
-        </p:spPr>
-        <p:style>
-          <a:lnRef idx="1">
-            <a:schemeClr val="accent1"/>
-          </a:lnRef>
-          <a:fillRef idx="3">
-            <a:schemeClr val="accent1"/>
-          </a:fillRef>
-          <a:effectRef idx="2">
-            <a:schemeClr val="accent1"/>
-          </a:effectRef>
-          <a:fontRef idx="minor">
-            <a:schemeClr val="lt1"/>
-          </a:fontRef>
-        </p:style>
-        <p:txBody>
-          <a:bodyPr rtlCol="0" anchor="ctr"/>
-          <a:lstStyle/>
-          <a:p>
-            <a:pPr algn="ctr"/>
-          </a:p>
-        </p:txBody>
-      </p:sp>
-      <p:sp>
-        <p:nvSpPr>
-          <p:cNvPr id="18" name="Rectangle 17"/>
-          <p:cNvSpPr/>
-          <p:nvPr/>
-        </p:nvSpPr>
-        <p:spPr>
-          <a:xfrm>
-            <a:off x="365760" y="5175503"/>
-            <a:ext cx="137160" cy="1207008"/>
-          </a:xfrm>
-          <a:prstGeom prst="rect">
-            <a:avLst/>
-          </a:prstGeom>
-          <a:solidFill>
-            <a:srgbClr val="F5A623"/>
-          </a:solidFill>
-          <a:ln>
-            <a:noFill/>
-          </a:ln>
-        </p:spPr>
-        <p:style>
-          <a:lnRef idx="1">
-            <a:schemeClr val="accent1"/>
-          </a:lnRef>
-          <a:fillRef idx="3">
-            <a:schemeClr val="accent1"/>
-          </a:fillRef>
-          <a:effectRef idx="2">
-            <a:schemeClr val="accent1"/>
-          </a:effectRef>
-          <a:fontRef idx="minor">
-            <a:schemeClr val="lt1"/>
-          </a:fontRef>
-        </p:style>
-        <p:txBody>
-          <a:bodyPr rtlCol="0" anchor="ctr"/>
-          <a:lstStyle/>
-          <a:p>
-            <a:pPr algn="ctr"/>
-          </a:p>
-        </p:txBody>
-      </p:sp>
-      <p:sp>
-        <p:nvSpPr>
-          <p:cNvPr id="19" name="TextBox 18"/>
-          <p:cNvSpPr txBox="1"/>
-          <p:nvPr/>
-        </p:nvSpPr>
-        <p:spPr>
-          <a:xfrm>
-            <a:off x="658368" y="5285231"/>
-            <a:ext cx="5029200" cy="411480"/>
-          </a:xfrm>
-          <a:prstGeom prst="rect">
-            <a:avLst/>
-          </a:prstGeom>
-          <a:noFill/>
-        </p:spPr>
-        <p:txBody>
-          <a:bodyPr wrap="square">
-            <a:spAutoFit/>
-          </a:bodyPr>
-          <a:lstStyle/>
-          <a:p>
-            <a:pPr algn="l"/>
-            <a:r>
-              <a:rPr sz="1500" b="1" i="0">
-                <a:solidFill>
-                  <a:srgbClr val="F5A623"/>
-                </a:solidFill>
-              </a:rPr>
-              <a:t>INT8 Quantisation</a:t>
-            </a:r>
-          </a:p>
-        </p:txBody>
-      </p:sp>
-      <p:sp>
-        <p:nvSpPr>
-          <p:cNvPr id="20" name="TextBox 19"/>
-          <p:cNvSpPr txBox="1"/>
-          <p:nvPr/>
-        </p:nvSpPr>
-        <p:spPr>
-          <a:xfrm>
-            <a:off x="658368" y="5705855"/>
-            <a:ext cx="10789920" cy="585216"/>
-          </a:xfrm>
-          <a:prstGeom prst="rect">
-            <a:avLst/>
-          </a:prstGeom>
-          <a:noFill/>
-        </p:spPr>
-        <p:txBody>
-          <a:bodyPr wrap="square">
-            <a:spAutoFit/>
-          </a:bodyPr>
-          <a:lstStyle/>
-          <a:p>
-            <a:pPr algn="l"/>
-            <a:r>
-              <a:rPr sz="1300" b="0" i="0">
-                <a:solidFill>
-                  <a:srgbClr val="A0B4C8"/>
-                </a:solidFill>
-              </a:rPr>
-              <a:t>Post-training quantisation would reduce latency ~4×. VanillaVAE (20ms) could hit real-time at &lt; 10ms on edge CPU.</a:t>
+              <a:t>All face images mapped to the same codebook entry — output became a constant average face. Both utility and privacy dropped to near-random. Root cause: codebook capacity vs image diversity mismatch.</a:t>
             </a:r>
           </a:p>
         </p:txBody>
@@ -7672,6 +7731,768 @@
         <p:spPr>
           <a:xfrm>
             <a:off x="0" y="0"/>
+            <a:ext cx="12188952" cy="960120"/>
+          </a:xfrm>
+          <a:prstGeom prst="rect">
+            <a:avLst/>
+          </a:prstGeom>
+          <a:solidFill>
+            <a:srgbClr val="0D2B55"/>
+          </a:solidFill>
+          <a:ln>
+            <a:noFill/>
+          </a:ln>
+        </p:spPr>
+        <p:style>
+          <a:lnRef idx="1">
+            <a:schemeClr val="accent1"/>
+          </a:lnRef>
+          <a:fillRef idx="3">
+            <a:schemeClr val="accent1"/>
+          </a:fillRef>
+          <a:effectRef idx="2">
+            <a:schemeClr val="accent1"/>
+          </a:effectRef>
+          <a:fontRef idx="minor">
+            <a:schemeClr val="lt1"/>
+          </a:fontRef>
+        </p:style>
+        <p:txBody>
+          <a:bodyPr rtlCol="0" anchor="ctr"/>
+          <a:lstStyle/>
+          <a:p>
+            <a:pPr algn="ctr"/>
+          </a:p>
+        </p:txBody>
+      </p:sp>
+      <p:sp>
+        <p:nvSpPr>
+          <p:cNvPr id="3" name="Rectangle 2"/>
+          <p:cNvSpPr/>
+          <p:nvPr/>
+        </p:nvSpPr>
+        <p:spPr>
+          <a:xfrm>
+            <a:off x="0" y="960120"/>
+            <a:ext cx="12188952" cy="50292"/>
+          </a:xfrm>
+          <a:prstGeom prst="rect">
+            <a:avLst/>
+          </a:prstGeom>
+          <a:solidFill>
+            <a:srgbClr val="E84A35"/>
+          </a:solidFill>
+          <a:ln>
+            <a:noFill/>
+          </a:ln>
+        </p:spPr>
+        <p:style>
+          <a:lnRef idx="1">
+            <a:schemeClr val="accent1"/>
+          </a:lnRef>
+          <a:fillRef idx="3">
+            <a:schemeClr val="accent1"/>
+          </a:fillRef>
+          <a:effectRef idx="2">
+            <a:schemeClr val="accent1"/>
+          </a:effectRef>
+          <a:fontRef idx="minor">
+            <a:schemeClr val="lt1"/>
+          </a:fontRef>
+        </p:style>
+        <p:txBody>
+          <a:bodyPr rtlCol="0" anchor="ctr"/>
+          <a:lstStyle/>
+          <a:p>
+            <a:pPr algn="ctr"/>
+          </a:p>
+        </p:txBody>
+      </p:sp>
+      <p:sp>
+        <p:nvSpPr>
+          <p:cNvPr id="4" name="TextBox 3"/>
+          <p:cNvSpPr txBox="1"/>
+          <p:nvPr/>
+        </p:nvSpPr>
+        <p:spPr>
+          <a:xfrm>
+            <a:off x="411480" y="73152"/>
+            <a:ext cx="11338560" cy="640080"/>
+          </a:xfrm>
+          <a:prstGeom prst="rect">
+            <a:avLst/>
+          </a:prstGeom>
+          <a:noFill/>
+        </p:spPr>
+        <p:txBody>
+          <a:bodyPr wrap="square">
+            <a:spAutoFit/>
+          </a:bodyPr>
+          <a:lstStyle/>
+          <a:p>
+            <a:pPr algn="l"/>
+            <a:r>
+              <a:rPr sz="3000" b="1" i="0">
+                <a:solidFill>
+                  <a:srgbClr val="FFFFFF"/>
+                </a:solidFill>
+              </a:rPr>
+              <a:t>Future Work</a:t>
+            </a:r>
+          </a:p>
+        </p:txBody>
+      </p:sp>
+      <p:sp>
+        <p:nvSpPr>
+          <p:cNvPr id="5" name="Rectangle 4"/>
+          <p:cNvSpPr/>
+          <p:nvPr/>
+        </p:nvSpPr>
+        <p:spPr>
+          <a:xfrm>
+            <a:off x="365760" y="1115568"/>
+            <a:ext cx="11430000" cy="1207008"/>
+          </a:xfrm>
+          <a:prstGeom prst="rect">
+            <a:avLst/>
+          </a:prstGeom>
+          <a:solidFill>
+            <a:srgbClr val="1C1C3A"/>
+          </a:solidFill>
+          <a:ln>
+            <a:noFill/>
+          </a:ln>
+        </p:spPr>
+        <p:style>
+          <a:lnRef idx="1">
+            <a:schemeClr val="accent1"/>
+          </a:lnRef>
+          <a:fillRef idx="3">
+            <a:schemeClr val="accent1"/>
+          </a:fillRef>
+          <a:effectRef idx="2">
+            <a:schemeClr val="accent1"/>
+          </a:effectRef>
+          <a:fontRef idx="minor">
+            <a:schemeClr val="lt1"/>
+          </a:fontRef>
+        </p:style>
+        <p:txBody>
+          <a:bodyPr rtlCol="0" anchor="ctr"/>
+          <a:lstStyle/>
+          <a:p>
+            <a:pPr algn="ctr"/>
+          </a:p>
+        </p:txBody>
+      </p:sp>
+      <p:sp>
+        <p:nvSpPr>
+          <p:cNvPr id="6" name="Rectangle 5"/>
+          <p:cNvSpPr/>
+          <p:nvPr/>
+        </p:nvSpPr>
+        <p:spPr>
+          <a:xfrm>
+            <a:off x="365760" y="1115568"/>
+            <a:ext cx="137160" cy="1207008"/>
+          </a:xfrm>
+          <a:prstGeom prst="rect">
+            <a:avLst/>
+          </a:prstGeom>
+          <a:solidFill>
+            <a:srgbClr val="4CAF50"/>
+          </a:solidFill>
+          <a:ln>
+            <a:noFill/>
+          </a:ln>
+        </p:spPr>
+        <p:style>
+          <a:lnRef idx="1">
+            <a:schemeClr val="accent1"/>
+          </a:lnRef>
+          <a:fillRef idx="3">
+            <a:schemeClr val="accent1"/>
+          </a:fillRef>
+          <a:effectRef idx="2">
+            <a:schemeClr val="accent1"/>
+          </a:effectRef>
+          <a:fontRef idx="minor">
+            <a:schemeClr val="lt1"/>
+          </a:fontRef>
+        </p:style>
+        <p:txBody>
+          <a:bodyPr rtlCol="0" anchor="ctr"/>
+          <a:lstStyle/>
+          <a:p>
+            <a:pPr algn="ctr"/>
+          </a:p>
+        </p:txBody>
+      </p:sp>
+      <p:sp>
+        <p:nvSpPr>
+          <p:cNvPr id="7" name="TextBox 6"/>
+          <p:cNvSpPr txBox="1"/>
+          <p:nvPr/>
+        </p:nvSpPr>
+        <p:spPr>
+          <a:xfrm>
+            <a:off x="658368" y="1225295"/>
+            <a:ext cx="5029200" cy="411480"/>
+          </a:xfrm>
+          <a:prstGeom prst="rect">
+            <a:avLst/>
+          </a:prstGeom>
+          <a:noFill/>
+        </p:spPr>
+        <p:txBody>
+          <a:bodyPr wrap="square">
+            <a:spAutoFit/>
+          </a:bodyPr>
+          <a:lstStyle/>
+          <a:p>
+            <a:pPr algn="l"/>
+            <a:r>
+              <a:rPr sz="1500" b="1" i="0">
+                <a:solidFill>
+                  <a:srgbClr val="4CAF50"/>
+                </a:solidFill>
+              </a:rPr>
+              <a:t>Focus on one model</a:t>
+            </a:r>
+          </a:p>
+        </p:txBody>
+      </p:sp>
+      <p:sp>
+        <p:nvSpPr>
+          <p:cNvPr id="8" name="TextBox 7"/>
+          <p:cNvSpPr txBox="1"/>
+          <p:nvPr/>
+        </p:nvSpPr>
+        <p:spPr>
+          <a:xfrm>
+            <a:off x="658368" y="1645919"/>
+            <a:ext cx="10789920" cy="585216"/>
+          </a:xfrm>
+          <a:prstGeom prst="rect">
+            <a:avLst/>
+          </a:prstGeom>
+          <a:noFill/>
+        </p:spPr>
+        <p:txBody>
+          <a:bodyPr wrap="square">
+            <a:spAutoFit/>
+          </a:bodyPr>
+          <a:lstStyle/>
+          <a:p>
+            <a:pPr algn="l"/>
+            <a:r>
+              <a:rPr sz="1300" b="0" i="0">
+                <a:solidFill>
+                  <a:srgbClr val="A0B4C8"/>
+                </a:solidFill>
+              </a:rPr>
+              <a:t>Fine-tune ResidualVAE (best NAG = 0.988) with more epochs and the full 160k training set.</a:t>
+            </a:r>
+          </a:p>
+        </p:txBody>
+      </p:sp>
+      <p:sp>
+        <p:nvSpPr>
+          <p:cNvPr id="9" name="Rectangle 8"/>
+          <p:cNvSpPr/>
+          <p:nvPr/>
+        </p:nvSpPr>
+        <p:spPr>
+          <a:xfrm>
+            <a:off x="365760" y="2468880"/>
+            <a:ext cx="11430000" cy="1207008"/>
+          </a:xfrm>
+          <a:prstGeom prst="rect">
+            <a:avLst/>
+          </a:prstGeom>
+          <a:solidFill>
+            <a:srgbClr val="1C1C3A"/>
+          </a:solidFill>
+          <a:ln>
+            <a:noFill/>
+          </a:ln>
+        </p:spPr>
+        <p:style>
+          <a:lnRef idx="1">
+            <a:schemeClr val="accent1"/>
+          </a:lnRef>
+          <a:fillRef idx="3">
+            <a:schemeClr val="accent1"/>
+          </a:fillRef>
+          <a:effectRef idx="2">
+            <a:schemeClr val="accent1"/>
+          </a:effectRef>
+          <a:fontRef idx="minor">
+            <a:schemeClr val="lt1"/>
+          </a:fontRef>
+        </p:style>
+        <p:txBody>
+          <a:bodyPr rtlCol="0" anchor="ctr"/>
+          <a:lstStyle/>
+          <a:p>
+            <a:pPr algn="ctr"/>
+          </a:p>
+        </p:txBody>
+      </p:sp>
+      <p:sp>
+        <p:nvSpPr>
+          <p:cNvPr id="10" name="Rectangle 9"/>
+          <p:cNvSpPr/>
+          <p:nvPr/>
+        </p:nvSpPr>
+        <p:spPr>
+          <a:xfrm>
+            <a:off x="365760" y="2468880"/>
+            <a:ext cx="137160" cy="1207008"/>
+          </a:xfrm>
+          <a:prstGeom prst="rect">
+            <a:avLst/>
+          </a:prstGeom>
+          <a:solidFill>
+            <a:srgbClr val="2196F3"/>
+          </a:solidFill>
+          <a:ln>
+            <a:noFill/>
+          </a:ln>
+        </p:spPr>
+        <p:style>
+          <a:lnRef idx="1">
+            <a:schemeClr val="accent1"/>
+          </a:lnRef>
+          <a:fillRef idx="3">
+            <a:schemeClr val="accent1"/>
+          </a:fillRef>
+          <a:effectRef idx="2">
+            <a:schemeClr val="accent1"/>
+          </a:effectRef>
+          <a:fontRef idx="minor">
+            <a:schemeClr val="lt1"/>
+          </a:fontRef>
+        </p:style>
+        <p:txBody>
+          <a:bodyPr rtlCol="0" anchor="ctr"/>
+          <a:lstStyle/>
+          <a:p>
+            <a:pPr algn="ctr"/>
+          </a:p>
+        </p:txBody>
+      </p:sp>
+      <p:sp>
+        <p:nvSpPr>
+          <p:cNvPr id="11" name="TextBox 10"/>
+          <p:cNvSpPr txBox="1"/>
+          <p:nvPr/>
+        </p:nvSpPr>
+        <p:spPr>
+          <a:xfrm>
+            <a:off x="658368" y="2578608"/>
+            <a:ext cx="5029200" cy="411480"/>
+          </a:xfrm>
+          <a:prstGeom prst="rect">
+            <a:avLst/>
+          </a:prstGeom>
+          <a:noFill/>
+        </p:spPr>
+        <p:txBody>
+          <a:bodyPr wrap="square">
+            <a:spAutoFit/>
+          </a:bodyPr>
+          <a:lstStyle/>
+          <a:p>
+            <a:pPr algn="l"/>
+            <a:r>
+              <a:rPr sz="1500" b="1" i="0">
+                <a:solidFill>
+                  <a:srgbClr val="2196F3"/>
+                </a:solidFill>
+              </a:rPr>
+              <a:t>Gradient Reversal Layer</a:t>
+            </a:r>
+          </a:p>
+        </p:txBody>
+      </p:sp>
+      <p:sp>
+        <p:nvSpPr>
+          <p:cNvPr id="12" name="TextBox 11"/>
+          <p:cNvSpPr txBox="1"/>
+          <p:nvPr/>
+        </p:nvSpPr>
+        <p:spPr>
+          <a:xfrm>
+            <a:off x="658368" y="2999232"/>
+            <a:ext cx="10789920" cy="585216"/>
+          </a:xfrm>
+          <a:prstGeom prst="rect">
+            <a:avLst/>
+          </a:prstGeom>
+          <a:noFill/>
+        </p:spPr>
+        <p:txBody>
+          <a:bodyPr wrap="square">
+            <a:spAutoFit/>
+          </a:bodyPr>
+          <a:lstStyle/>
+          <a:p>
+            <a:pPr algn="l"/>
+            <a:r>
+              <a:rPr sz="1300" b="0" i="0">
+                <a:solidFill>
+                  <a:srgbClr val="A0B4C8"/>
+                </a:solidFill>
+              </a:rPr>
+              <a:t>Replace ARL objective with a GRL — directly reverses gradients through the adversary, more principled than indirect penalisation.</a:t>
+            </a:r>
+          </a:p>
+        </p:txBody>
+      </p:sp>
+      <p:sp>
+        <p:nvSpPr>
+          <p:cNvPr id="13" name="Rectangle 12"/>
+          <p:cNvSpPr/>
+          <p:nvPr/>
+        </p:nvSpPr>
+        <p:spPr>
+          <a:xfrm>
+            <a:off x="365760" y="3822191"/>
+            <a:ext cx="11430000" cy="1207008"/>
+          </a:xfrm>
+          <a:prstGeom prst="rect">
+            <a:avLst/>
+          </a:prstGeom>
+          <a:solidFill>
+            <a:srgbClr val="1C1C3A"/>
+          </a:solidFill>
+          <a:ln>
+            <a:noFill/>
+          </a:ln>
+        </p:spPr>
+        <p:style>
+          <a:lnRef idx="1">
+            <a:schemeClr val="accent1"/>
+          </a:lnRef>
+          <a:fillRef idx="3">
+            <a:schemeClr val="accent1"/>
+          </a:fillRef>
+          <a:effectRef idx="2">
+            <a:schemeClr val="accent1"/>
+          </a:effectRef>
+          <a:fontRef idx="minor">
+            <a:schemeClr val="lt1"/>
+          </a:fontRef>
+        </p:style>
+        <p:txBody>
+          <a:bodyPr rtlCol="0" anchor="ctr"/>
+          <a:lstStyle/>
+          <a:p>
+            <a:pPr algn="ctr"/>
+          </a:p>
+        </p:txBody>
+      </p:sp>
+      <p:sp>
+        <p:nvSpPr>
+          <p:cNvPr id="14" name="Rectangle 13"/>
+          <p:cNvSpPr/>
+          <p:nvPr/>
+        </p:nvSpPr>
+        <p:spPr>
+          <a:xfrm>
+            <a:off x="365760" y="3822191"/>
+            <a:ext cx="137160" cy="1207008"/>
+          </a:xfrm>
+          <a:prstGeom prst="rect">
+            <a:avLst/>
+          </a:prstGeom>
+          <a:solidFill>
+            <a:srgbClr val="FF9800"/>
+          </a:solidFill>
+          <a:ln>
+            <a:noFill/>
+          </a:ln>
+        </p:spPr>
+        <p:style>
+          <a:lnRef idx="1">
+            <a:schemeClr val="accent1"/>
+          </a:lnRef>
+          <a:fillRef idx="3">
+            <a:schemeClr val="accent1"/>
+          </a:fillRef>
+          <a:effectRef idx="2">
+            <a:schemeClr val="accent1"/>
+          </a:effectRef>
+          <a:fontRef idx="minor">
+            <a:schemeClr val="lt1"/>
+          </a:fontRef>
+        </p:style>
+        <p:txBody>
+          <a:bodyPr rtlCol="0" anchor="ctr"/>
+          <a:lstStyle/>
+          <a:p>
+            <a:pPr algn="ctr"/>
+          </a:p>
+        </p:txBody>
+      </p:sp>
+      <p:sp>
+        <p:nvSpPr>
+          <p:cNvPr id="15" name="TextBox 14"/>
+          <p:cNvSpPr txBox="1"/>
+          <p:nvPr/>
+        </p:nvSpPr>
+        <p:spPr>
+          <a:xfrm>
+            <a:off x="658368" y="3931920"/>
+            <a:ext cx="5029200" cy="411480"/>
+          </a:xfrm>
+          <a:prstGeom prst="rect">
+            <a:avLst/>
+          </a:prstGeom>
+          <a:noFill/>
+        </p:spPr>
+        <p:txBody>
+          <a:bodyPr wrap="square">
+            <a:spAutoFit/>
+          </a:bodyPr>
+          <a:lstStyle/>
+          <a:p>
+            <a:pPr algn="l"/>
+            <a:r>
+              <a:rPr sz="1500" b="1" i="0">
+                <a:solidFill>
+                  <a:srgbClr val="FF9800"/>
+                </a:solidFill>
+              </a:rPr>
+              <a:t>Lower resolution (64 × 64)</a:t>
+            </a:r>
+          </a:p>
+        </p:txBody>
+      </p:sp>
+      <p:sp>
+        <p:nvSpPr>
+          <p:cNvPr id="16" name="TextBox 15"/>
+          <p:cNvSpPr txBox="1"/>
+          <p:nvPr/>
+        </p:nvSpPr>
+        <p:spPr>
+          <a:xfrm>
+            <a:off x="658368" y="4352544"/>
+            <a:ext cx="10789920" cy="585216"/>
+          </a:xfrm>
+          <a:prstGeom prst="rect">
+            <a:avLst/>
+          </a:prstGeom>
+          <a:noFill/>
+        </p:spPr>
+        <p:txBody>
+          <a:bodyPr wrap="square">
+            <a:spAutoFit/>
+          </a:bodyPr>
+          <a:lstStyle/>
+          <a:p>
+            <a:pPr algn="l"/>
+            <a:r>
+              <a:rPr sz="1300" b="0" i="0">
+                <a:solidFill>
+                  <a:srgbClr val="A0B4C8"/>
+                </a:solidFill>
+              </a:rPr>
+              <a:t>Less pixel information = less gender signal available. Malia is exploring this for VQ-VAE to prevent codebook collapse.</a:t>
+            </a:r>
+          </a:p>
+        </p:txBody>
+      </p:sp>
+      <p:sp>
+        <p:nvSpPr>
+          <p:cNvPr id="17" name="Rectangle 16"/>
+          <p:cNvSpPr/>
+          <p:nvPr/>
+        </p:nvSpPr>
+        <p:spPr>
+          <a:xfrm>
+            <a:off x="365760" y="5175503"/>
+            <a:ext cx="11430000" cy="1207008"/>
+          </a:xfrm>
+          <a:prstGeom prst="rect">
+            <a:avLst/>
+          </a:prstGeom>
+          <a:solidFill>
+            <a:srgbClr val="1C1C3A"/>
+          </a:solidFill>
+          <a:ln>
+            <a:noFill/>
+          </a:ln>
+        </p:spPr>
+        <p:style>
+          <a:lnRef idx="1">
+            <a:schemeClr val="accent1"/>
+          </a:lnRef>
+          <a:fillRef idx="3">
+            <a:schemeClr val="accent1"/>
+          </a:fillRef>
+          <a:effectRef idx="2">
+            <a:schemeClr val="accent1"/>
+          </a:effectRef>
+          <a:fontRef idx="minor">
+            <a:schemeClr val="lt1"/>
+          </a:fontRef>
+        </p:style>
+        <p:txBody>
+          <a:bodyPr rtlCol="0" anchor="ctr"/>
+          <a:lstStyle/>
+          <a:p>
+            <a:pPr algn="ctr"/>
+          </a:p>
+        </p:txBody>
+      </p:sp>
+      <p:sp>
+        <p:nvSpPr>
+          <p:cNvPr id="18" name="Rectangle 17"/>
+          <p:cNvSpPr/>
+          <p:nvPr/>
+        </p:nvSpPr>
+        <p:spPr>
+          <a:xfrm>
+            <a:off x="365760" y="5175503"/>
+            <a:ext cx="137160" cy="1207008"/>
+          </a:xfrm>
+          <a:prstGeom prst="rect">
+            <a:avLst/>
+          </a:prstGeom>
+          <a:solidFill>
+            <a:srgbClr val="F5A623"/>
+          </a:solidFill>
+          <a:ln>
+            <a:noFill/>
+          </a:ln>
+        </p:spPr>
+        <p:style>
+          <a:lnRef idx="1">
+            <a:schemeClr val="accent1"/>
+          </a:lnRef>
+          <a:fillRef idx="3">
+            <a:schemeClr val="accent1"/>
+          </a:fillRef>
+          <a:effectRef idx="2">
+            <a:schemeClr val="accent1"/>
+          </a:effectRef>
+          <a:fontRef idx="minor">
+            <a:schemeClr val="lt1"/>
+          </a:fontRef>
+        </p:style>
+        <p:txBody>
+          <a:bodyPr rtlCol="0" anchor="ctr"/>
+          <a:lstStyle/>
+          <a:p>
+            <a:pPr algn="ctr"/>
+          </a:p>
+        </p:txBody>
+      </p:sp>
+      <p:sp>
+        <p:nvSpPr>
+          <p:cNvPr id="19" name="TextBox 18"/>
+          <p:cNvSpPr txBox="1"/>
+          <p:nvPr/>
+        </p:nvSpPr>
+        <p:spPr>
+          <a:xfrm>
+            <a:off x="658368" y="5285231"/>
+            <a:ext cx="5029200" cy="411480"/>
+          </a:xfrm>
+          <a:prstGeom prst="rect">
+            <a:avLst/>
+          </a:prstGeom>
+          <a:noFill/>
+        </p:spPr>
+        <p:txBody>
+          <a:bodyPr wrap="square">
+            <a:spAutoFit/>
+          </a:bodyPr>
+          <a:lstStyle/>
+          <a:p>
+            <a:pPr algn="l"/>
+            <a:r>
+              <a:rPr sz="1500" b="1" i="0">
+                <a:solidFill>
+                  <a:srgbClr val="F5A623"/>
+                </a:solidFill>
+              </a:rPr>
+              <a:t>INT8 Quantisation</a:t>
+            </a:r>
+          </a:p>
+        </p:txBody>
+      </p:sp>
+      <p:sp>
+        <p:nvSpPr>
+          <p:cNvPr id="20" name="TextBox 19"/>
+          <p:cNvSpPr txBox="1"/>
+          <p:nvPr/>
+        </p:nvSpPr>
+        <p:spPr>
+          <a:xfrm>
+            <a:off x="658368" y="5705855"/>
+            <a:ext cx="10789920" cy="585216"/>
+          </a:xfrm>
+          <a:prstGeom prst="rect">
+            <a:avLst/>
+          </a:prstGeom>
+          <a:noFill/>
+        </p:spPr>
+        <p:txBody>
+          <a:bodyPr wrap="square">
+            <a:spAutoFit/>
+          </a:bodyPr>
+          <a:lstStyle/>
+          <a:p>
+            <a:pPr algn="l"/>
+            <a:r>
+              <a:rPr sz="1300" b="0" i="0">
+                <a:solidFill>
+                  <a:srgbClr val="A0B4C8"/>
+                </a:solidFill>
+              </a:rPr>
+              <a:t>Post-training quantisation would reduce latency ~4×. VanillaVAE (20ms) could hit real-time at &lt; 10ms on edge CPU.</a:t>
+            </a:r>
+          </a:p>
+        </p:txBody>
+      </p:sp>
+    </p:spTree>
+  </p:cSld>
+  <p:clrMapOvr>
+    <a:masterClrMapping/>
+  </p:clrMapOvr>
+</p:sld>
+</file>
+
+<file path=ppt/slides/slide19.xml><?xml version="1.0" encoding="utf-8"?>
+<p:sld xmlns:a="http://schemas.openxmlformats.org/drawingml/2006/main" xmlns:p="http://schemas.openxmlformats.org/presentationml/2006/main" xmlns:r="http://schemas.openxmlformats.org/officeDocument/2006/relationships">
+  <p:cSld>
+    <p:bg>
+      <p:bgPr>
+        <a:solidFill>
+          <a:srgbClr val="121224"/>
+        </a:solidFill>
+        <a:effectLst/>
+      </p:bgPr>
+    </p:bg>
+    <p:spTree>
+      <p:nvGrpSpPr>
+        <p:cNvPr id="1" name=""/>
+        <p:cNvGrpSpPr/>
+        <p:nvPr/>
+      </p:nvGrpSpPr>
+      <p:grpSpPr/>
+      <p:sp>
+        <p:nvSpPr>
+          <p:cNvPr id="2" name="Rectangle 1"/>
+          <p:cNvSpPr/>
+          <p:nvPr/>
+        </p:nvSpPr>
+        <p:spPr>
+          <a:xfrm>
+            <a:off x="0" y="0"/>
             <a:ext cx="12188952" cy="6858000"/>
           </a:xfrm>
           <a:prstGeom prst="rect">
@@ -15658,7 +16479,7 @@
                   <a:srgbClr val="A0B4C8"/>
                 </a:solidFill>
               </a:rPr>
-              <a:t>CelebA test set · 2,000 samples · Utility = Smile · Privacy = Gender</a:t>
+              <a:t>CelebA test set · 2,000 samples · 10 epochs · 20k training samples · Utility = Smile · Privacy = Gender</a:t>
             </a:r>
           </a:p>
         </p:txBody>
@@ -15714,23 +16535,23 @@
         </p:nvSpPr>
         <p:spPr>
           <a:xfrm>
-            <a:off x="329184" y="1115568"/>
-            <a:ext cx="2560320" cy="384048"/>
-          </a:xfrm>
-          <a:prstGeom prst="rect">
-            <a:avLst/>
-          </a:prstGeom>
-          <a:noFill/>
-        </p:spPr>
-        <p:txBody>
-          <a:bodyPr wrap="square">
-            <a:spAutoFit/>
-          </a:bodyPr>
-          <a:lstStyle/>
-          <a:p>
-            <a:pPr algn="ctr"/>
-            <a:r>
-              <a:rPr sz="1200" b="1" i="0">
+            <a:off x="310896" y="1115568"/>
+            <a:ext cx="2395728" cy="384048"/>
+          </a:xfrm>
+          <a:prstGeom prst="rect">
+            <a:avLst/>
+          </a:prstGeom>
+          <a:noFill/>
+        </p:spPr>
+        <p:txBody>
+          <a:bodyPr wrap="square">
+            <a:spAutoFit/>
+          </a:bodyPr>
+          <a:lstStyle/>
+          <a:p>
+            <a:pPr algn="ctr"/>
+            <a:r>
+              <a:rPr sz="1100" b="1" i="0">
                 <a:solidFill>
                   <a:srgbClr val="F5A623"/>
                 </a:solidFill>
@@ -15748,23 +16569,23 @@
         </p:nvSpPr>
         <p:spPr>
           <a:xfrm>
-            <a:off x="2980944" y="1115568"/>
-            <a:ext cx="1143000" cy="384048"/>
-          </a:xfrm>
-          <a:prstGeom prst="rect">
-            <a:avLst/>
-          </a:prstGeom>
-          <a:noFill/>
-        </p:spPr>
-        <p:txBody>
-          <a:bodyPr wrap="square">
-            <a:spAutoFit/>
-          </a:bodyPr>
-          <a:lstStyle/>
-          <a:p>
-            <a:pPr algn="ctr"/>
-            <a:r>
-              <a:rPr sz="1200" b="1" i="0">
+            <a:off x="2779776" y="1115568"/>
+            <a:ext cx="1069848" cy="384048"/>
+          </a:xfrm>
+          <a:prstGeom prst="rect">
+            <a:avLst/>
+          </a:prstGeom>
+          <a:noFill/>
+        </p:spPr>
+        <p:txBody>
+          <a:bodyPr wrap="square">
+            <a:spAutoFit/>
+          </a:bodyPr>
+          <a:lstStyle/>
+          <a:p>
+            <a:pPr algn="ctr"/>
+            <a:r>
+              <a:rPr sz="1100" b="1" i="0">
                 <a:solidFill>
                   <a:srgbClr val="F5A623"/>
                 </a:solidFill>
@@ -15782,23 +16603,23 @@
         </p:nvSpPr>
         <p:spPr>
           <a:xfrm>
-            <a:off x="4215383" y="1115568"/>
-            <a:ext cx="1143000" cy="384048"/>
-          </a:xfrm>
-          <a:prstGeom prst="rect">
-            <a:avLst/>
-          </a:prstGeom>
-          <a:noFill/>
-        </p:spPr>
-        <p:txBody>
-          <a:bodyPr wrap="square">
-            <a:spAutoFit/>
-          </a:bodyPr>
-          <a:lstStyle/>
-          <a:p>
-            <a:pPr algn="ctr"/>
-            <a:r>
-              <a:rPr sz="1200" b="1" i="0">
+            <a:off x="3922776" y="1115568"/>
+            <a:ext cx="1069848" cy="384048"/>
+          </a:xfrm>
+          <a:prstGeom prst="rect">
+            <a:avLst/>
+          </a:prstGeom>
+          <a:noFill/>
+        </p:spPr>
+        <p:txBody>
+          <a:bodyPr wrap="square">
+            <a:spAutoFit/>
+          </a:bodyPr>
+          <a:lstStyle/>
+          <a:p>
+            <a:pPr algn="ctr"/>
+            <a:r>
+              <a:rPr sz="1100" b="1" i="0">
                 <a:solidFill>
                   <a:srgbClr val="F5A623"/>
                 </a:solidFill>
@@ -15816,23 +16637,23 @@
         </p:nvSpPr>
         <p:spPr>
           <a:xfrm>
-            <a:off x="5449824" y="1115568"/>
-            <a:ext cx="1005839" cy="384048"/>
-          </a:xfrm>
-          <a:prstGeom prst="rect">
-            <a:avLst/>
-          </a:prstGeom>
-          <a:noFill/>
-        </p:spPr>
-        <p:txBody>
-          <a:bodyPr wrap="square">
-            <a:spAutoFit/>
-          </a:bodyPr>
-          <a:lstStyle/>
-          <a:p>
-            <a:pPr algn="ctr"/>
-            <a:r>
-              <a:rPr sz="1200" b="1" i="0">
+            <a:off x="5065776" y="1115568"/>
+            <a:ext cx="1024127" cy="384048"/>
+          </a:xfrm>
+          <a:prstGeom prst="rect">
+            <a:avLst/>
+          </a:prstGeom>
+          <a:noFill/>
+        </p:spPr>
+        <p:txBody>
+          <a:bodyPr wrap="square">
+            <a:spAutoFit/>
+          </a:bodyPr>
+          <a:lstStyle/>
+          <a:p>
+            <a:pPr algn="ctr"/>
+            <a:r>
+              <a:rPr sz="1100" b="1" i="0">
                 <a:solidFill>
                   <a:srgbClr val="F5A623"/>
                 </a:solidFill>
@@ -15850,23 +16671,23 @@
         </p:nvSpPr>
         <p:spPr>
           <a:xfrm>
-            <a:off x="6547104" y="1115568"/>
-            <a:ext cx="1005839" cy="384048"/>
-          </a:xfrm>
-          <a:prstGeom prst="rect">
-            <a:avLst/>
-          </a:prstGeom>
-          <a:noFill/>
-        </p:spPr>
-        <p:txBody>
-          <a:bodyPr wrap="square">
-            <a:spAutoFit/>
-          </a:bodyPr>
-          <a:lstStyle/>
-          <a:p>
-            <a:pPr algn="ctr"/>
-            <a:r>
-              <a:rPr sz="1200" b="1" i="0">
+            <a:off x="6163056" y="1115568"/>
+            <a:ext cx="1024127" cy="384048"/>
+          </a:xfrm>
+          <a:prstGeom prst="rect">
+            <a:avLst/>
+          </a:prstGeom>
+          <a:noFill/>
+        </p:spPr>
+        <p:txBody>
+          <a:bodyPr wrap="square">
+            <a:spAutoFit/>
+          </a:bodyPr>
+          <a:lstStyle/>
+          <a:p>
+            <a:pPr algn="ctr"/>
+            <a:r>
+              <a:rPr sz="1100" b="1" i="0">
                 <a:solidFill>
                   <a:srgbClr val="F5A623"/>
                 </a:solidFill>
@@ -15884,27 +16705,61 @@
         </p:nvSpPr>
         <p:spPr>
           <a:xfrm>
-            <a:off x="7644384" y="1115568"/>
-            <a:ext cx="1051560" cy="384048"/>
-          </a:xfrm>
-          <a:prstGeom prst="rect">
-            <a:avLst/>
-          </a:prstGeom>
-          <a:noFill/>
-        </p:spPr>
-        <p:txBody>
-          <a:bodyPr wrap="square">
-            <a:spAutoFit/>
-          </a:bodyPr>
-          <a:lstStyle/>
-          <a:p>
-            <a:pPr algn="ctr"/>
-            <a:r>
-              <a:rPr sz="1200" b="1" i="0">
+            <a:off x="7260336" y="1115568"/>
+            <a:ext cx="932688" cy="384048"/>
+          </a:xfrm>
+          <a:prstGeom prst="rect">
+            <a:avLst/>
+          </a:prstGeom>
+          <a:noFill/>
+        </p:spPr>
+        <p:txBody>
+          <a:bodyPr wrap="square">
+            <a:spAutoFit/>
+          </a:bodyPr>
+          <a:lstStyle/>
+          <a:p>
+            <a:pPr algn="ctr"/>
+            <a:r>
+              <a:rPr sz="1100" b="1" i="0">
                 <a:solidFill>
                   <a:srgbClr val="F5A623"/>
                 </a:solidFill>
               </a:rPr>
+              <a:t>F1</a:t>
+            </a:r>
+          </a:p>
+        </p:txBody>
+      </p:sp>
+      <p:sp>
+        <p:nvSpPr>
+          <p:cNvPr id="13" name="TextBox 12"/>
+          <p:cNvSpPr txBox="1"/>
+          <p:nvPr/>
+        </p:nvSpPr>
+        <p:spPr>
+          <a:xfrm>
+            <a:off x="8266175" y="1115568"/>
+            <a:ext cx="932688" cy="384048"/>
+          </a:xfrm>
+          <a:prstGeom prst="rect">
+            <a:avLst/>
+          </a:prstGeom>
+          <a:noFill/>
+        </p:spPr>
+        <p:txBody>
+          <a:bodyPr wrap="square">
+            <a:spAutoFit/>
+          </a:bodyPr>
+          <a:lstStyle/>
+          <a:p>
+            <a:pPr algn="ctr"/>
+            <a:r>
+              <a:rPr sz="1100" b="1" i="0">
+                <a:solidFill>
+                  <a:srgbClr val="F5A623"/>
+                </a:solidFill>
+              </a:rPr>
               <a:t>NAG</a:t>
             </a:r>
           </a:p>
@@ -15912,48 +16767,48 @@
       </p:sp>
       <p:sp>
         <p:nvSpPr>
-          <p:cNvPr id="13" name="TextBox 12"/>
-          <p:cNvSpPr txBox="1"/>
-          <p:nvPr/>
-        </p:nvSpPr>
-        <p:spPr>
-          <a:xfrm>
-            <a:off x="8787384" y="1115568"/>
-            <a:ext cx="1783079" cy="384048"/>
-          </a:xfrm>
-          <a:prstGeom prst="rect">
-            <a:avLst/>
-          </a:prstGeom>
-          <a:noFill/>
-        </p:spPr>
-        <p:txBody>
-          <a:bodyPr wrap="square">
-            <a:spAutoFit/>
-          </a:bodyPr>
-          <a:lstStyle/>
-          <a:p>
-            <a:pPr algn="ctr"/>
-            <a:r>
-              <a:rPr sz="1200" b="1" i="0">
+          <p:cNvPr id="14" name="TextBox 13"/>
+          <p:cNvSpPr txBox="1"/>
+          <p:nvPr/>
+        </p:nvSpPr>
+        <p:spPr>
+          <a:xfrm>
+            <a:off x="9272015" y="1115568"/>
+            <a:ext cx="1755648" cy="384048"/>
+          </a:xfrm>
+          <a:prstGeom prst="rect">
+            <a:avLst/>
+          </a:prstGeom>
+          <a:noFill/>
+        </p:spPr>
+        <p:txBody>
+          <a:bodyPr wrap="square">
+            <a:spAutoFit/>
+          </a:bodyPr>
+          <a:lstStyle/>
+          <a:p>
+            <a:pPr algn="ctr"/>
+            <a:r>
+              <a:rPr sz="1100" b="1" i="0">
                 <a:solidFill>
                   <a:srgbClr val="F5A623"/>
                 </a:solidFill>
               </a:rPr>
-              <a:t>Privacy Status</a:t>
-            </a:r>
-          </a:p>
-        </p:txBody>
-      </p:sp>
-      <p:sp>
-        <p:nvSpPr>
-          <p:cNvPr id="14" name="Rectangle 13"/>
+              <a:t>Best</a:t>
+            </a:r>
+          </a:p>
+        </p:txBody>
+      </p:sp>
+      <p:sp>
+        <p:nvSpPr>
+          <p:cNvPr id="15" name="Rectangle 14"/>
           <p:cNvSpPr/>
           <p:nvPr/>
         </p:nvSpPr>
         <p:spPr>
           <a:xfrm>
             <a:off x="274320" y="1581912"/>
-            <a:ext cx="11640312" cy="640080"/>
+            <a:ext cx="11640312" cy="722376"/>
           </a:xfrm>
           <a:prstGeom prst="rect">
             <a:avLst/>
@@ -15989,63 +16844,63 @@
       </p:sp>
       <p:sp>
         <p:nvSpPr>
-          <p:cNvPr id="15" name="TextBox 14"/>
-          <p:cNvSpPr txBox="1"/>
-          <p:nvPr/>
-        </p:nvSpPr>
-        <p:spPr>
-          <a:xfrm>
-            <a:off x="329184" y="1737360"/>
-            <a:ext cx="2560320" cy="347472"/>
-          </a:xfrm>
-          <a:prstGeom prst="rect">
-            <a:avLst/>
-          </a:prstGeom>
-          <a:noFill/>
-        </p:spPr>
-        <p:txBody>
-          <a:bodyPr wrap="square">
-            <a:spAutoFit/>
-          </a:bodyPr>
-          <a:lstStyle/>
-          <a:p>
-            <a:pPr algn="ctr"/>
-            <a:r>
-              <a:rPr sz="1200" b="1" i="0">
+          <p:cNvPr id="16" name="TextBox 15"/>
+          <p:cNvSpPr txBox="1"/>
+          <p:nvPr/>
+        </p:nvSpPr>
+        <p:spPr>
+          <a:xfrm>
+            <a:off x="310896" y="1783080"/>
+            <a:ext cx="2395728" cy="347472"/>
+          </a:xfrm>
+          <a:prstGeom prst="rect">
+            <a:avLst/>
+          </a:prstGeom>
+          <a:noFill/>
+        </p:spPr>
+        <p:txBody>
+          <a:bodyPr wrap="square">
+            <a:spAutoFit/>
+          </a:bodyPr>
+          <a:lstStyle/>
+          <a:p>
+            <a:pPr algn="ctr"/>
+            <a:r>
+              <a:rPr sz="1100" b="1" i="0">
                 <a:solidFill>
                   <a:srgbClr val="F5A623"/>
                 </a:solidFill>
               </a:rPr>
-              <a:t>VanillaVAE (λ=1)</a:t>
-            </a:r>
-          </a:p>
-        </p:txBody>
-      </p:sp>
-      <p:sp>
-        <p:nvSpPr>
-          <p:cNvPr id="16" name="TextBox 15"/>
-          <p:cNvSpPr txBox="1"/>
-          <p:nvPr/>
-        </p:nvSpPr>
-        <p:spPr>
-          <a:xfrm>
-            <a:off x="2980944" y="1737360"/>
-            <a:ext cx="1143000" cy="347472"/>
-          </a:xfrm>
-          <a:prstGeom prst="rect">
-            <a:avLst/>
-          </a:prstGeom>
-          <a:noFill/>
-        </p:spPr>
-        <p:txBody>
-          <a:bodyPr wrap="square">
-            <a:spAutoFit/>
-          </a:bodyPr>
-          <a:lstStyle/>
-          <a:p>
-            <a:pPr algn="ctr"/>
-            <a:r>
-              <a:rPr sz="1200" b="0" i="0">
+              <a:t>VanillaVAE</a:t>
+            </a:r>
+          </a:p>
+        </p:txBody>
+      </p:sp>
+      <p:sp>
+        <p:nvSpPr>
+          <p:cNvPr id="17" name="TextBox 16"/>
+          <p:cNvSpPr txBox="1"/>
+          <p:nvPr/>
+        </p:nvSpPr>
+        <p:spPr>
+          <a:xfrm>
+            <a:off x="2779776" y="1783080"/>
+            <a:ext cx="1069848" cy="347472"/>
+          </a:xfrm>
+          <a:prstGeom prst="rect">
+            <a:avLst/>
+          </a:prstGeom>
+          <a:noFill/>
+        </p:spPr>
+        <p:txBody>
+          <a:bodyPr wrap="square">
+            <a:spAutoFit/>
+          </a:bodyPr>
+          <a:lstStyle/>
+          <a:p>
+            <a:pPr algn="ctr"/>
+            <a:r>
+              <a:rPr sz="1100" b="0" i="0">
                 <a:solidFill>
                   <a:srgbClr val="4CAF50"/>
                 </a:solidFill>
@@ -16057,29 +16912,29 @@
       </p:sp>
       <p:sp>
         <p:nvSpPr>
-          <p:cNvPr id="17" name="TextBox 16"/>
-          <p:cNvSpPr txBox="1"/>
-          <p:nvPr/>
-        </p:nvSpPr>
-        <p:spPr>
-          <a:xfrm>
-            <a:off x="4215383" y="1737360"/>
-            <a:ext cx="1143000" cy="347472"/>
-          </a:xfrm>
-          <a:prstGeom prst="rect">
-            <a:avLst/>
-          </a:prstGeom>
-          <a:noFill/>
-        </p:spPr>
-        <p:txBody>
-          <a:bodyPr wrap="square">
-            <a:spAutoFit/>
-          </a:bodyPr>
-          <a:lstStyle/>
-          <a:p>
-            <a:pPr algn="ctr"/>
-            <a:r>
-              <a:rPr sz="1200" b="0" i="0">
+          <p:cNvPr id="18" name="TextBox 17"/>
+          <p:cNvSpPr txBox="1"/>
+          <p:nvPr/>
+        </p:nvSpPr>
+        <p:spPr>
+          <a:xfrm>
+            <a:off x="3922776" y="1783080"/>
+            <a:ext cx="1069848" cy="347472"/>
+          </a:xfrm>
+          <a:prstGeom prst="rect">
+            <a:avLst/>
+          </a:prstGeom>
+          <a:noFill/>
+        </p:spPr>
+        <p:txBody>
+          <a:bodyPr wrap="square">
+            <a:spAutoFit/>
+          </a:bodyPr>
+          <a:lstStyle/>
+          <a:p>
+            <a:pPr algn="ctr"/>
+            <a:r>
+              <a:rPr sz="1100" b="0" i="0">
                 <a:solidFill>
                   <a:srgbClr val="FFFFFF"/>
                 </a:solidFill>
@@ -16091,101 +16946,135 @@
       </p:sp>
       <p:sp>
         <p:nvSpPr>
-          <p:cNvPr id="18" name="TextBox 17"/>
-          <p:cNvSpPr txBox="1"/>
-          <p:nvPr/>
-        </p:nvSpPr>
-        <p:spPr>
-          <a:xfrm>
-            <a:off x="5449824" y="1737360"/>
-            <a:ext cx="1005839" cy="347472"/>
-          </a:xfrm>
-          <a:prstGeom prst="rect">
-            <a:avLst/>
-          </a:prstGeom>
-          <a:noFill/>
-        </p:spPr>
-        <p:txBody>
-          <a:bodyPr wrap="square">
-            <a:spAutoFit/>
-          </a:bodyPr>
-          <a:lstStyle/>
-          <a:p>
-            <a:pPr algn="ctr"/>
-            <a:r>
-              <a:rPr sz="1200" b="0" i="0">
+          <p:cNvPr id="19" name="TextBox 18"/>
+          <p:cNvSpPr txBox="1"/>
+          <p:nvPr/>
+        </p:nvSpPr>
+        <p:spPr>
+          <a:xfrm>
+            <a:off x="5065776" y="1783080"/>
+            <a:ext cx="1024127" cy="347472"/>
+          </a:xfrm>
+          <a:prstGeom prst="rect">
+            <a:avLst/>
+          </a:prstGeom>
+          <a:noFill/>
+        </p:spPr>
+        <p:txBody>
+          <a:bodyPr wrap="square">
+            <a:spAutoFit/>
+          </a:bodyPr>
+          <a:lstStyle/>
+          <a:p>
+            <a:pPr algn="ctr"/>
+            <a:r>
+              <a:rPr sz="1100" b="0" i="0">
                 <a:solidFill>
                   <a:srgbClr val="FFFFFF"/>
                 </a:solidFill>
               </a:rPr>
-              <a:t>0.946</a:t>
-            </a:r>
-          </a:p>
-        </p:txBody>
-      </p:sp>
-      <p:sp>
-        <p:nvSpPr>
-          <p:cNvPr id="19" name="TextBox 18"/>
-          <p:cNvSpPr txBox="1"/>
-          <p:nvPr/>
-        </p:nvSpPr>
-        <p:spPr>
-          <a:xfrm>
-            <a:off x="6547104" y="1737360"/>
-            <a:ext cx="1005839" cy="347472"/>
-          </a:xfrm>
-          <a:prstGeom prst="rect">
-            <a:avLst/>
-          </a:prstGeom>
-          <a:noFill/>
-        </p:spPr>
-        <p:txBody>
-          <a:bodyPr wrap="square">
-            <a:spAutoFit/>
-          </a:bodyPr>
-          <a:lstStyle/>
-          <a:p>
-            <a:pPr algn="ctr"/>
-            <a:r>
-              <a:rPr sz="1200" b="0" i="0">
+              <a:t>0.936</a:t>
+            </a:r>
+          </a:p>
+        </p:txBody>
+      </p:sp>
+      <p:sp>
+        <p:nvSpPr>
+          <p:cNvPr id="20" name="TextBox 19"/>
+          <p:cNvSpPr txBox="1"/>
+          <p:nvPr/>
+        </p:nvSpPr>
+        <p:spPr>
+          <a:xfrm>
+            <a:off x="6163056" y="1783080"/>
+            <a:ext cx="1024127" cy="347472"/>
+          </a:xfrm>
+          <a:prstGeom prst="rect">
+            <a:avLst/>
+          </a:prstGeom>
+          <a:noFill/>
+        </p:spPr>
+        <p:txBody>
+          <a:bodyPr wrap="square">
+            <a:spAutoFit/>
+          </a:bodyPr>
+          <a:lstStyle/>
+          <a:p>
+            <a:pPr algn="ctr"/>
+            <a:r>
+              <a:rPr sz="1100" b="0" i="0">
                 <a:solidFill>
                   <a:srgbClr val="FFFFFF"/>
                 </a:solidFill>
               </a:rPr>
-              <a:t>0.949</a:t>
-            </a:r>
-          </a:p>
-        </p:txBody>
-      </p:sp>
-      <p:sp>
-        <p:nvSpPr>
-          <p:cNvPr id="20" name="TextBox 19"/>
-          <p:cNvSpPr txBox="1"/>
-          <p:nvPr/>
-        </p:nvSpPr>
-        <p:spPr>
-          <a:xfrm>
-            <a:off x="7644384" y="1737360"/>
-            <a:ext cx="1051560" cy="347472"/>
-          </a:xfrm>
-          <a:prstGeom prst="rect">
-            <a:avLst/>
-          </a:prstGeom>
-          <a:noFill/>
-        </p:spPr>
-        <p:txBody>
-          <a:bodyPr wrap="square">
-            <a:spAutoFit/>
-          </a:bodyPr>
-          <a:lstStyle/>
-          <a:p>
-            <a:pPr algn="ctr"/>
-            <a:r>
-              <a:rPr sz="1200" b="0" i="0">
+              <a:t>0.937</a:t>
+            </a:r>
+          </a:p>
+        </p:txBody>
+      </p:sp>
+      <p:sp>
+        <p:nvSpPr>
+          <p:cNvPr id="21" name="TextBox 20"/>
+          <p:cNvSpPr txBox="1"/>
+          <p:nvPr/>
+        </p:nvSpPr>
+        <p:spPr>
+          <a:xfrm>
+            <a:off x="7260336" y="1783080"/>
+            <a:ext cx="932688" cy="347472"/>
+          </a:xfrm>
+          <a:prstGeom prst="rect">
+            <a:avLst/>
+          </a:prstGeom>
+          <a:noFill/>
+        </p:spPr>
+        <p:txBody>
+          <a:bodyPr wrap="square">
+            <a:spAutoFit/>
+          </a:bodyPr>
+          <a:lstStyle/>
+          <a:p>
+            <a:pPr algn="ctr"/>
+            <a:r>
+              <a:rPr sz="1100" b="0" i="0">
                 <a:solidFill>
                   <a:srgbClr val="FFFFFF"/>
                 </a:solidFill>
               </a:rPr>
+              <a:t>0.868</a:t>
+            </a:r>
+          </a:p>
+        </p:txBody>
+      </p:sp>
+      <p:sp>
+        <p:nvSpPr>
+          <p:cNvPr id="22" name="TextBox 21"/>
+          <p:cNvSpPr txBox="1"/>
+          <p:nvPr/>
+        </p:nvSpPr>
+        <p:spPr>
+          <a:xfrm>
+            <a:off x="8266175" y="1783080"/>
+            <a:ext cx="932688" cy="347472"/>
+          </a:xfrm>
+          <a:prstGeom prst="rect">
+            <a:avLst/>
+          </a:prstGeom>
+          <a:noFill/>
+        </p:spPr>
+        <p:txBody>
+          <a:bodyPr wrap="square">
+            <a:spAutoFit/>
+          </a:bodyPr>
+          <a:lstStyle/>
+          <a:p>
+            <a:pPr algn="ctr"/>
+            <a:r>
+              <a:rPr sz="1100" b="0" i="0">
+                <a:solidFill>
+                  <a:srgbClr val="FFFFFF"/>
+                </a:solidFill>
+              </a:rPr>
               <a:t>0.940</a:t>
             </a:r>
           </a:p>
@@ -16193,48 +17082,48 @@
       </p:sp>
       <p:sp>
         <p:nvSpPr>
-          <p:cNvPr id="21" name="TextBox 20"/>
-          <p:cNvSpPr txBox="1"/>
-          <p:nvPr/>
-        </p:nvSpPr>
-        <p:spPr>
-          <a:xfrm>
-            <a:off x="8787384" y="1737360"/>
-            <a:ext cx="1783079" cy="347472"/>
-          </a:xfrm>
-          <a:prstGeom prst="rect">
-            <a:avLst/>
-          </a:prstGeom>
-          <a:noFill/>
-        </p:spPr>
-        <p:txBody>
-          <a:bodyPr wrap="square">
-            <a:spAutoFit/>
-          </a:bodyPr>
-          <a:lstStyle/>
-          <a:p>
-            <a:pPr algn="ctr"/>
-            <a:r>
-              <a:rPr sz="1200" b="0" i="0">
-                <a:solidFill>
-                  <a:srgbClr val="E84A35"/>
-                </a:solidFill>
-              </a:rPr>
-              <a:t>Leaking</a:t>
-            </a:r>
-          </a:p>
-        </p:txBody>
-      </p:sp>
-      <p:sp>
-        <p:nvSpPr>
-          <p:cNvPr id="22" name="Rectangle 21"/>
+          <p:cNvPr id="23" name="TextBox 22"/>
+          <p:cNvSpPr txBox="1"/>
+          <p:nvPr/>
+        </p:nvSpPr>
+        <p:spPr>
+          <a:xfrm>
+            <a:off x="9272015" y="1783080"/>
+            <a:ext cx="1755648" cy="347472"/>
+          </a:xfrm>
+          <a:prstGeom prst="rect">
+            <a:avLst/>
+          </a:prstGeom>
+          <a:noFill/>
+        </p:spPr>
+        <p:txBody>
+          <a:bodyPr wrap="square">
+            <a:spAutoFit/>
+          </a:bodyPr>
+          <a:lstStyle/>
+          <a:p>
+            <a:pPr algn="ctr"/>
+            <a:r>
+              <a:rPr sz="1100" b="1" i="0">
+                <a:solidFill>
+                  <a:srgbClr val="FFFFFF"/>
+                </a:solidFill>
+              </a:rPr>
+              <a:t/>
+            </a:r>
+          </a:p>
+        </p:txBody>
+      </p:sp>
+      <p:sp>
+        <p:nvSpPr>
+          <p:cNvPr id="24" name="Rectangle 23"/>
           <p:cNvSpPr/>
           <p:nvPr/>
         </p:nvSpPr>
         <p:spPr>
           <a:xfrm>
-            <a:off x="274320" y="2240280"/>
-            <a:ext cx="11640312" cy="640080"/>
+            <a:off x="274320" y="2322576"/>
+            <a:ext cx="11640312" cy="722376"/>
           </a:xfrm>
           <a:prstGeom prst="rect">
             <a:avLst/>
@@ -16270,131 +17159,165 @@
       </p:sp>
       <p:sp>
         <p:nvSpPr>
-          <p:cNvPr id="23" name="TextBox 22"/>
-          <p:cNvSpPr txBox="1"/>
-          <p:nvPr/>
-        </p:nvSpPr>
-        <p:spPr>
-          <a:xfrm>
-            <a:off x="329184" y="2395728"/>
-            <a:ext cx="2560320" cy="347472"/>
-          </a:xfrm>
-          <a:prstGeom prst="rect">
-            <a:avLst/>
-          </a:prstGeom>
-          <a:noFill/>
-        </p:spPr>
-        <p:txBody>
-          <a:bodyPr wrap="square">
-            <a:spAutoFit/>
-          </a:bodyPr>
-          <a:lstStyle/>
-          <a:p>
-            <a:pPr algn="ctr"/>
-            <a:r>
-              <a:rPr sz="1200" b="1" i="0">
+          <p:cNvPr id="25" name="TextBox 24"/>
+          <p:cNvSpPr txBox="1"/>
+          <p:nvPr/>
+        </p:nvSpPr>
+        <p:spPr>
+          <a:xfrm>
+            <a:off x="310896" y="2523744"/>
+            <a:ext cx="2395728" cy="347472"/>
+          </a:xfrm>
+          <a:prstGeom prst="rect">
+            <a:avLst/>
+          </a:prstGeom>
+          <a:noFill/>
+        </p:spPr>
+        <p:txBody>
+          <a:bodyPr wrap="square">
+            <a:spAutoFit/>
+          </a:bodyPr>
+          <a:lstStyle/>
+          <a:p>
+            <a:pPr algn="ctr"/>
+            <a:r>
+              <a:rPr sz="1100" b="1" i="0">
                 <a:solidFill>
                   <a:srgbClr val="F5A623"/>
                 </a:solidFill>
               </a:rPr>
-              <a:t>BetaVAE (λ=1)</a:t>
-            </a:r>
-          </a:p>
-        </p:txBody>
-      </p:sp>
-      <p:sp>
-        <p:nvSpPr>
-          <p:cNvPr id="24" name="TextBox 23"/>
-          <p:cNvSpPr txBox="1"/>
-          <p:nvPr/>
-        </p:nvSpPr>
-        <p:spPr>
-          <a:xfrm>
-            <a:off x="2980944" y="2395728"/>
-            <a:ext cx="1143000" cy="347472"/>
-          </a:xfrm>
-          <a:prstGeom prst="rect">
-            <a:avLst/>
-          </a:prstGeom>
-          <a:noFill/>
-        </p:spPr>
-        <p:txBody>
-          <a:bodyPr wrap="square">
-            <a:spAutoFit/>
-          </a:bodyPr>
-          <a:lstStyle/>
-          <a:p>
-            <a:pPr algn="ctr"/>
-            <a:r>
-              <a:rPr sz="1200" b="0" i="0">
+              <a:t>BetaVAE</a:t>
+            </a:r>
+          </a:p>
+        </p:txBody>
+      </p:sp>
+      <p:sp>
+        <p:nvSpPr>
+          <p:cNvPr id="26" name="TextBox 25"/>
+          <p:cNvSpPr txBox="1"/>
+          <p:nvPr/>
+        </p:nvSpPr>
+        <p:spPr>
+          <a:xfrm>
+            <a:off x="2779776" y="2523744"/>
+            <a:ext cx="1069848" cy="347472"/>
+          </a:xfrm>
+          <a:prstGeom prst="rect">
+            <a:avLst/>
+          </a:prstGeom>
+          <a:noFill/>
+        </p:spPr>
+        <p:txBody>
+          <a:bodyPr wrap="square">
+            <a:spAutoFit/>
+          </a:bodyPr>
+          <a:lstStyle/>
+          <a:p>
+            <a:pPr algn="ctr"/>
+            <a:r>
+              <a:rPr sz="1100" b="0" i="0">
+                <a:solidFill>
+                  <a:srgbClr val="FFFFFF"/>
+                </a:solidFill>
+              </a:rPr>
+              <a:t>81.5%</a:t>
+            </a:r>
+          </a:p>
+        </p:txBody>
+      </p:sp>
+      <p:sp>
+        <p:nvSpPr>
+          <p:cNvPr id="27" name="TextBox 26"/>
+          <p:cNvSpPr txBox="1"/>
+          <p:nvPr/>
+        </p:nvSpPr>
+        <p:spPr>
+          <a:xfrm>
+            <a:off x="3922776" y="2523744"/>
+            <a:ext cx="1069848" cy="347472"/>
+          </a:xfrm>
+          <a:prstGeom prst="rect">
+            <a:avLst/>
+          </a:prstGeom>
+          <a:noFill/>
+        </p:spPr>
+        <p:txBody>
+          <a:bodyPr wrap="square">
+            <a:spAutoFit/>
+          </a:bodyPr>
+          <a:lstStyle/>
+          <a:p>
+            <a:pPr algn="ctr"/>
+            <a:r>
+              <a:rPr sz="1100" b="0" i="0">
                 <a:solidFill>
                   <a:srgbClr val="4CAF50"/>
                 </a:solidFill>
               </a:rPr>
-              <a:t>81.5%</a:t>
-            </a:r>
-          </a:p>
-        </p:txBody>
-      </p:sp>
-      <p:sp>
-        <p:nvSpPr>
-          <p:cNvPr id="25" name="TextBox 24"/>
-          <p:cNvSpPr txBox="1"/>
-          <p:nvPr/>
-        </p:nvSpPr>
-        <p:spPr>
-          <a:xfrm>
-            <a:off x="4215383" y="2395728"/>
-            <a:ext cx="1143000" cy="347472"/>
-          </a:xfrm>
-          <a:prstGeom prst="rect">
-            <a:avLst/>
-          </a:prstGeom>
-          <a:noFill/>
-        </p:spPr>
-        <p:txBody>
-          <a:bodyPr wrap="square">
-            <a:spAutoFit/>
-          </a:bodyPr>
-          <a:lstStyle/>
-          <a:p>
-            <a:pPr algn="ctr"/>
-            <a:r>
-              <a:rPr sz="1200" b="0" i="0">
+              <a:t>85.5%</a:t>
+            </a:r>
+          </a:p>
+        </p:txBody>
+      </p:sp>
+      <p:sp>
+        <p:nvSpPr>
+          <p:cNvPr id="28" name="TextBox 27"/>
+          <p:cNvSpPr txBox="1"/>
+          <p:nvPr/>
+        </p:nvSpPr>
+        <p:spPr>
+          <a:xfrm>
+            <a:off x="5065776" y="2523744"/>
+            <a:ext cx="1024127" cy="347472"/>
+          </a:xfrm>
+          <a:prstGeom prst="rect">
+            <a:avLst/>
+          </a:prstGeom>
+          <a:noFill/>
+        </p:spPr>
+        <p:txBody>
+          <a:bodyPr wrap="square">
+            <a:spAutoFit/>
+          </a:bodyPr>
+          <a:lstStyle/>
+          <a:p>
+            <a:pPr algn="ctr"/>
+            <a:r>
+              <a:rPr sz="1100" b="0" i="0">
                 <a:solidFill>
                   <a:srgbClr val="FFFFFF"/>
                 </a:solidFill>
               </a:rPr>
-              <a:t>85.5%</a:t>
-            </a:r>
-          </a:p>
-        </p:txBody>
-      </p:sp>
-      <p:sp>
-        <p:nvSpPr>
-          <p:cNvPr id="26" name="TextBox 25"/>
-          <p:cNvSpPr txBox="1"/>
-          <p:nvPr/>
-        </p:nvSpPr>
-        <p:spPr>
-          <a:xfrm>
-            <a:off x="5449824" y="2395728"/>
-            <a:ext cx="1005839" cy="347472"/>
-          </a:xfrm>
-          <a:prstGeom prst="rect">
-            <a:avLst/>
-          </a:prstGeom>
-          <a:noFill/>
-        </p:spPr>
-        <p:txBody>
-          <a:bodyPr wrap="square">
-            <a:spAutoFit/>
-          </a:bodyPr>
-          <a:lstStyle/>
-          <a:p>
-            <a:pPr algn="ctr"/>
-            <a:r>
-              <a:rPr sz="1200" b="0" i="0">
+              <a:t>0.901</a:t>
+            </a:r>
+          </a:p>
+        </p:txBody>
+      </p:sp>
+      <p:sp>
+        <p:nvSpPr>
+          <p:cNvPr id="29" name="TextBox 28"/>
+          <p:cNvSpPr txBox="1"/>
+          <p:nvPr/>
+        </p:nvSpPr>
+        <p:spPr>
+          <a:xfrm>
+            <a:off x="6163056" y="2523744"/>
+            <a:ext cx="1024127" cy="347472"/>
+          </a:xfrm>
+          <a:prstGeom prst="rect">
+            <a:avLst/>
+          </a:prstGeom>
+          <a:noFill/>
+        </p:spPr>
+        <p:txBody>
+          <a:bodyPr wrap="square">
+            <a:spAutoFit/>
+          </a:bodyPr>
+          <a:lstStyle/>
+          <a:p>
+            <a:pPr algn="ctr"/>
+            <a:r>
+              <a:rPr sz="1100" b="0" i="0">
                 <a:solidFill>
                   <a:srgbClr val="FFFFFF"/>
                 </a:solidFill>
@@ -16406,63 +17329,63 @@
       </p:sp>
       <p:sp>
         <p:nvSpPr>
-          <p:cNvPr id="27" name="TextBox 26"/>
-          <p:cNvSpPr txBox="1"/>
-          <p:nvPr/>
-        </p:nvSpPr>
-        <p:spPr>
-          <a:xfrm>
-            <a:off x="6547104" y="2395728"/>
-            <a:ext cx="1005839" cy="347472"/>
-          </a:xfrm>
-          <a:prstGeom prst="rect">
-            <a:avLst/>
-          </a:prstGeom>
-          <a:noFill/>
-        </p:spPr>
-        <p:txBody>
-          <a:bodyPr wrap="square">
-            <a:spAutoFit/>
-          </a:bodyPr>
-          <a:lstStyle/>
-          <a:p>
-            <a:pPr algn="ctr"/>
-            <a:r>
-              <a:rPr sz="1200" b="0" i="0">
+          <p:cNvPr id="30" name="TextBox 29"/>
+          <p:cNvSpPr txBox="1"/>
+          <p:nvPr/>
+        </p:nvSpPr>
+        <p:spPr>
+          <a:xfrm>
+            <a:off x="7260336" y="2523744"/>
+            <a:ext cx="932688" cy="347472"/>
+          </a:xfrm>
+          <a:prstGeom prst="rect">
+            <a:avLst/>
+          </a:prstGeom>
+          <a:noFill/>
+        </p:spPr>
+        <p:txBody>
+          <a:bodyPr wrap="square">
+            <a:spAutoFit/>
+          </a:bodyPr>
+          <a:lstStyle/>
+          <a:p>
+            <a:pPr algn="ctr"/>
+            <a:r>
+              <a:rPr sz="1100" b="0" i="0">
                 <a:solidFill>
                   <a:srgbClr val="FFFFFF"/>
                 </a:solidFill>
               </a:rPr>
-              <a:t>0.913</a:t>
-            </a:r>
-          </a:p>
-        </p:txBody>
-      </p:sp>
-      <p:sp>
-        <p:nvSpPr>
-          <p:cNvPr id="28" name="TextBox 27"/>
-          <p:cNvSpPr txBox="1"/>
-          <p:nvPr/>
-        </p:nvSpPr>
-        <p:spPr>
-          <a:xfrm>
-            <a:off x="7644384" y="2395728"/>
-            <a:ext cx="1051560" cy="347472"/>
-          </a:xfrm>
-          <a:prstGeom prst="rect">
-            <a:avLst/>
-          </a:prstGeom>
-          <a:noFill/>
-        </p:spPr>
-        <p:txBody>
-          <a:bodyPr wrap="square">
-            <a:spAutoFit/>
-          </a:bodyPr>
-          <a:lstStyle/>
-          <a:p>
-            <a:pPr algn="ctr"/>
-            <a:r>
-              <a:rPr sz="1200" b="0" i="0">
+              <a:t>0.823</a:t>
+            </a:r>
+          </a:p>
+        </p:txBody>
+      </p:sp>
+      <p:sp>
+        <p:nvSpPr>
+          <p:cNvPr id="31" name="TextBox 30"/>
+          <p:cNvSpPr txBox="1"/>
+          <p:nvPr/>
+        </p:nvSpPr>
+        <p:spPr>
+          <a:xfrm>
+            <a:off x="8266175" y="2523744"/>
+            <a:ext cx="932688" cy="347472"/>
+          </a:xfrm>
+          <a:prstGeom prst="rect">
+            <a:avLst/>
+          </a:prstGeom>
+          <a:noFill/>
+        </p:spPr>
+        <p:txBody>
+          <a:bodyPr wrap="square">
+            <a:spAutoFit/>
+          </a:bodyPr>
+          <a:lstStyle/>
+          <a:p>
+            <a:pPr algn="ctr"/>
+            <a:r>
+              <a:rPr sz="1100" b="0" i="0">
                 <a:solidFill>
                   <a:srgbClr val="FFFFFF"/>
                 </a:solidFill>
@@ -16474,48 +17397,48 @@
       </p:sp>
       <p:sp>
         <p:nvSpPr>
-          <p:cNvPr id="29" name="TextBox 28"/>
-          <p:cNvSpPr txBox="1"/>
-          <p:nvPr/>
-        </p:nvSpPr>
-        <p:spPr>
-          <a:xfrm>
-            <a:off x="8787384" y="2395728"/>
-            <a:ext cx="1783079" cy="347472"/>
-          </a:xfrm>
-          <a:prstGeom prst="rect">
-            <a:avLst/>
-          </a:prstGeom>
-          <a:noFill/>
-        </p:spPr>
-        <p:txBody>
-          <a:bodyPr wrap="square">
-            <a:spAutoFit/>
-          </a:bodyPr>
-          <a:lstStyle/>
-          <a:p>
-            <a:pPr algn="ctr"/>
-            <a:r>
-              <a:rPr sz="1200" b="0" i="0">
-                <a:solidFill>
-                  <a:srgbClr val="E84A35"/>
-                </a:solidFill>
-              </a:rPr>
-              <a:t>Leaking</a:t>
-            </a:r>
-          </a:p>
-        </p:txBody>
-      </p:sp>
-      <p:sp>
-        <p:nvSpPr>
-          <p:cNvPr id="30" name="Rectangle 29"/>
+          <p:cNvPr id="32" name="TextBox 31"/>
+          <p:cNvSpPr txBox="1"/>
+          <p:nvPr/>
+        </p:nvSpPr>
+        <p:spPr>
+          <a:xfrm>
+            <a:off x="9272015" y="2523744"/>
+            <a:ext cx="1755648" cy="347472"/>
+          </a:xfrm>
+          <a:prstGeom prst="rect">
+            <a:avLst/>
+          </a:prstGeom>
+          <a:noFill/>
+        </p:spPr>
+        <p:txBody>
+          <a:bodyPr wrap="square">
+            <a:spAutoFit/>
+          </a:bodyPr>
+          <a:lstStyle/>
+          <a:p>
+            <a:pPr algn="ctr"/>
+            <a:r>
+              <a:rPr sz="1100" b="1" i="0">
+                <a:solidFill>
+                  <a:srgbClr val="4CAF50"/>
+                </a:solidFill>
+              </a:rPr>
+              <a:t>Privacy ★</a:t>
+            </a:r>
+          </a:p>
+        </p:txBody>
+      </p:sp>
+      <p:sp>
+        <p:nvSpPr>
+          <p:cNvPr id="33" name="Rectangle 32"/>
           <p:cNvSpPr/>
           <p:nvPr/>
         </p:nvSpPr>
         <p:spPr>
           <a:xfrm>
-            <a:off x="274320" y="2898648"/>
-            <a:ext cx="11640312" cy="640080"/>
+            <a:off x="274320" y="3063240"/>
+            <a:ext cx="11640312" cy="722376"/>
           </a:xfrm>
           <a:prstGeom prst="rect">
             <a:avLst/>
@@ -16551,63 +17474,63 @@
       </p:sp>
       <p:sp>
         <p:nvSpPr>
-          <p:cNvPr id="31" name="TextBox 30"/>
-          <p:cNvSpPr txBox="1"/>
-          <p:nvPr/>
-        </p:nvSpPr>
-        <p:spPr>
-          <a:xfrm>
-            <a:off x="329184" y="3054096"/>
-            <a:ext cx="2560320" cy="347472"/>
-          </a:xfrm>
-          <a:prstGeom prst="rect">
-            <a:avLst/>
-          </a:prstGeom>
-          <a:noFill/>
-        </p:spPr>
-        <p:txBody>
-          <a:bodyPr wrap="square">
-            <a:spAutoFit/>
-          </a:bodyPr>
-          <a:lstStyle/>
-          <a:p>
-            <a:pPr algn="ctr"/>
-            <a:r>
-              <a:rPr sz="1200" b="1" i="0">
+          <p:cNvPr id="34" name="TextBox 33"/>
+          <p:cNvSpPr txBox="1"/>
+          <p:nvPr/>
+        </p:nvSpPr>
+        <p:spPr>
+          <a:xfrm>
+            <a:off x="310896" y="3264408"/>
+            <a:ext cx="2395728" cy="347472"/>
+          </a:xfrm>
+          <a:prstGeom prst="rect">
+            <a:avLst/>
+          </a:prstGeom>
+          <a:noFill/>
+        </p:spPr>
+        <p:txBody>
+          <a:bodyPr wrap="square">
+            <a:spAutoFit/>
+          </a:bodyPr>
+          <a:lstStyle/>
+          <a:p>
+            <a:pPr algn="ctr"/>
+            <a:r>
+              <a:rPr sz="1100" b="1" i="0">
                 <a:solidFill>
                   <a:srgbClr val="F5A623"/>
                 </a:solidFill>
               </a:rPr>
-              <a:t>ResidualVAE (λ=1)</a:t>
-            </a:r>
-          </a:p>
-        </p:txBody>
-      </p:sp>
-      <p:sp>
-        <p:nvSpPr>
-          <p:cNvPr id="32" name="TextBox 31"/>
-          <p:cNvSpPr txBox="1"/>
-          <p:nvPr/>
-        </p:nvSpPr>
-        <p:spPr>
-          <a:xfrm>
-            <a:off x="2980944" y="3054096"/>
-            <a:ext cx="1143000" cy="347472"/>
-          </a:xfrm>
-          <a:prstGeom prst="rect">
-            <a:avLst/>
-          </a:prstGeom>
-          <a:noFill/>
-        </p:spPr>
-        <p:txBody>
-          <a:bodyPr wrap="square">
-            <a:spAutoFit/>
-          </a:bodyPr>
-          <a:lstStyle/>
-          <a:p>
-            <a:pPr algn="ctr"/>
-            <a:r>
-              <a:rPr sz="1200" b="0" i="0">
+              <a:t>ResidualVAE</a:t>
+            </a:r>
+          </a:p>
+        </p:txBody>
+      </p:sp>
+      <p:sp>
+        <p:nvSpPr>
+          <p:cNvPr id="35" name="TextBox 34"/>
+          <p:cNvSpPr txBox="1"/>
+          <p:nvPr/>
+        </p:nvSpPr>
+        <p:spPr>
+          <a:xfrm>
+            <a:off x="2779776" y="3264408"/>
+            <a:ext cx="1069848" cy="347472"/>
+          </a:xfrm>
+          <a:prstGeom prst="rect">
+            <a:avLst/>
+          </a:prstGeom>
+          <a:noFill/>
+        </p:spPr>
+        <p:txBody>
+          <a:bodyPr wrap="square">
+            <a:spAutoFit/>
+          </a:bodyPr>
+          <a:lstStyle/>
+          <a:p>
+            <a:pPr algn="ctr"/>
+            <a:r>
+              <a:rPr sz="1100" b="0" i="0">
                 <a:solidFill>
                   <a:srgbClr val="4CAF50"/>
                 </a:solidFill>
@@ -16619,135 +17542,169 @@
       </p:sp>
       <p:sp>
         <p:nvSpPr>
-          <p:cNvPr id="33" name="TextBox 32"/>
-          <p:cNvSpPr txBox="1"/>
-          <p:nvPr/>
-        </p:nvSpPr>
-        <p:spPr>
-          <a:xfrm>
-            <a:off x="4215383" y="3054096"/>
-            <a:ext cx="1143000" cy="347472"/>
-          </a:xfrm>
-          <a:prstGeom prst="rect">
-            <a:avLst/>
-          </a:prstGeom>
-          <a:noFill/>
-        </p:spPr>
-        <p:txBody>
-          <a:bodyPr wrap="square">
-            <a:spAutoFit/>
-          </a:bodyPr>
-          <a:lstStyle/>
-          <a:p>
-            <a:pPr algn="ctr"/>
-            <a:r>
-              <a:rPr sz="1200" b="0" i="0">
+          <p:cNvPr id="36" name="TextBox 35"/>
+          <p:cNvSpPr txBox="1"/>
+          <p:nvPr/>
+        </p:nvSpPr>
+        <p:spPr>
+          <a:xfrm>
+            <a:off x="3922776" y="3264408"/>
+            <a:ext cx="1069848" cy="347472"/>
+          </a:xfrm>
+          <a:prstGeom prst="rect">
+            <a:avLst/>
+          </a:prstGeom>
+          <a:noFill/>
+        </p:spPr>
+        <p:txBody>
+          <a:bodyPr wrap="square">
+            <a:spAutoFit/>
+          </a:bodyPr>
+          <a:lstStyle/>
+          <a:p>
+            <a:pPr algn="ctr"/>
+            <a:r>
+              <a:rPr sz="1100" b="0" i="0">
                 <a:solidFill>
                   <a:srgbClr val="FFFFFF"/>
                 </a:solidFill>
               </a:rPr>
-              <a:t>86.4%</a:t>
-            </a:r>
-          </a:p>
-        </p:txBody>
-      </p:sp>
-      <p:sp>
-        <p:nvSpPr>
-          <p:cNvPr id="34" name="TextBox 33"/>
-          <p:cNvSpPr txBox="1"/>
-          <p:nvPr/>
-        </p:nvSpPr>
-        <p:spPr>
-          <a:xfrm>
-            <a:off x="5449824" y="3054096"/>
-            <a:ext cx="1005839" cy="347472"/>
-          </a:xfrm>
-          <a:prstGeom prst="rect">
-            <a:avLst/>
-          </a:prstGeom>
-          <a:noFill/>
-        </p:spPr>
-        <p:txBody>
-          <a:bodyPr wrap="square">
-            <a:spAutoFit/>
-          </a:bodyPr>
-          <a:lstStyle/>
-          <a:p>
-            <a:pPr algn="ctr"/>
-            <a:r>
-              <a:rPr sz="1200" b="0" i="0">
+              <a:t>86.3%</a:t>
+            </a:r>
+          </a:p>
+        </p:txBody>
+      </p:sp>
+      <p:sp>
+        <p:nvSpPr>
+          <p:cNvPr id="37" name="TextBox 36"/>
+          <p:cNvSpPr txBox="1"/>
+          <p:nvPr/>
+        </p:nvSpPr>
+        <p:spPr>
+          <a:xfrm>
+            <a:off x="5065776" y="3264408"/>
+            <a:ext cx="1024127" cy="347472"/>
+          </a:xfrm>
+          <a:prstGeom prst="rect">
+            <a:avLst/>
+          </a:prstGeom>
+          <a:noFill/>
+        </p:spPr>
+        <p:txBody>
+          <a:bodyPr wrap="square">
+            <a:spAutoFit/>
+          </a:bodyPr>
+          <a:lstStyle/>
+          <a:p>
+            <a:pPr algn="ctr"/>
+            <a:r>
+              <a:rPr sz="1100" b="0" i="0">
                 <a:solidFill>
                   <a:srgbClr val="FFFFFF"/>
                 </a:solidFill>
               </a:rPr>
-              <a:t>0.942</a:t>
-            </a:r>
-          </a:p>
-        </p:txBody>
-      </p:sp>
-      <p:sp>
-        <p:nvSpPr>
-          <p:cNvPr id="35" name="TextBox 34"/>
-          <p:cNvSpPr txBox="1"/>
-          <p:nvPr/>
-        </p:nvSpPr>
-        <p:spPr>
-          <a:xfrm>
-            <a:off x="6547104" y="3054096"/>
-            <a:ext cx="1005839" cy="347472"/>
-          </a:xfrm>
-          <a:prstGeom prst="rect">
-            <a:avLst/>
-          </a:prstGeom>
-          <a:noFill/>
-        </p:spPr>
-        <p:txBody>
-          <a:bodyPr wrap="square">
-            <a:spAutoFit/>
-          </a:bodyPr>
-          <a:lstStyle/>
-          <a:p>
-            <a:pPr algn="ctr"/>
-            <a:r>
-              <a:rPr sz="1200" b="0" i="0">
+              <a:t>0.932</a:t>
+            </a:r>
+          </a:p>
+        </p:txBody>
+      </p:sp>
+      <p:sp>
+        <p:nvSpPr>
+          <p:cNvPr id="38" name="TextBox 37"/>
+          <p:cNvSpPr txBox="1"/>
+          <p:nvPr/>
+        </p:nvSpPr>
+        <p:spPr>
+          <a:xfrm>
+            <a:off x="6163056" y="3264408"/>
+            <a:ext cx="1024127" cy="347472"/>
+          </a:xfrm>
+          <a:prstGeom prst="rect">
+            <a:avLst/>
+          </a:prstGeom>
+          <a:noFill/>
+        </p:spPr>
+        <p:txBody>
+          <a:bodyPr wrap="square">
+            <a:spAutoFit/>
+          </a:bodyPr>
+          <a:lstStyle/>
+          <a:p>
+            <a:pPr algn="ctr"/>
+            <a:r>
+              <a:rPr sz="1100" b="0" i="0">
                 <a:solidFill>
                   <a:srgbClr val="FFFFFF"/>
                 </a:solidFill>
               </a:rPr>
-              <a:t>0.941</a:t>
-            </a:r>
-          </a:p>
-        </p:txBody>
-      </p:sp>
-      <p:sp>
-        <p:nvSpPr>
-          <p:cNvPr id="36" name="TextBox 35"/>
-          <p:cNvSpPr txBox="1"/>
-          <p:nvPr/>
-        </p:nvSpPr>
-        <p:spPr>
-          <a:xfrm>
-            <a:off x="7644384" y="3054096"/>
-            <a:ext cx="1051560" cy="347472"/>
-          </a:xfrm>
-          <a:prstGeom prst="rect">
-            <a:avLst/>
-          </a:prstGeom>
-          <a:noFill/>
-        </p:spPr>
-        <p:txBody>
-          <a:bodyPr wrap="square">
-            <a:spAutoFit/>
-          </a:bodyPr>
-          <a:lstStyle/>
-          <a:p>
-            <a:pPr algn="ctr"/>
-            <a:r>
-              <a:rPr sz="1200" b="0" i="0">
+              <a:t>0.924</a:t>
+            </a:r>
+          </a:p>
+        </p:txBody>
+      </p:sp>
+      <p:sp>
+        <p:nvSpPr>
+          <p:cNvPr id="39" name="TextBox 38"/>
+          <p:cNvSpPr txBox="1"/>
+          <p:nvPr/>
+        </p:nvSpPr>
+        <p:spPr>
+          <a:xfrm>
+            <a:off x="7260336" y="3264408"/>
+            <a:ext cx="932688" cy="347472"/>
+          </a:xfrm>
+          <a:prstGeom prst="rect">
+            <a:avLst/>
+          </a:prstGeom>
+          <a:noFill/>
+        </p:spPr>
+        <p:txBody>
+          <a:bodyPr wrap="square">
+            <a:spAutoFit/>
+          </a:bodyPr>
+          <a:lstStyle/>
+          <a:p>
+            <a:pPr algn="ctr"/>
+            <a:r>
+              <a:rPr sz="1100" b="0" i="0">
                 <a:solidFill>
                   <a:srgbClr val="FFFFFF"/>
                 </a:solidFill>
               </a:rPr>
+              <a:t>0.867</a:t>
+            </a:r>
+          </a:p>
+        </p:txBody>
+      </p:sp>
+      <p:sp>
+        <p:nvSpPr>
+          <p:cNvPr id="40" name="TextBox 39"/>
+          <p:cNvSpPr txBox="1"/>
+          <p:nvPr/>
+        </p:nvSpPr>
+        <p:spPr>
+          <a:xfrm>
+            <a:off x="8266175" y="3264408"/>
+            <a:ext cx="932688" cy="347472"/>
+          </a:xfrm>
+          <a:prstGeom prst="rect">
+            <a:avLst/>
+          </a:prstGeom>
+          <a:noFill/>
+        </p:spPr>
+        <p:txBody>
+          <a:bodyPr wrap="square">
+            <a:spAutoFit/>
+          </a:bodyPr>
+          <a:lstStyle/>
+          <a:p>
+            <a:pPr algn="ctr"/>
+            <a:r>
+              <a:rPr sz="1100" b="0" i="0">
+                <a:solidFill>
+                  <a:srgbClr val="FFFFFF"/>
+                </a:solidFill>
+              </a:rPr>
               <a:t>0.988</a:t>
             </a:r>
           </a:p>
@@ -16755,48 +17712,48 @@
       </p:sp>
       <p:sp>
         <p:nvSpPr>
-          <p:cNvPr id="37" name="TextBox 36"/>
-          <p:cNvSpPr txBox="1"/>
-          <p:nvPr/>
-        </p:nvSpPr>
-        <p:spPr>
-          <a:xfrm>
-            <a:off x="8787384" y="3054096"/>
-            <a:ext cx="1783079" cy="347472"/>
-          </a:xfrm>
-          <a:prstGeom prst="rect">
-            <a:avLst/>
-          </a:prstGeom>
-          <a:noFill/>
-        </p:spPr>
-        <p:txBody>
-          <a:bodyPr wrap="square">
-            <a:spAutoFit/>
-          </a:bodyPr>
-          <a:lstStyle/>
-          <a:p>
-            <a:pPr algn="ctr"/>
-            <a:r>
-              <a:rPr sz="1200" b="0" i="0">
-                <a:solidFill>
-                  <a:srgbClr val="E84A35"/>
-                </a:solidFill>
-              </a:rPr>
-              <a:t>Leaking</a:t>
-            </a:r>
-          </a:p>
-        </p:txBody>
-      </p:sp>
-      <p:sp>
-        <p:nvSpPr>
-          <p:cNvPr id="38" name="Rectangle 37"/>
+          <p:cNvPr id="41" name="TextBox 40"/>
+          <p:cNvSpPr txBox="1"/>
+          <p:nvPr/>
+        </p:nvSpPr>
+        <p:spPr>
+          <a:xfrm>
+            <a:off x="9272015" y="3264408"/>
+            <a:ext cx="1755648" cy="347472"/>
+          </a:xfrm>
+          <a:prstGeom prst="rect">
+            <a:avLst/>
+          </a:prstGeom>
+          <a:noFill/>
+        </p:spPr>
+        <p:txBody>
+          <a:bodyPr wrap="square">
+            <a:spAutoFit/>
+          </a:bodyPr>
+          <a:lstStyle/>
+          <a:p>
+            <a:pPr algn="ctr"/>
+            <a:r>
+              <a:rPr sz="1100" b="1" i="0">
+                <a:solidFill>
+                  <a:srgbClr val="F5A623"/>
+                </a:solidFill>
+              </a:rPr>
+              <a:t>NAG ★</a:t>
+            </a:r>
+          </a:p>
+        </p:txBody>
+      </p:sp>
+      <p:sp>
+        <p:nvSpPr>
+          <p:cNvPr id="42" name="Rectangle 41"/>
           <p:cNvSpPr/>
           <p:nvPr/>
         </p:nvSpPr>
         <p:spPr>
           <a:xfrm>
-            <a:off x="274320" y="3557016"/>
-            <a:ext cx="11640312" cy="640080"/>
+            <a:off x="274320" y="3803904"/>
+            <a:ext cx="11640312" cy="722376"/>
           </a:xfrm>
           <a:prstGeom prst="rect">
             <a:avLst/>
@@ -16832,199 +17789,233 @@
       </p:sp>
       <p:sp>
         <p:nvSpPr>
-          <p:cNvPr id="39" name="TextBox 38"/>
-          <p:cNvSpPr txBox="1"/>
-          <p:nvPr/>
-        </p:nvSpPr>
-        <p:spPr>
-          <a:xfrm>
-            <a:off x="329184" y="3712464"/>
-            <a:ext cx="2560320" cy="347472"/>
-          </a:xfrm>
-          <a:prstGeom prst="rect">
-            <a:avLst/>
-          </a:prstGeom>
-          <a:noFill/>
-        </p:spPr>
-        <p:txBody>
-          <a:bodyPr wrap="square">
-            <a:spAutoFit/>
-          </a:bodyPr>
-          <a:lstStyle/>
-          <a:p>
-            <a:pPr algn="ctr"/>
-            <a:r>
-              <a:rPr sz="1200" b="1" i="0">
+          <p:cNvPr id="43" name="TextBox 42"/>
+          <p:cNvSpPr txBox="1"/>
+          <p:nvPr/>
+        </p:nvSpPr>
+        <p:spPr>
+          <a:xfrm>
+            <a:off x="310896" y="4005072"/>
+            <a:ext cx="2395728" cy="347472"/>
+          </a:xfrm>
+          <a:prstGeom prst="rect">
+            <a:avLst/>
+          </a:prstGeom>
+          <a:noFill/>
+        </p:spPr>
+        <p:txBody>
+          <a:bodyPr wrap="square">
+            <a:spAutoFit/>
+          </a:bodyPr>
+          <a:lstStyle/>
+          <a:p>
+            <a:pPr algn="ctr"/>
+            <a:r>
+              <a:rPr sz="1100" b="1" i="0">
                 <a:solidFill>
                   <a:srgbClr val="F5A623"/>
                 </a:solidFill>
               </a:rPr>
-              <a:t>ResidualVAE (λ=2)</a:t>
-            </a:r>
-          </a:p>
-        </p:txBody>
-      </p:sp>
-      <p:sp>
-        <p:nvSpPr>
-          <p:cNvPr id="40" name="TextBox 39"/>
-          <p:cNvSpPr txBox="1"/>
-          <p:nvPr/>
-        </p:nvSpPr>
-        <p:spPr>
-          <a:xfrm>
-            <a:off x="2980944" y="3712464"/>
-            <a:ext cx="1143000" cy="347472"/>
-          </a:xfrm>
-          <a:prstGeom prst="rect">
-            <a:avLst/>
-          </a:prstGeom>
-          <a:noFill/>
-        </p:spPr>
-        <p:txBody>
-          <a:bodyPr wrap="square">
-            <a:spAutoFit/>
-          </a:bodyPr>
-          <a:lstStyle/>
-          <a:p>
-            <a:pPr algn="ctr"/>
-            <a:r>
-              <a:rPr sz="1200" b="0" i="0">
+              <a:t>BetaTCVAE</a:t>
+            </a:r>
+          </a:p>
+        </p:txBody>
+      </p:sp>
+      <p:sp>
+        <p:nvSpPr>
+          <p:cNvPr id="44" name="TextBox 43"/>
+          <p:cNvSpPr txBox="1"/>
+          <p:nvPr/>
+        </p:nvSpPr>
+        <p:spPr>
+          <a:xfrm>
+            <a:off x="2779776" y="4005072"/>
+            <a:ext cx="1069848" cy="347472"/>
+          </a:xfrm>
+          <a:prstGeom prst="rect">
+            <a:avLst/>
+          </a:prstGeom>
+          <a:noFill/>
+        </p:spPr>
+        <p:txBody>
+          <a:bodyPr wrap="square">
+            <a:spAutoFit/>
+          </a:bodyPr>
+          <a:lstStyle/>
+          <a:p>
+            <a:pPr algn="ctr"/>
+            <a:r>
+              <a:rPr sz="1100" b="0" i="0">
+                <a:solidFill>
+                  <a:srgbClr val="FFFFFF"/>
+                </a:solidFill>
+              </a:rPr>
+              <a:t>84.6%</a:t>
+            </a:r>
+          </a:p>
+        </p:txBody>
+      </p:sp>
+      <p:sp>
+        <p:nvSpPr>
+          <p:cNvPr id="45" name="TextBox 44"/>
+          <p:cNvSpPr txBox="1"/>
+          <p:nvPr/>
+        </p:nvSpPr>
+        <p:spPr>
+          <a:xfrm>
+            <a:off x="3922776" y="4005072"/>
+            <a:ext cx="1069848" cy="347472"/>
+          </a:xfrm>
+          <a:prstGeom prst="rect">
+            <a:avLst/>
+          </a:prstGeom>
+          <a:noFill/>
+        </p:spPr>
+        <p:txBody>
+          <a:bodyPr wrap="square">
+            <a:spAutoFit/>
+          </a:bodyPr>
+          <a:lstStyle/>
+          <a:p>
+            <a:pPr algn="ctr"/>
+            <a:r>
+              <a:rPr sz="1100" b="0" i="0">
                 <a:solidFill>
                   <a:srgbClr val="4CAF50"/>
                 </a:solidFill>
               </a:rPr>
-              <a:t>86.9%</a:t>
-            </a:r>
-          </a:p>
-        </p:txBody>
-      </p:sp>
-      <p:sp>
-        <p:nvSpPr>
-          <p:cNvPr id="41" name="TextBox 40"/>
-          <p:cNvSpPr txBox="1"/>
-          <p:nvPr/>
-        </p:nvSpPr>
-        <p:spPr>
-          <a:xfrm>
-            <a:off x="4215383" y="3712464"/>
-            <a:ext cx="1143000" cy="347472"/>
-          </a:xfrm>
-          <a:prstGeom prst="rect">
-            <a:avLst/>
-          </a:prstGeom>
-          <a:noFill/>
-        </p:spPr>
-        <p:txBody>
-          <a:bodyPr wrap="square">
-            <a:spAutoFit/>
-          </a:bodyPr>
-          <a:lstStyle/>
-          <a:p>
-            <a:pPr algn="ctr"/>
-            <a:r>
-              <a:rPr sz="1200" b="0" i="0">
+              <a:t>85.3%</a:t>
+            </a:r>
+          </a:p>
+        </p:txBody>
+      </p:sp>
+      <p:sp>
+        <p:nvSpPr>
+          <p:cNvPr id="46" name="TextBox 45"/>
+          <p:cNvSpPr txBox="1"/>
+          <p:nvPr/>
+        </p:nvSpPr>
+        <p:spPr>
+          <a:xfrm>
+            <a:off x="5065776" y="4005072"/>
+            <a:ext cx="1024127" cy="347472"/>
+          </a:xfrm>
+          <a:prstGeom prst="rect">
+            <a:avLst/>
+          </a:prstGeom>
+          <a:noFill/>
+        </p:spPr>
+        <p:txBody>
+          <a:bodyPr wrap="square">
+            <a:spAutoFit/>
+          </a:bodyPr>
+          <a:lstStyle/>
+          <a:p>
+            <a:pPr algn="ctr"/>
+            <a:r>
+              <a:rPr sz="1100" b="0" i="0">
                 <a:solidFill>
                   <a:srgbClr val="FFFFFF"/>
                 </a:solidFill>
               </a:rPr>
-              <a:t>87.6%</a:t>
-            </a:r>
-          </a:p>
-        </p:txBody>
-      </p:sp>
-      <p:sp>
-        <p:nvSpPr>
-          <p:cNvPr id="42" name="TextBox 41"/>
-          <p:cNvSpPr txBox="1"/>
-          <p:nvPr/>
-        </p:nvSpPr>
-        <p:spPr>
-          <a:xfrm>
-            <a:off x="5449824" y="3712464"/>
-            <a:ext cx="1005839" cy="347472"/>
-          </a:xfrm>
-          <a:prstGeom prst="rect">
-            <a:avLst/>
-          </a:prstGeom>
-          <a:noFill/>
-        </p:spPr>
-        <p:txBody>
-          <a:bodyPr wrap="square">
-            <a:spAutoFit/>
-          </a:bodyPr>
-          <a:lstStyle/>
-          <a:p>
-            <a:pPr algn="ctr"/>
-            <a:r>
-              <a:rPr sz="1200" b="0" i="0">
+              <a:t>0.923</a:t>
+            </a:r>
+          </a:p>
+        </p:txBody>
+      </p:sp>
+      <p:sp>
+        <p:nvSpPr>
+          <p:cNvPr id="47" name="TextBox 46"/>
+          <p:cNvSpPr txBox="1"/>
+          <p:nvPr/>
+        </p:nvSpPr>
+        <p:spPr>
+          <a:xfrm>
+            <a:off x="6163056" y="4005072"/>
+            <a:ext cx="1024127" cy="347472"/>
+          </a:xfrm>
+          <a:prstGeom prst="rect">
+            <a:avLst/>
+          </a:prstGeom>
+          <a:noFill/>
+        </p:spPr>
+        <p:txBody>
+          <a:bodyPr wrap="square">
+            <a:spAutoFit/>
+          </a:bodyPr>
+          <a:lstStyle/>
+          <a:p>
+            <a:pPr algn="ctr"/>
+            <a:r>
+              <a:rPr sz="1100" b="0" i="0">
                 <a:solidFill>
                   <a:srgbClr val="FFFFFF"/>
                 </a:solidFill>
               </a:rPr>
-              <a:t>0.941</a:t>
-            </a:r>
-          </a:p>
-        </p:txBody>
-      </p:sp>
-      <p:sp>
-        <p:nvSpPr>
-          <p:cNvPr id="43" name="TextBox 42"/>
-          <p:cNvSpPr txBox="1"/>
-          <p:nvPr/>
-        </p:nvSpPr>
-        <p:spPr>
-          <a:xfrm>
-            <a:off x="6547104" y="3712464"/>
-            <a:ext cx="1005839" cy="347472"/>
-          </a:xfrm>
-          <a:prstGeom prst="rect">
-            <a:avLst/>
-          </a:prstGeom>
-          <a:noFill/>
-        </p:spPr>
-        <p:txBody>
-          <a:bodyPr wrap="square">
-            <a:spAutoFit/>
-          </a:bodyPr>
-          <a:lstStyle/>
-          <a:p>
-            <a:pPr algn="ctr"/>
-            <a:r>
-              <a:rPr sz="1200" b="0" i="0">
+              <a:t>0.917</a:t>
+            </a:r>
+          </a:p>
+        </p:txBody>
+      </p:sp>
+      <p:sp>
+        <p:nvSpPr>
+          <p:cNvPr id="48" name="TextBox 47"/>
+          <p:cNvSpPr txBox="1"/>
+          <p:nvPr/>
+        </p:nvSpPr>
+        <p:spPr>
+          <a:xfrm>
+            <a:off x="7260336" y="4005072"/>
+            <a:ext cx="932688" cy="347472"/>
+          </a:xfrm>
+          <a:prstGeom prst="rect">
+            <a:avLst/>
+          </a:prstGeom>
+          <a:noFill/>
+        </p:spPr>
+        <p:txBody>
+          <a:bodyPr wrap="square">
+            <a:spAutoFit/>
+          </a:bodyPr>
+          <a:lstStyle/>
+          <a:p>
+            <a:pPr algn="ctr"/>
+            <a:r>
+              <a:rPr sz="1100" b="0" i="0">
                 <a:solidFill>
                   <a:srgbClr val="FFFFFF"/>
                 </a:solidFill>
               </a:rPr>
-              <a:t>0.941</a:t>
-            </a:r>
-          </a:p>
-        </p:txBody>
-      </p:sp>
-      <p:sp>
-        <p:nvSpPr>
-          <p:cNvPr id="44" name="TextBox 43"/>
-          <p:cNvSpPr txBox="1"/>
-          <p:nvPr/>
-        </p:nvSpPr>
-        <p:spPr>
-          <a:xfrm>
-            <a:off x="7644384" y="3712464"/>
-            <a:ext cx="1051560" cy="347472"/>
-          </a:xfrm>
-          <a:prstGeom prst="rect">
-            <a:avLst/>
-          </a:prstGeom>
-          <a:noFill/>
-        </p:spPr>
-        <p:txBody>
-          <a:bodyPr wrap="square">
-            <a:spAutoFit/>
-          </a:bodyPr>
-          <a:lstStyle/>
-          <a:p>
-            <a:pPr algn="ctr"/>
-            <a:r>
-              <a:rPr sz="1200" b="0" i="0">
+              <a:t>0.856</a:t>
+            </a:r>
+          </a:p>
+        </p:txBody>
+      </p:sp>
+      <p:sp>
+        <p:nvSpPr>
+          <p:cNvPr id="49" name="TextBox 48"/>
+          <p:cNvSpPr txBox="1"/>
+          <p:nvPr/>
+        </p:nvSpPr>
+        <p:spPr>
+          <a:xfrm>
+            <a:off x="8266175" y="4005072"/>
+            <a:ext cx="932688" cy="347472"/>
+          </a:xfrm>
+          <a:prstGeom prst="rect">
+            <a:avLst/>
+          </a:prstGeom>
+          <a:noFill/>
+        </p:spPr>
+        <p:txBody>
+          <a:bodyPr wrap="square">
+            <a:spAutoFit/>
+          </a:bodyPr>
+          <a:lstStyle/>
+          <a:p>
+            <a:pPr algn="ctr"/>
+            <a:r>
+              <a:rPr sz="1100" b="0" i="0">
                 <a:solidFill>
                   <a:srgbClr val="FFFFFF"/>
                 </a:solidFill>
@@ -17036,48 +18027,48 @@
       </p:sp>
       <p:sp>
         <p:nvSpPr>
-          <p:cNvPr id="45" name="TextBox 44"/>
-          <p:cNvSpPr txBox="1"/>
-          <p:nvPr/>
-        </p:nvSpPr>
-        <p:spPr>
-          <a:xfrm>
-            <a:off x="8787384" y="3712464"/>
-            <a:ext cx="1783079" cy="347472"/>
-          </a:xfrm>
-          <a:prstGeom prst="rect">
-            <a:avLst/>
-          </a:prstGeom>
-          <a:noFill/>
-        </p:spPr>
-        <p:txBody>
-          <a:bodyPr wrap="square">
-            <a:spAutoFit/>
-          </a:bodyPr>
-          <a:lstStyle/>
-          <a:p>
-            <a:pPr algn="ctr"/>
-            <a:r>
-              <a:rPr sz="1200" b="0" i="0">
-                <a:solidFill>
-                  <a:srgbClr val="FF9800"/>
-                </a:solidFill>
-              </a:rPr>
-              <a:t>Leaking</a:t>
-            </a:r>
-          </a:p>
-        </p:txBody>
-      </p:sp>
-      <p:sp>
-        <p:nvSpPr>
-          <p:cNvPr id="46" name="Rectangle 45"/>
+          <p:cNvPr id="50" name="TextBox 49"/>
+          <p:cNvSpPr txBox="1"/>
+          <p:nvPr/>
+        </p:nvSpPr>
+        <p:spPr>
+          <a:xfrm>
+            <a:off x="9272015" y="4005072"/>
+            <a:ext cx="1755648" cy="347472"/>
+          </a:xfrm>
+          <a:prstGeom prst="rect">
+            <a:avLst/>
+          </a:prstGeom>
+          <a:noFill/>
+        </p:spPr>
+        <p:txBody>
+          <a:bodyPr wrap="square">
+            <a:spAutoFit/>
+          </a:bodyPr>
+          <a:lstStyle/>
+          <a:p>
+            <a:pPr algn="ctr"/>
+            <a:r>
+              <a:rPr sz="1100" b="1" i="0">
+                <a:solidFill>
+                  <a:srgbClr val="4CAF50"/>
+                </a:solidFill>
+              </a:rPr>
+              <a:t>Privacy ★</a:t>
+            </a:r>
+          </a:p>
+        </p:txBody>
+      </p:sp>
+      <p:sp>
+        <p:nvSpPr>
+          <p:cNvPr id="51" name="Rectangle 50"/>
           <p:cNvSpPr/>
           <p:nvPr/>
         </p:nvSpPr>
         <p:spPr>
           <a:xfrm>
-            <a:off x="274320" y="4215383"/>
-            <a:ext cx="11640312" cy="640080"/>
+            <a:off x="274320" y="4544568"/>
+            <a:ext cx="11640312" cy="722376"/>
           </a:xfrm>
           <a:prstGeom prst="rect">
             <a:avLst/>
@@ -17113,252 +18104,286 @@
       </p:sp>
       <p:sp>
         <p:nvSpPr>
-          <p:cNvPr id="47" name="TextBox 46"/>
-          <p:cNvSpPr txBox="1"/>
-          <p:nvPr/>
-        </p:nvSpPr>
-        <p:spPr>
-          <a:xfrm>
-            <a:off x="329184" y="4370831"/>
-            <a:ext cx="2560320" cy="347472"/>
-          </a:xfrm>
-          <a:prstGeom prst="rect">
-            <a:avLst/>
-          </a:prstGeom>
-          <a:noFill/>
-        </p:spPr>
-        <p:txBody>
-          <a:bodyPr wrap="square">
-            <a:spAutoFit/>
-          </a:bodyPr>
-          <a:lstStyle/>
-          <a:p>
-            <a:pPr algn="ctr"/>
-            <a:r>
-              <a:rPr sz="1200" b="1" i="0">
+          <p:cNvPr id="52" name="TextBox 51"/>
+          <p:cNvSpPr txBox="1"/>
+          <p:nvPr/>
+        </p:nvSpPr>
+        <p:spPr>
+          <a:xfrm>
+            <a:off x="310896" y="4745736"/>
+            <a:ext cx="2395728" cy="347472"/>
+          </a:xfrm>
+          <a:prstGeom prst="rect">
+            <a:avLst/>
+          </a:prstGeom>
+          <a:noFill/>
+        </p:spPr>
+        <p:txBody>
+          <a:bodyPr wrap="square">
+            <a:spAutoFit/>
+          </a:bodyPr>
+          <a:lstStyle/>
+          <a:p>
+            <a:pPr algn="ctr"/>
+            <a:r>
+              <a:rPr sz="1100" b="1" i="0">
                 <a:solidFill>
                   <a:srgbClr val="F5A623"/>
                 </a:solidFill>
               </a:rPr>
-              <a:t>CVAE (3 epochs)</a:t>
-            </a:r>
-          </a:p>
-        </p:txBody>
-      </p:sp>
-      <p:sp>
-        <p:nvSpPr>
-          <p:cNvPr id="48" name="TextBox 47"/>
-          <p:cNvSpPr txBox="1"/>
-          <p:nvPr/>
-        </p:nvSpPr>
-        <p:spPr>
-          <a:xfrm>
-            <a:off x="2980944" y="4370831"/>
-            <a:ext cx="1143000" cy="347472"/>
-          </a:xfrm>
-          <a:prstGeom prst="rect">
-            <a:avLst/>
-          </a:prstGeom>
-          <a:noFill/>
-        </p:spPr>
-        <p:txBody>
-          <a:bodyPr wrap="square">
-            <a:spAutoFit/>
-          </a:bodyPr>
-          <a:lstStyle/>
-          <a:p>
-            <a:pPr algn="ctr"/>
-            <a:r>
-              <a:rPr sz="1200" b="0" i="0">
+              <a:t>FactorVAE</a:t>
+            </a:r>
+          </a:p>
+        </p:txBody>
+      </p:sp>
+      <p:sp>
+        <p:nvSpPr>
+          <p:cNvPr id="53" name="TextBox 52"/>
+          <p:cNvSpPr txBox="1"/>
+          <p:nvPr/>
+        </p:nvSpPr>
+        <p:spPr>
+          <a:xfrm>
+            <a:off x="2779776" y="4745736"/>
+            <a:ext cx="1069848" cy="347472"/>
+          </a:xfrm>
+          <a:prstGeom prst="rect">
+            <a:avLst/>
+          </a:prstGeom>
+          <a:noFill/>
+        </p:spPr>
+        <p:txBody>
+          <a:bodyPr wrap="square">
+            <a:spAutoFit/>
+          </a:bodyPr>
+          <a:lstStyle/>
+          <a:p>
+            <a:pPr algn="ctr"/>
+            <a:r>
+              <a:rPr sz="1100" b="0" i="0">
+                <a:solidFill>
+                  <a:srgbClr val="4CAF50"/>
+                </a:solidFill>
+              </a:rPr>
+              <a:t>87.0%</a:t>
+            </a:r>
+          </a:p>
+        </p:txBody>
+      </p:sp>
+      <p:sp>
+        <p:nvSpPr>
+          <p:cNvPr id="54" name="TextBox 53"/>
+          <p:cNvSpPr txBox="1"/>
+          <p:nvPr/>
+        </p:nvSpPr>
+        <p:spPr>
+          <a:xfrm>
+            <a:off x="3922776" y="4745736"/>
+            <a:ext cx="1069848" cy="347472"/>
+          </a:xfrm>
+          <a:prstGeom prst="rect">
+            <a:avLst/>
+          </a:prstGeom>
+          <a:noFill/>
+        </p:spPr>
+        <p:txBody>
+          <a:bodyPr wrap="square">
+            <a:spAutoFit/>
+          </a:bodyPr>
+          <a:lstStyle/>
+          <a:p>
+            <a:pPr algn="ctr"/>
+            <a:r>
+              <a:rPr sz="1100" b="0" i="0">
                 <a:solidFill>
                   <a:srgbClr val="FFFFFF"/>
                 </a:solidFill>
               </a:rPr>
-              <a:t>56.0%</a:t>
-            </a:r>
-          </a:p>
-        </p:txBody>
-      </p:sp>
-      <p:sp>
-        <p:nvSpPr>
-          <p:cNvPr id="49" name="TextBox 48"/>
-          <p:cNvSpPr txBox="1"/>
-          <p:nvPr/>
-        </p:nvSpPr>
-        <p:spPr>
-          <a:xfrm>
-            <a:off x="4215383" y="4370831"/>
-            <a:ext cx="1143000" cy="347472"/>
-          </a:xfrm>
-          <a:prstGeom prst="rect">
-            <a:avLst/>
-          </a:prstGeom>
-          <a:noFill/>
-        </p:spPr>
-        <p:txBody>
-          <a:bodyPr wrap="square">
-            <a:spAutoFit/>
-          </a:bodyPr>
-          <a:lstStyle/>
-          <a:p>
-            <a:pPr algn="ctr"/>
-            <a:r>
-              <a:rPr sz="1200" b="0" i="0">
-                <a:solidFill>
-                  <a:srgbClr val="FF9800"/>
-                </a:solidFill>
-              </a:rPr>
-              <a:t>60.6%</a:t>
-            </a:r>
-          </a:p>
-        </p:txBody>
-      </p:sp>
-      <p:sp>
-        <p:nvSpPr>
-          <p:cNvPr id="50" name="TextBox 49"/>
-          <p:cNvSpPr txBox="1"/>
-          <p:nvPr/>
-        </p:nvSpPr>
-        <p:spPr>
-          <a:xfrm>
-            <a:off x="5449824" y="4370831"/>
-            <a:ext cx="1005839" cy="347472"/>
-          </a:xfrm>
-          <a:prstGeom prst="rect">
-            <a:avLst/>
-          </a:prstGeom>
-          <a:noFill/>
-        </p:spPr>
-        <p:txBody>
-          <a:bodyPr wrap="square">
-            <a:spAutoFit/>
-          </a:bodyPr>
-          <a:lstStyle/>
-          <a:p>
-            <a:pPr algn="ctr"/>
-            <a:r>
-              <a:rPr sz="1200" b="0" i="0">
+              <a:t>88.7%</a:t>
+            </a:r>
+          </a:p>
+        </p:txBody>
+      </p:sp>
+      <p:sp>
+        <p:nvSpPr>
+          <p:cNvPr id="55" name="TextBox 54"/>
+          <p:cNvSpPr txBox="1"/>
+          <p:nvPr/>
+        </p:nvSpPr>
+        <p:spPr>
+          <a:xfrm>
+            <a:off x="5065776" y="4745736"/>
+            <a:ext cx="1024127" cy="347472"/>
+          </a:xfrm>
+          <a:prstGeom prst="rect">
+            <a:avLst/>
+          </a:prstGeom>
+          <a:noFill/>
+        </p:spPr>
+        <p:txBody>
+          <a:bodyPr wrap="square">
+            <a:spAutoFit/>
+          </a:bodyPr>
+          <a:lstStyle/>
+          <a:p>
+            <a:pPr algn="ctr"/>
+            <a:r>
+              <a:rPr sz="1100" b="0" i="0">
                 <a:solidFill>
                   <a:srgbClr val="FFFFFF"/>
                 </a:solidFill>
               </a:rPr>
-              <a:t>0.714</a:t>
-            </a:r>
-          </a:p>
-        </p:txBody>
-      </p:sp>
-      <p:sp>
-        <p:nvSpPr>
-          <p:cNvPr id="51" name="TextBox 50"/>
-          <p:cNvSpPr txBox="1"/>
-          <p:nvPr/>
-        </p:nvSpPr>
-        <p:spPr>
-          <a:xfrm>
-            <a:off x="6547104" y="4370831"/>
-            <a:ext cx="1005839" cy="347472"/>
-          </a:xfrm>
-          <a:prstGeom prst="rect">
-            <a:avLst/>
-          </a:prstGeom>
-          <a:noFill/>
-        </p:spPr>
-        <p:txBody>
-          <a:bodyPr wrap="square">
-            <a:spAutoFit/>
-          </a:bodyPr>
-          <a:lstStyle/>
-          <a:p>
-            <a:pPr algn="ctr"/>
-            <a:r>
-              <a:rPr sz="1200" b="0" i="0">
+              <a:t>0.944</a:t>
+            </a:r>
+          </a:p>
+        </p:txBody>
+      </p:sp>
+      <p:sp>
+        <p:nvSpPr>
+          <p:cNvPr id="56" name="TextBox 55"/>
+          <p:cNvSpPr txBox="1"/>
+          <p:nvPr/>
+        </p:nvSpPr>
+        <p:spPr>
+          <a:xfrm>
+            <a:off x="6163056" y="4745736"/>
+            <a:ext cx="1024127" cy="347472"/>
+          </a:xfrm>
+          <a:prstGeom prst="rect">
+            <a:avLst/>
+          </a:prstGeom>
+          <a:noFill/>
+        </p:spPr>
+        <p:txBody>
+          <a:bodyPr wrap="square">
+            <a:spAutoFit/>
+          </a:bodyPr>
+          <a:lstStyle/>
+          <a:p>
+            <a:pPr algn="ctr"/>
+            <a:r>
+              <a:rPr sz="1100" b="0" i="0">
                 <a:solidFill>
                   <a:srgbClr val="FFFFFF"/>
                 </a:solidFill>
               </a:rPr>
-              <a:t>0.529</a:t>
-            </a:r>
-          </a:p>
-        </p:txBody>
-      </p:sp>
-      <p:sp>
-        <p:nvSpPr>
-          <p:cNvPr id="52" name="TextBox 51"/>
-          <p:cNvSpPr txBox="1"/>
-          <p:nvPr/>
-        </p:nvSpPr>
-        <p:spPr>
-          <a:xfrm>
-            <a:off x="7644384" y="4370831"/>
-            <a:ext cx="1051560" cy="347472"/>
-          </a:xfrm>
-          <a:prstGeom prst="rect">
-            <a:avLst/>
-          </a:prstGeom>
-          <a:noFill/>
-        </p:spPr>
-        <p:txBody>
-          <a:bodyPr wrap="square">
-            <a:spAutoFit/>
-          </a:bodyPr>
-          <a:lstStyle/>
-          <a:p>
-            <a:pPr algn="ctr"/>
-            <a:r>
-              <a:rPr sz="1200" b="0" i="0">
+              <a:t>0.948</a:t>
+            </a:r>
+          </a:p>
+        </p:txBody>
+      </p:sp>
+      <p:sp>
+        <p:nvSpPr>
+          <p:cNvPr id="57" name="TextBox 56"/>
+          <p:cNvSpPr txBox="1"/>
+          <p:nvPr/>
+        </p:nvSpPr>
+        <p:spPr>
+          <a:xfrm>
+            <a:off x="7260336" y="4745736"/>
+            <a:ext cx="932688" cy="347472"/>
+          </a:xfrm>
+          <a:prstGeom prst="rect">
+            <a:avLst/>
+          </a:prstGeom>
+          <a:noFill/>
+        </p:spPr>
+        <p:txBody>
+          <a:bodyPr wrap="square">
+            <a:spAutoFit/>
+          </a:bodyPr>
+          <a:lstStyle/>
+          <a:p>
+            <a:pPr algn="ctr"/>
+            <a:r>
+              <a:rPr sz="1100" b="0" i="0">
                 <a:solidFill>
                   <a:srgbClr val="FFFFFF"/>
                 </a:solidFill>
               </a:rPr>
-              <a:t>0.564</a:t>
-            </a:r>
-          </a:p>
-        </p:txBody>
-      </p:sp>
-      <p:sp>
-        <p:nvSpPr>
-          <p:cNvPr id="53" name="TextBox 52"/>
-          <p:cNvSpPr txBox="1"/>
-          <p:nvPr/>
-        </p:nvSpPr>
-        <p:spPr>
-          <a:xfrm>
-            <a:off x="8787384" y="4370831"/>
-            <a:ext cx="1783079" cy="347472"/>
-          </a:xfrm>
-          <a:prstGeom prst="rect">
-            <a:avLst/>
-          </a:prstGeom>
-          <a:noFill/>
-        </p:spPr>
-        <p:txBody>
-          <a:bodyPr wrap="square">
-            <a:spAutoFit/>
-          </a:bodyPr>
-          <a:lstStyle/>
-          <a:p>
-            <a:pPr algn="ctr"/>
-            <a:r>
-              <a:rPr sz="1200" b="0" i="0">
-                <a:solidFill>
-                  <a:srgbClr val="FF9800"/>
-                </a:solidFill>
-              </a:rPr>
-              <a:t>Partial</a:t>
-            </a:r>
-          </a:p>
-        </p:txBody>
-      </p:sp>
-      <p:sp>
-        <p:nvSpPr>
-          <p:cNvPr id="54" name="Rectangle 53"/>
+              <a:t>0.876</a:t>
+            </a:r>
+          </a:p>
+        </p:txBody>
+      </p:sp>
+      <p:sp>
+        <p:nvSpPr>
+          <p:cNvPr id="58" name="TextBox 57"/>
+          <p:cNvSpPr txBox="1"/>
+          <p:nvPr/>
+        </p:nvSpPr>
+        <p:spPr>
+          <a:xfrm>
+            <a:off x="8266175" y="4745736"/>
+            <a:ext cx="932688" cy="347472"/>
+          </a:xfrm>
+          <a:prstGeom prst="rect">
+            <a:avLst/>
+          </a:prstGeom>
+          <a:noFill/>
+        </p:spPr>
+        <p:txBody>
+          <a:bodyPr wrap="square">
+            <a:spAutoFit/>
+          </a:bodyPr>
+          <a:lstStyle/>
+          <a:p>
+            <a:pPr algn="ctr"/>
+            <a:r>
+              <a:rPr sz="1100" b="0" i="0">
+                <a:solidFill>
+                  <a:srgbClr val="FFFFFF"/>
+                </a:solidFill>
+              </a:rPr>
+              <a:t>0.956</a:t>
+            </a:r>
+          </a:p>
+        </p:txBody>
+      </p:sp>
+      <p:sp>
+        <p:nvSpPr>
+          <p:cNvPr id="59" name="TextBox 58"/>
+          <p:cNvSpPr txBox="1"/>
+          <p:nvPr/>
+        </p:nvSpPr>
+        <p:spPr>
+          <a:xfrm>
+            <a:off x="9272015" y="4745736"/>
+            <a:ext cx="1755648" cy="347472"/>
+          </a:xfrm>
+          <a:prstGeom prst="rect">
+            <a:avLst/>
+          </a:prstGeom>
+          <a:noFill/>
+        </p:spPr>
+        <p:txBody>
+          <a:bodyPr wrap="square">
+            <a:spAutoFit/>
+          </a:bodyPr>
+          <a:lstStyle/>
+          <a:p>
+            <a:pPr algn="ctr"/>
+            <a:r>
+              <a:rPr sz="1100" b="1" i="0">
+                <a:solidFill>
+                  <a:srgbClr val="2196F3"/>
+                </a:solidFill>
+              </a:rPr>
+              <a:t>Utility ★</a:t>
+            </a:r>
+          </a:p>
+        </p:txBody>
+      </p:sp>
+      <p:sp>
+        <p:nvSpPr>
+          <p:cNvPr id="60" name="Rectangle 59"/>
           <p:cNvSpPr/>
           <p:nvPr/>
         </p:nvSpPr>
         <p:spPr>
           <a:xfrm>
-            <a:off x="274320" y="4873752"/>
-            <a:ext cx="11640312" cy="640080"/>
+            <a:off x="274320" y="5285232"/>
+            <a:ext cx="11640312" cy="722376"/>
           </a:xfrm>
           <a:prstGeom prst="rect">
             <a:avLst/>
@@ -17394,63 +18419,63 @@
       </p:sp>
       <p:sp>
         <p:nvSpPr>
-          <p:cNvPr id="55" name="TextBox 54"/>
-          <p:cNvSpPr txBox="1"/>
-          <p:nvPr/>
-        </p:nvSpPr>
-        <p:spPr>
-          <a:xfrm>
-            <a:off x="329184" y="5029200"/>
-            <a:ext cx="2560320" cy="347472"/>
-          </a:xfrm>
-          <a:prstGeom prst="rect">
-            <a:avLst/>
-          </a:prstGeom>
-          <a:noFill/>
-        </p:spPr>
-        <p:txBody>
-          <a:bodyPr wrap="square">
-            <a:spAutoFit/>
-          </a:bodyPr>
-          <a:lstStyle/>
-          <a:p>
-            <a:pPr algn="ctr"/>
-            <a:r>
-              <a:rPr sz="1200" b="1" i="0">
+          <p:cNvPr id="61" name="TextBox 60"/>
+          <p:cNvSpPr txBox="1"/>
+          <p:nvPr/>
+        </p:nvSpPr>
+        <p:spPr>
+          <a:xfrm>
+            <a:off x="310896" y="5486400"/>
+            <a:ext cx="2395728" cy="347472"/>
+          </a:xfrm>
+          <a:prstGeom prst="rect">
+            <a:avLst/>
+          </a:prstGeom>
+          <a:noFill/>
+        </p:spPr>
+        <p:txBody>
+          <a:bodyPr wrap="square">
+            <a:spAutoFit/>
+          </a:bodyPr>
+          <a:lstStyle/>
+          <a:p>
+            <a:pPr algn="ctr"/>
+            <a:r>
+              <a:rPr sz="1100" b="1" i="0">
                 <a:solidFill>
                   <a:srgbClr val="F5A623"/>
                 </a:solidFill>
               </a:rPr>
-              <a:t>FactorVAE (3 epochs)</a:t>
-            </a:r>
-          </a:p>
-        </p:txBody>
-      </p:sp>
-      <p:sp>
-        <p:nvSpPr>
-          <p:cNvPr id="56" name="TextBox 55"/>
-          <p:cNvSpPr txBox="1"/>
-          <p:nvPr/>
-        </p:nvSpPr>
-        <p:spPr>
-          <a:xfrm>
-            <a:off x="2980944" y="5029200"/>
-            <a:ext cx="1143000" cy="347472"/>
-          </a:xfrm>
-          <a:prstGeom prst="rect">
-            <a:avLst/>
-          </a:prstGeom>
-          <a:noFill/>
-        </p:spPr>
-        <p:txBody>
-          <a:bodyPr wrap="square">
-            <a:spAutoFit/>
-          </a:bodyPr>
-          <a:lstStyle/>
-          <a:p>
-            <a:pPr algn="ctr"/>
-            <a:r>
-              <a:rPr sz="1200" b="0" i="0">
+              <a:t>VQ-VAE</a:t>
+            </a:r>
+          </a:p>
+        </p:txBody>
+      </p:sp>
+      <p:sp>
+        <p:nvSpPr>
+          <p:cNvPr id="62" name="TextBox 61"/>
+          <p:cNvSpPr txBox="1"/>
+          <p:nvPr/>
+        </p:nvSpPr>
+        <p:spPr>
+          <a:xfrm>
+            <a:off x="2779776" y="5486400"/>
+            <a:ext cx="1069848" cy="347472"/>
+          </a:xfrm>
+          <a:prstGeom prst="rect">
+            <a:avLst/>
+          </a:prstGeom>
+          <a:noFill/>
+        </p:spPr>
+        <p:txBody>
+          <a:bodyPr wrap="square">
+            <a:spAutoFit/>
+          </a:bodyPr>
+          <a:lstStyle/>
+          <a:p>
+            <a:pPr algn="ctr"/>
+            <a:r>
+              <a:rPr sz="1100" b="0" i="0">
                 <a:solidFill>
                   <a:srgbClr val="FFFFFF"/>
                 </a:solidFill>
@@ -17462,135 +18487,169 @@
       </p:sp>
       <p:sp>
         <p:nvSpPr>
-          <p:cNvPr id="57" name="TextBox 56"/>
-          <p:cNvSpPr txBox="1"/>
-          <p:nvPr/>
-        </p:nvSpPr>
-        <p:spPr>
-          <a:xfrm>
-            <a:off x="4215383" y="5029200"/>
-            <a:ext cx="1143000" cy="347472"/>
-          </a:xfrm>
-          <a:prstGeom prst="rect">
-            <a:avLst/>
-          </a:prstGeom>
-          <a:noFill/>
-        </p:spPr>
-        <p:txBody>
-          <a:bodyPr wrap="square">
-            <a:spAutoFit/>
-          </a:bodyPr>
-          <a:lstStyle/>
-          <a:p>
-            <a:pPr algn="ctr"/>
-            <a:r>
-              <a:rPr sz="1200" b="0" i="0">
-                <a:solidFill>
-                  <a:srgbClr val="FF9800"/>
-                </a:solidFill>
-              </a:rPr>
-              <a:t>64.3%</a:t>
-            </a:r>
-          </a:p>
-        </p:txBody>
-      </p:sp>
-      <p:sp>
-        <p:nvSpPr>
-          <p:cNvPr id="58" name="TextBox 57"/>
-          <p:cNvSpPr txBox="1"/>
-          <p:nvPr/>
-        </p:nvSpPr>
-        <p:spPr>
-          <a:xfrm>
-            <a:off x="5449824" y="5029200"/>
-            <a:ext cx="1005839" cy="347472"/>
-          </a:xfrm>
-          <a:prstGeom prst="rect">
-            <a:avLst/>
-          </a:prstGeom>
-          <a:noFill/>
-        </p:spPr>
-        <p:txBody>
-          <a:bodyPr wrap="square">
-            <a:spAutoFit/>
-          </a:bodyPr>
-          <a:lstStyle/>
-          <a:p>
-            <a:pPr algn="ctr"/>
-            <a:r>
-              <a:rPr sz="1200" b="0" i="0">
+          <p:cNvPr id="63" name="TextBox 62"/>
+          <p:cNvSpPr txBox="1"/>
+          <p:nvPr/>
+        </p:nvSpPr>
+        <p:spPr>
+          <a:xfrm>
+            <a:off x="3922776" y="5486400"/>
+            <a:ext cx="1069848" cy="347472"/>
+          </a:xfrm>
+          <a:prstGeom prst="rect">
+            <a:avLst/>
+          </a:prstGeom>
+          <a:noFill/>
+        </p:spPr>
+        <p:txBody>
+          <a:bodyPr wrap="square">
+            <a:spAutoFit/>
+          </a:bodyPr>
+          <a:lstStyle/>
+          <a:p>
+            <a:pPr algn="ctr"/>
+            <a:r>
+              <a:rPr sz="1100" b="0" i="0">
+                <a:solidFill>
+                  <a:srgbClr val="4CAF50"/>
+                </a:solidFill>
+              </a:rPr>
+              <a:t>76.2%</a:t>
+            </a:r>
+          </a:p>
+        </p:txBody>
+      </p:sp>
+      <p:sp>
+        <p:nvSpPr>
+          <p:cNvPr id="64" name="TextBox 63"/>
+          <p:cNvSpPr txBox="1"/>
+          <p:nvPr/>
+        </p:nvSpPr>
+        <p:spPr>
+          <a:xfrm>
+            <a:off x="5065776" y="5486400"/>
+            <a:ext cx="1024127" cy="347472"/>
+          </a:xfrm>
+          <a:prstGeom prst="rect">
+            <a:avLst/>
+          </a:prstGeom>
+          <a:noFill/>
+        </p:spPr>
+        <p:txBody>
+          <a:bodyPr wrap="square">
+            <a:spAutoFit/>
+          </a:bodyPr>
+          <a:lstStyle/>
+          <a:p>
+            <a:pPr algn="ctr"/>
+            <a:r>
+              <a:rPr sz="1100" b="0" i="0">
                 <a:solidFill>
                   <a:srgbClr val="FFFFFF"/>
                 </a:solidFill>
               </a:rPr>
-              <a:t>0.595</a:t>
-            </a:r>
-          </a:p>
-        </p:txBody>
-      </p:sp>
-      <p:sp>
-        <p:nvSpPr>
-          <p:cNvPr id="59" name="TextBox 58"/>
-          <p:cNvSpPr txBox="1"/>
-          <p:nvPr/>
-        </p:nvSpPr>
-        <p:spPr>
-          <a:xfrm>
-            <a:off x="6547104" y="5029200"/>
-            <a:ext cx="1005839" cy="347472"/>
-          </a:xfrm>
-          <a:prstGeom prst="rect">
-            <a:avLst/>
-          </a:prstGeom>
-          <a:noFill/>
-        </p:spPr>
-        <p:txBody>
-          <a:bodyPr wrap="square">
-            <a:spAutoFit/>
-          </a:bodyPr>
-          <a:lstStyle/>
-          <a:p>
-            <a:pPr algn="ctr"/>
-            <a:r>
-              <a:rPr sz="1200" b="0" i="0">
+              <a:t>0.512</a:t>
+            </a:r>
+          </a:p>
+        </p:txBody>
+      </p:sp>
+      <p:sp>
+        <p:nvSpPr>
+          <p:cNvPr id="65" name="TextBox 64"/>
+          <p:cNvSpPr txBox="1"/>
+          <p:nvPr/>
+        </p:nvSpPr>
+        <p:spPr>
+          <a:xfrm>
+            <a:off x="6163056" y="5486400"/>
+            <a:ext cx="1024127" cy="347472"/>
+          </a:xfrm>
+          <a:prstGeom prst="rect">
+            <a:avLst/>
+          </a:prstGeom>
+          <a:noFill/>
+        </p:spPr>
+        <p:txBody>
+          <a:bodyPr wrap="square">
+            <a:spAutoFit/>
+          </a:bodyPr>
+          <a:lstStyle/>
+          <a:p>
+            <a:pPr algn="ctr"/>
+            <a:r>
+              <a:rPr sz="1100" b="0" i="0">
                 <a:solidFill>
                   <a:srgbClr val="FFFFFF"/>
                 </a:solidFill>
               </a:rPr>
-              <a:t>0.752</a:t>
-            </a:r>
-          </a:p>
-        </p:txBody>
-      </p:sp>
-      <p:sp>
-        <p:nvSpPr>
-          <p:cNvPr id="60" name="TextBox 59"/>
-          <p:cNvSpPr txBox="1"/>
-          <p:nvPr/>
-        </p:nvSpPr>
-        <p:spPr>
-          <a:xfrm>
-            <a:off x="7644384" y="5029200"/>
-            <a:ext cx="1051560" cy="347472"/>
-          </a:xfrm>
-          <a:prstGeom prst="rect">
-            <a:avLst/>
-          </a:prstGeom>
-          <a:noFill/>
-        </p:spPr>
-        <p:txBody>
-          <a:bodyPr wrap="square">
-            <a:spAutoFit/>
-          </a:bodyPr>
-          <a:lstStyle/>
-          <a:p>
-            <a:pPr algn="ctr"/>
-            <a:r>
-              <a:rPr sz="1200" b="0" i="0">
+              <a:t>0.509</a:t>
+            </a:r>
+          </a:p>
+        </p:txBody>
+      </p:sp>
+      <p:sp>
+        <p:nvSpPr>
+          <p:cNvPr id="66" name="TextBox 65"/>
+          <p:cNvSpPr txBox="1"/>
+          <p:nvPr/>
+        </p:nvSpPr>
+        <p:spPr>
+          <a:xfrm>
+            <a:off x="7260336" y="5486400"/>
+            <a:ext cx="932688" cy="347472"/>
+          </a:xfrm>
+          <a:prstGeom prst="rect">
+            <a:avLst/>
+          </a:prstGeom>
+          <a:noFill/>
+        </p:spPr>
+        <p:txBody>
+          <a:bodyPr wrap="square">
+            <a:spAutoFit/>
+          </a:bodyPr>
+          <a:lstStyle/>
+          <a:p>
+            <a:pPr algn="ctr"/>
+            <a:r>
+              <a:rPr sz="1100" b="0" i="0">
                 <a:solidFill>
                   <a:srgbClr val="FFFFFF"/>
                 </a:solidFill>
               </a:rPr>
+              <a:t>—</a:t>
+            </a:r>
+          </a:p>
+        </p:txBody>
+      </p:sp>
+      <p:sp>
+        <p:nvSpPr>
+          <p:cNvPr id="67" name="TextBox 66"/>
+          <p:cNvSpPr txBox="1"/>
+          <p:nvPr/>
+        </p:nvSpPr>
+        <p:spPr>
+          <a:xfrm>
+            <a:off x="8266175" y="5486400"/>
+            <a:ext cx="932688" cy="347472"/>
+          </a:xfrm>
+          <a:prstGeom prst="rect">
+            <a:avLst/>
+          </a:prstGeom>
+          <a:noFill/>
+        </p:spPr>
+        <p:txBody>
+          <a:bodyPr wrap="square">
+            <a:spAutoFit/>
+          </a:bodyPr>
+          <a:lstStyle/>
+          <a:p>
+            <a:pPr algn="ctr"/>
+            <a:r>
+              <a:rPr sz="1100" b="0" i="0">
+                <a:solidFill>
+                  <a:srgbClr val="FFFFFF"/>
+                </a:solidFill>
+              </a:rPr>
               <a:t>0.000</a:t>
             </a:r>
           </a:p>
@@ -17598,29 +18657,29 @@
       </p:sp>
       <p:sp>
         <p:nvSpPr>
-          <p:cNvPr id="61" name="TextBox 60"/>
-          <p:cNvSpPr txBox="1"/>
-          <p:nvPr/>
-        </p:nvSpPr>
-        <p:spPr>
-          <a:xfrm>
-            <a:off x="8787384" y="5029200"/>
-            <a:ext cx="1783079" cy="347472"/>
-          </a:xfrm>
-          <a:prstGeom prst="rect">
-            <a:avLst/>
-          </a:prstGeom>
-          <a:noFill/>
-        </p:spPr>
-        <p:txBody>
-          <a:bodyPr wrap="square">
-            <a:spAutoFit/>
-          </a:bodyPr>
-          <a:lstStyle/>
-          <a:p>
-            <a:pPr algn="ctr"/>
-            <a:r>
-              <a:rPr sz="1200" b="0" i="0">
+          <p:cNvPr id="68" name="TextBox 67"/>
+          <p:cNvSpPr txBox="1"/>
+          <p:nvPr/>
+        </p:nvSpPr>
+        <p:spPr>
+          <a:xfrm>
+            <a:off x="9272015" y="5486400"/>
+            <a:ext cx="1755648" cy="347472"/>
+          </a:xfrm>
+          <a:prstGeom prst="rect">
+            <a:avLst/>
+          </a:prstGeom>
+          <a:noFill/>
+        </p:spPr>
+        <p:txBody>
+          <a:bodyPr wrap="square">
+            <a:spAutoFit/>
+          </a:bodyPr>
+          <a:lstStyle/>
+          <a:p>
+            <a:pPr algn="ctr"/>
+            <a:r>
+              <a:rPr sz="1100" b="1" i="0">
                 <a:solidFill>
                   <a:srgbClr val="E84A35"/>
                 </a:solidFill>
@@ -17632,288 +18691,7 @@
       </p:sp>
       <p:sp>
         <p:nvSpPr>
-          <p:cNvPr id="62" name="Rectangle 61"/>
-          <p:cNvSpPr/>
-          <p:nvPr/>
-        </p:nvSpPr>
-        <p:spPr>
-          <a:xfrm>
-            <a:off x="274320" y="5532120"/>
-            <a:ext cx="11640312" cy="640080"/>
-          </a:xfrm>
-          <a:prstGeom prst="rect">
-            <a:avLst/>
-          </a:prstGeom>
-          <a:solidFill>
-            <a:srgbClr val="1C1C3A"/>
-          </a:solidFill>
-          <a:ln>
-            <a:noFill/>
-          </a:ln>
-        </p:spPr>
-        <p:style>
-          <a:lnRef idx="1">
-            <a:schemeClr val="accent1"/>
-          </a:lnRef>
-          <a:fillRef idx="3">
-            <a:schemeClr val="accent1"/>
-          </a:fillRef>
-          <a:effectRef idx="2">
-            <a:schemeClr val="accent1"/>
-          </a:effectRef>
-          <a:fontRef idx="minor">
-            <a:schemeClr val="lt1"/>
-          </a:fontRef>
-        </p:style>
-        <p:txBody>
-          <a:bodyPr rtlCol="0" anchor="ctr"/>
-          <a:lstStyle/>
-          <a:p>
-            <a:pPr algn="ctr"/>
-          </a:p>
-        </p:txBody>
-      </p:sp>
-      <p:sp>
-        <p:nvSpPr>
-          <p:cNvPr id="63" name="TextBox 62"/>
-          <p:cNvSpPr txBox="1"/>
-          <p:nvPr/>
-        </p:nvSpPr>
-        <p:spPr>
-          <a:xfrm>
-            <a:off x="329184" y="5687568"/>
-            <a:ext cx="2560320" cy="347472"/>
-          </a:xfrm>
-          <a:prstGeom prst="rect">
-            <a:avLst/>
-          </a:prstGeom>
-          <a:noFill/>
-        </p:spPr>
-        <p:txBody>
-          <a:bodyPr wrap="square">
-            <a:spAutoFit/>
-          </a:bodyPr>
-          <a:lstStyle/>
-          <a:p>
-            <a:pPr algn="ctr"/>
-            <a:r>
-              <a:rPr sz="1200" b="1" i="0">
-                <a:solidFill>
-                  <a:srgbClr val="F5A623"/>
-                </a:solidFill>
-              </a:rPr>
-              <a:t>VQ-VAE</a:t>
-            </a:r>
-          </a:p>
-        </p:txBody>
-      </p:sp>
-      <p:sp>
-        <p:nvSpPr>
-          <p:cNvPr id="64" name="TextBox 63"/>
-          <p:cNvSpPr txBox="1"/>
-          <p:nvPr/>
-        </p:nvSpPr>
-        <p:spPr>
-          <a:xfrm>
-            <a:off x="2980944" y="5687568"/>
-            <a:ext cx="1143000" cy="347472"/>
-          </a:xfrm>
-          <a:prstGeom prst="rect">
-            <a:avLst/>
-          </a:prstGeom>
-          <a:noFill/>
-        </p:spPr>
-        <p:txBody>
-          <a:bodyPr wrap="square">
-            <a:spAutoFit/>
-          </a:bodyPr>
-          <a:lstStyle/>
-          <a:p>
-            <a:pPr algn="ctr"/>
-            <a:r>
-              <a:rPr sz="1200" b="0" i="0">
-                <a:solidFill>
-                  <a:srgbClr val="FFFFFF"/>
-                </a:solidFill>
-              </a:rPr>
-              <a:t>46.1%</a:t>
-            </a:r>
-          </a:p>
-        </p:txBody>
-      </p:sp>
-      <p:sp>
-        <p:nvSpPr>
-          <p:cNvPr id="65" name="TextBox 64"/>
-          <p:cNvSpPr txBox="1"/>
-          <p:nvPr/>
-        </p:nvSpPr>
-        <p:spPr>
-          <a:xfrm>
-            <a:off x="4215383" y="5687568"/>
-            <a:ext cx="1143000" cy="347472"/>
-          </a:xfrm>
-          <a:prstGeom prst="rect">
-            <a:avLst/>
-          </a:prstGeom>
-          <a:noFill/>
-        </p:spPr>
-        <p:txBody>
-          <a:bodyPr wrap="square">
-            <a:spAutoFit/>
-          </a:bodyPr>
-          <a:lstStyle/>
-          <a:p>
-            <a:pPr algn="ctr"/>
-            <a:r>
-              <a:rPr sz="1200" b="0" i="0">
-                <a:solidFill>
-                  <a:srgbClr val="FFFFFF"/>
-                </a:solidFill>
-              </a:rPr>
-              <a:t>76.2%</a:t>
-            </a:r>
-          </a:p>
-        </p:txBody>
-      </p:sp>
-      <p:sp>
-        <p:nvSpPr>
-          <p:cNvPr id="66" name="TextBox 65"/>
-          <p:cNvSpPr txBox="1"/>
-          <p:nvPr/>
-        </p:nvSpPr>
-        <p:spPr>
-          <a:xfrm>
-            <a:off x="5449824" y="5687568"/>
-            <a:ext cx="1005839" cy="347472"/>
-          </a:xfrm>
-          <a:prstGeom prst="rect">
-            <a:avLst/>
-          </a:prstGeom>
-          <a:noFill/>
-        </p:spPr>
-        <p:txBody>
-          <a:bodyPr wrap="square">
-            <a:spAutoFit/>
-          </a:bodyPr>
-          <a:lstStyle/>
-          <a:p>
-            <a:pPr algn="ctr"/>
-            <a:r>
-              <a:rPr sz="1200" b="0" i="0">
-                <a:solidFill>
-                  <a:srgbClr val="FFFFFF"/>
-                </a:solidFill>
-              </a:rPr>
-              <a:t>0.512</a:t>
-            </a:r>
-          </a:p>
-        </p:txBody>
-      </p:sp>
-      <p:sp>
-        <p:nvSpPr>
-          <p:cNvPr id="67" name="TextBox 66"/>
-          <p:cNvSpPr txBox="1"/>
-          <p:nvPr/>
-        </p:nvSpPr>
-        <p:spPr>
-          <a:xfrm>
-            <a:off x="6547104" y="5687568"/>
-            <a:ext cx="1005839" cy="347472"/>
-          </a:xfrm>
-          <a:prstGeom prst="rect">
-            <a:avLst/>
-          </a:prstGeom>
-          <a:noFill/>
-        </p:spPr>
-        <p:txBody>
-          <a:bodyPr wrap="square">
-            <a:spAutoFit/>
-          </a:bodyPr>
-          <a:lstStyle/>
-          <a:p>
-            <a:pPr algn="ctr"/>
-            <a:r>
-              <a:rPr sz="1200" b="0" i="0">
-                <a:solidFill>
-                  <a:srgbClr val="FFFFFF"/>
-                </a:solidFill>
-              </a:rPr>
-              <a:t>0.509</a:t>
-            </a:r>
-          </a:p>
-        </p:txBody>
-      </p:sp>
-      <p:sp>
-        <p:nvSpPr>
-          <p:cNvPr id="68" name="TextBox 67"/>
-          <p:cNvSpPr txBox="1"/>
-          <p:nvPr/>
-        </p:nvSpPr>
-        <p:spPr>
-          <a:xfrm>
-            <a:off x="7644384" y="5687568"/>
-            <a:ext cx="1051560" cy="347472"/>
-          </a:xfrm>
-          <a:prstGeom prst="rect">
-            <a:avLst/>
-          </a:prstGeom>
-          <a:noFill/>
-        </p:spPr>
-        <p:txBody>
-          <a:bodyPr wrap="square">
-            <a:spAutoFit/>
-          </a:bodyPr>
-          <a:lstStyle/>
-          <a:p>
-            <a:pPr algn="ctr"/>
-            <a:r>
-              <a:rPr sz="1200" b="0" i="0">
-                <a:solidFill>
-                  <a:srgbClr val="FFFFFF"/>
-                </a:solidFill>
-              </a:rPr>
-              <a:t>0.000</a:t>
-            </a:r>
-          </a:p>
-        </p:txBody>
-      </p:sp>
-      <p:sp>
-        <p:nvSpPr>
-          <p:cNvPr id="69" name="TextBox 68"/>
-          <p:cNvSpPr txBox="1"/>
-          <p:nvPr/>
-        </p:nvSpPr>
-        <p:spPr>
-          <a:xfrm>
-            <a:off x="8787384" y="5687568"/>
-            <a:ext cx="1783079" cy="347472"/>
-          </a:xfrm>
-          <a:prstGeom prst="rect">
-            <a:avLst/>
-          </a:prstGeom>
-          <a:noFill/>
-        </p:spPr>
-        <p:txBody>
-          <a:bodyPr wrap="square">
-            <a:spAutoFit/>
-          </a:bodyPr>
-          <a:lstStyle/>
-          <a:p>
-            <a:pPr algn="ctr"/>
-            <a:r>
-              <a:rPr sz="1200" b="0" i="0">
-                <a:solidFill>
-                  <a:srgbClr val="E84A35"/>
-                </a:solidFill>
-              </a:rPr>
-              <a:t>Collapsed</a:t>
-            </a:r>
-          </a:p>
-        </p:txBody>
-      </p:sp>
-      <p:sp>
-        <p:nvSpPr>
-          <p:cNvPr id="70" name="Rectangle 69"/>
+          <p:cNvPr id="69" name="Rectangle 68"/>
           <p:cNvSpPr/>
           <p:nvPr/>
         </p:nvSpPr>
@@ -17956,7 +18734,7 @@
       </p:sp>
       <p:sp>
         <p:nvSpPr>
-          <p:cNvPr id="71" name="TextBox 70"/>
+          <p:cNvPr id="70" name="TextBox 69"/>
           <p:cNvSpPr txBox="1"/>
           <p:nvPr/>
         </p:nvSpPr>
@@ -17983,7 +18761,7 @@
                   <a:srgbClr val="A0B4C8"/>
                 </a:solidFill>
               </a:rPr>
-              <a:t>Goal: Utility &gt; 85%  and  Privacy ≈ 50%.  Best NAG: ResidualVAE (0.988)</a:t>
+              <a:t>Best Utility: FactorVAE 87.0%  ·  Best Privacy: BetaTCVAE/BetaVAE 85.3-85.5%  ·  Best Balance (NAG): ResidualVAE 0.988</a:t>
             </a:r>
           </a:p>
         </p:txBody>
@@ -18230,7 +19008,7 @@
                   <a:srgbClr val="A0B4C8"/>
                 </a:solidFill>
               </a:rPr>
-              <a:t>Privacy accuracy should be ≈50% (random).  All models score 85–90% — the adversary can still predict gender well.</a:t>
+              <a:t>FactorVAE: best utility (87%).  BetaTCVAE &amp; BetaVAE: best privacy (85.3-85.5%).  All models still leak gender — ideal is 50%.</a:t>
             </a:r>
           </a:p>
         </p:txBody>
